--- a/project-final.pptx
+++ b/project-final.pptx
@@ -3591,7 +3591,7 @@
                 </a:solidFill>
                 <a:latin typeface="Calibri"/>
               </a:rPr>
-              <a:t>Dept. of Computer Science &amp; Engineering  ·  Bhilati Institute of Technology, Durg</a:t>
+              <a:t>Dept. of Computer Science &amp; Engineering  ·  Bhilai Institute of Technology, Durg</a:t>
             </a:r>
           </a:p>
         </p:txBody>

--- a/project-final.pptx
+++ b/project-final.pptx
@@ -19328,7 +19328,7 @@
                 </a:solidFill>
                 <a:latin typeface="Consolas"/>
               </a:rPr>
-              <a:t>._x000D_un.ps1</a:t>
+              <a:t>.\run.ps1</a:t>
             </a:r>
           </a:p>
         </p:txBody>

--- a/project-final.pptx
+++ b/project-final.pptx
@@ -3591,7 +3591,7 @@
                 </a:solidFill>
                 <a:latin typeface="Calibri"/>
               </a:rPr>
-              <a:t>Dept. of Computer Science &amp; Engineering  ·  Bhilai Institute of Technology, Durg</a:t>
+              <a:t>Dept. of Computer Science &amp; Engineering  ·  Vellore Institute of Technology, Vellore</a:t>
             </a:r>
           </a:p>
         </p:txBody>

--- a/project-final.pptx
+++ b/project-final.pptx
@@ -8,6 +8,8 @@
     <p:sldId id="256" r:id="rId7"/>
     <p:sldId id="257" r:id="rId8"/>
     <p:sldId id="258" r:id="rId9"/>
+    <p:sldId id="283" r:id="rId34"/>
+    <p:sldId id="284" r:id="rId35"/>
     <p:sldId id="259" r:id="rId10"/>
     <p:sldId id="260" r:id="rId11"/>
     <p:sldId id="261" r:id="rId12"/>
@@ -19,6 +21,7 @@
     <p:sldId id="267" r:id="rId18"/>
     <p:sldId id="268" r:id="rId19"/>
     <p:sldId id="269" r:id="rId20"/>
+    <p:sldId id="285" r:id="rId36"/>
     <p:sldId id="270" r:id="rId21"/>
     <p:sldId id="271" r:id="rId22"/>
     <p:sldId id="272" r:id="rId23"/>
@@ -30,6 +33,7 @@
     <p:sldId id="278" r:id="rId29"/>
     <p:sldId id="279" r:id="rId30"/>
     <p:sldId id="280" r:id="rId31"/>
+    <p:sldId id="286" r:id="rId37"/>
     <p:sldId id="281" r:id="rId32"/>
     <p:sldId id="282" r:id="rId33"/>
   </p:sldIdLst>
@@ -131,6 +135,2526 @@
     </a:lvl9pPr>
   </p:defaultTextStyle>
 </p:presentation>
+</file>
+
+<file path=ppt/notesMasters/notesMaster1.xml><?xml version="1.0" encoding="utf-8"?>
+<p:notesMaster xmlns:a="http://schemas.openxmlformats.org/drawingml/2006/main" xmlns:p="http://schemas.openxmlformats.org/presentationml/2006/main" xmlns:r="http://schemas.openxmlformats.org/officeDocument/2006/relationships">
+  <p:cSld>
+    <p:bg>
+      <p:bgRef idx="1001">
+        <a:schemeClr val="bg1"/>
+      </p:bgRef>
+    </p:bg>
+    <p:spTree>
+      <p:nvGrpSpPr>
+        <p:cNvPr id="1" name=""/>
+        <p:cNvGrpSpPr/>
+        <p:nvPr/>
+      </p:nvGrpSpPr>
+      <p:grpSpPr>
+        <a:xfrm>
+          <a:off x="0" y="0"/>
+          <a:ext cx="0" cy="0"/>
+          <a:chOff x="0" y="0"/>
+          <a:chExt cx="0" cy="0"/>
+        </a:xfrm>
+      </p:grpSpPr>
+      <p:sp>
+        <p:nvSpPr>
+          <p:cNvPr id="2" name="Header Placeholder 1"/>
+          <p:cNvSpPr>
+            <a:spLocks noGrp="1"/>
+          </p:cNvSpPr>
+          <p:nvPr>
+            <p:ph type="hdr" sz="quarter"/>
+          </p:nvPr>
+        </p:nvSpPr>
+        <p:spPr>
+          <a:xfrm>
+            <a:off x="0" y="0"/>
+            <a:ext cx="2971800" cy="457200"/>
+          </a:xfrm>
+          <a:prstGeom prst="rect">
+            <a:avLst/>
+          </a:prstGeom>
+        </p:spPr>
+        <p:txBody>
+          <a:bodyPr vert="horz" lIns="91440" tIns="45720" rIns="91440" bIns="45720" rtlCol="0"/>
+          <a:lstStyle>
+            <a:lvl1pPr algn="l">
+              <a:defRPr sz="1200"/>
+            </a:lvl1pPr>
+          </a:lstStyle>
+          <a:p>
+            <a:endParaRPr lang="en-US"/>
+          </a:p>
+        </p:txBody>
+      </p:sp>
+      <p:sp>
+        <p:nvSpPr>
+          <p:cNvPr id="3" name="Date Placeholder 2"/>
+          <p:cNvSpPr>
+            <a:spLocks noGrp="1"/>
+          </p:cNvSpPr>
+          <p:nvPr>
+            <p:ph type="dt" idx="1"/>
+          </p:nvPr>
+        </p:nvSpPr>
+        <p:spPr>
+          <a:xfrm>
+            <a:off x="3884613" y="0"/>
+            <a:ext cx="2971800" cy="457200"/>
+          </a:xfrm>
+          <a:prstGeom prst="rect">
+            <a:avLst/>
+          </a:prstGeom>
+        </p:spPr>
+        <p:txBody>
+          <a:bodyPr vert="horz" lIns="91440" tIns="45720" rIns="91440" bIns="45720" rtlCol="0"/>
+          <a:lstStyle>
+            <a:lvl1pPr algn="r">
+              <a:defRPr sz="1200"/>
+            </a:lvl1pPr>
+          </a:lstStyle>
+          <a:p>
+            <a:fld id="{0F89C1C7-3DCD-1040-A9CF-14679D8B5DDD}" type="datetimeFigureOut">
+              <a:rPr lang="en-US" smtClean="0"/>
+              <a:t>10/17/16</a:t>
+            </a:fld>
+            <a:endParaRPr lang="en-US"/>
+          </a:p>
+        </p:txBody>
+      </p:sp>
+      <p:sp>
+        <p:nvSpPr>
+          <p:cNvPr id="4" name="Slide Image Placeholder 3"/>
+          <p:cNvSpPr>
+            <a:spLocks noGrp="1" noRot="1" noChangeAspect="1"/>
+          </p:cNvSpPr>
+          <p:nvPr>
+            <p:ph type="sldImg" idx="2"/>
+          </p:nvPr>
+        </p:nvSpPr>
+        <p:spPr>
+          <a:xfrm>
+            <a:off x="1143000" y="685800"/>
+            <a:ext cx="4572000" cy="3429000"/>
+          </a:xfrm>
+          <a:prstGeom prst="rect">
+            <a:avLst/>
+          </a:prstGeom>
+          <a:noFill/>
+          <a:ln w="12700">
+            <a:solidFill>
+              <a:prstClr val="black"/>
+            </a:solidFill>
+          </a:ln>
+        </p:spPr>
+        <p:txBody>
+          <a:bodyPr vert="horz" lIns="91440" tIns="45720" rIns="91440" bIns="45720" rtlCol="0" anchor="ctr"/>
+          <a:lstStyle/>
+          <a:p>
+            <a:endParaRPr lang="en-US"/>
+          </a:p>
+        </p:txBody>
+      </p:sp>
+      <p:sp>
+        <p:nvSpPr>
+          <p:cNvPr id="5" name="Notes Placeholder 4"/>
+          <p:cNvSpPr>
+            <a:spLocks noGrp="1"/>
+          </p:cNvSpPr>
+          <p:nvPr>
+            <p:ph type="body" sz="quarter" idx="3"/>
+          </p:nvPr>
+        </p:nvSpPr>
+        <p:spPr>
+          <a:xfrm>
+            <a:off x="685800" y="4343400"/>
+            <a:ext cx="5486400" cy="4114800"/>
+          </a:xfrm>
+          <a:prstGeom prst="rect">
+            <a:avLst/>
+          </a:prstGeom>
+        </p:spPr>
+        <p:txBody>
+          <a:bodyPr vert="horz" lIns="91440" tIns="45720" rIns="91440" bIns="45720" rtlCol="0"/>
+          <a:lstStyle/>
+          <a:p>
+            <a:pPr lvl="0"/>
+            <a:r>
+              <a:rPr lang="en-US" smtClean="0"/>
+              <a:t>Click to edit Master text styles</a:t>
+            </a:r>
+          </a:p>
+          <a:p>
+            <a:pPr lvl="1"/>
+            <a:r>
+              <a:rPr lang="en-US" smtClean="0"/>
+              <a:t>Second level</a:t>
+            </a:r>
+          </a:p>
+          <a:p>
+            <a:pPr lvl="2"/>
+            <a:r>
+              <a:rPr lang="en-US" smtClean="0"/>
+              <a:t>Third level</a:t>
+            </a:r>
+          </a:p>
+          <a:p>
+            <a:pPr lvl="3"/>
+            <a:r>
+              <a:rPr lang="en-US" smtClean="0"/>
+              <a:t>Fourth level</a:t>
+            </a:r>
+          </a:p>
+          <a:p>
+            <a:pPr lvl="4"/>
+            <a:r>
+              <a:rPr lang="en-US" smtClean="0"/>
+              <a:t>Fifth level</a:t>
+            </a:r>
+            <a:endParaRPr lang="en-US"/>
+          </a:p>
+        </p:txBody>
+      </p:sp>
+      <p:sp>
+        <p:nvSpPr>
+          <p:cNvPr id="6" name="Footer Placeholder 5"/>
+          <p:cNvSpPr>
+            <a:spLocks noGrp="1"/>
+          </p:cNvSpPr>
+          <p:nvPr>
+            <p:ph type="ftr" sz="quarter" idx="4"/>
+          </p:nvPr>
+        </p:nvSpPr>
+        <p:spPr>
+          <a:xfrm>
+            <a:off x="0" y="8685213"/>
+            <a:ext cx="2971800" cy="457200"/>
+          </a:xfrm>
+          <a:prstGeom prst="rect">
+            <a:avLst/>
+          </a:prstGeom>
+        </p:spPr>
+        <p:txBody>
+          <a:bodyPr vert="horz" lIns="91440" tIns="45720" rIns="91440" bIns="45720" rtlCol="0" anchor="b"/>
+          <a:lstStyle>
+            <a:lvl1pPr algn="l">
+              <a:defRPr sz="1200"/>
+            </a:lvl1pPr>
+          </a:lstStyle>
+          <a:p>
+            <a:endParaRPr lang="en-US"/>
+          </a:p>
+        </p:txBody>
+      </p:sp>
+      <p:sp>
+        <p:nvSpPr>
+          <p:cNvPr id="7" name="Slide Number Placeholder 6"/>
+          <p:cNvSpPr>
+            <a:spLocks noGrp="1"/>
+          </p:cNvSpPr>
+          <p:nvPr>
+            <p:ph type="sldNum" sz="quarter" idx="5"/>
+          </p:nvPr>
+        </p:nvSpPr>
+        <p:spPr>
+          <a:xfrm>
+            <a:off x="3884613" y="8685213"/>
+            <a:ext cx="2971800" cy="457200"/>
+          </a:xfrm>
+          <a:prstGeom prst="rect">
+            <a:avLst/>
+          </a:prstGeom>
+        </p:spPr>
+        <p:txBody>
+          <a:bodyPr vert="horz" lIns="91440" tIns="45720" rIns="91440" bIns="45720" rtlCol="0" anchor="b"/>
+          <a:lstStyle>
+            <a:lvl1pPr algn="r">
+              <a:defRPr sz="1200"/>
+            </a:lvl1pPr>
+          </a:lstStyle>
+          <a:p>
+            <a:fld id="{BB5E49A5-4136-284D-997B-48E1D791AD67}" type="slidenum">
+              <a:rPr lang="en-US" smtClean="0"/>
+              <a:t>‹#›</a:t>
+            </a:fld>
+            <a:endParaRPr lang="en-US"/>
+          </a:p>
+        </p:txBody>
+      </p:sp>
+    </p:spTree>
+    <p:extLst>
+      <p:ext uri="{BB962C8B-B14F-4D97-AF65-F5344CB8AC3E}">
+        <p14:creationId xmlns:p14="http://schemas.microsoft.com/office/powerpoint/2010/main" val="2623252185"/>
+      </p:ext>
+    </p:extLst>
+  </p:cSld>
+  <p:clrMap bg1="lt1" tx1="dk1" bg2="lt2" tx2="dk2" accent1="accent1" accent2="accent2" accent3="accent3" accent4="accent4" accent5="accent5" accent6="accent6" hlink="hlink" folHlink="folHlink"/>
+  <p:notesStyle>
+    <a:lvl1pPr marL="0" algn="l" defTabSz="457200" rtl="0" eaLnBrk="1" latinLnBrk="0" hangingPunct="1">
+      <a:defRPr sz="1200" kern="1200">
+        <a:solidFill>
+          <a:schemeClr val="tx1"/>
+        </a:solidFill>
+        <a:latin typeface="+mn-lt"/>
+        <a:ea typeface="+mn-ea"/>
+        <a:cs typeface="+mn-cs"/>
+      </a:defRPr>
+    </a:lvl1pPr>
+    <a:lvl2pPr marL="457200" algn="l" defTabSz="457200" rtl="0" eaLnBrk="1" latinLnBrk="0" hangingPunct="1">
+      <a:defRPr sz="1200" kern="1200">
+        <a:solidFill>
+          <a:schemeClr val="tx1"/>
+        </a:solidFill>
+        <a:latin typeface="+mn-lt"/>
+        <a:ea typeface="+mn-ea"/>
+        <a:cs typeface="+mn-cs"/>
+      </a:defRPr>
+    </a:lvl2pPr>
+    <a:lvl3pPr marL="914400" algn="l" defTabSz="457200" rtl="0" eaLnBrk="1" latinLnBrk="0" hangingPunct="1">
+      <a:defRPr sz="1200" kern="1200">
+        <a:solidFill>
+          <a:schemeClr val="tx1"/>
+        </a:solidFill>
+        <a:latin typeface="+mn-lt"/>
+        <a:ea typeface="+mn-ea"/>
+        <a:cs typeface="+mn-cs"/>
+      </a:defRPr>
+    </a:lvl3pPr>
+    <a:lvl4pPr marL="1371600" algn="l" defTabSz="457200" rtl="0" eaLnBrk="1" latinLnBrk="0" hangingPunct="1">
+      <a:defRPr sz="1200" kern="1200">
+        <a:solidFill>
+          <a:schemeClr val="tx1"/>
+        </a:solidFill>
+        <a:latin typeface="+mn-lt"/>
+        <a:ea typeface="+mn-ea"/>
+        <a:cs typeface="+mn-cs"/>
+      </a:defRPr>
+    </a:lvl4pPr>
+    <a:lvl5pPr marL="1828800" algn="l" defTabSz="457200" rtl="0" eaLnBrk="1" latinLnBrk="0" hangingPunct="1">
+      <a:defRPr sz="1200" kern="1200">
+        <a:solidFill>
+          <a:schemeClr val="tx1"/>
+        </a:solidFill>
+        <a:latin typeface="+mn-lt"/>
+        <a:ea typeface="+mn-ea"/>
+        <a:cs typeface="+mn-cs"/>
+      </a:defRPr>
+    </a:lvl5pPr>
+    <a:lvl6pPr marL="2286000" algn="l" defTabSz="457200" rtl="0" eaLnBrk="1" latinLnBrk="0" hangingPunct="1">
+      <a:defRPr sz="1200" kern="1200">
+        <a:solidFill>
+          <a:schemeClr val="tx1"/>
+        </a:solidFill>
+        <a:latin typeface="+mn-lt"/>
+        <a:ea typeface="+mn-ea"/>
+        <a:cs typeface="+mn-cs"/>
+      </a:defRPr>
+    </a:lvl6pPr>
+    <a:lvl7pPr marL="2743200" algn="l" defTabSz="457200" rtl="0" eaLnBrk="1" latinLnBrk="0" hangingPunct="1">
+      <a:defRPr sz="1200" kern="1200">
+        <a:solidFill>
+          <a:schemeClr val="tx1"/>
+        </a:solidFill>
+        <a:latin typeface="+mn-lt"/>
+        <a:ea typeface="+mn-ea"/>
+        <a:cs typeface="+mn-cs"/>
+      </a:defRPr>
+    </a:lvl7pPr>
+    <a:lvl8pPr marL="3200400" algn="l" defTabSz="457200" rtl="0" eaLnBrk="1" latinLnBrk="0" hangingPunct="1">
+      <a:defRPr sz="1200" kern="1200">
+        <a:solidFill>
+          <a:schemeClr val="tx1"/>
+        </a:solidFill>
+        <a:latin typeface="+mn-lt"/>
+        <a:ea typeface="+mn-ea"/>
+        <a:cs typeface="+mn-cs"/>
+      </a:defRPr>
+    </a:lvl8pPr>
+    <a:lvl9pPr marL="3657600" algn="l" defTabSz="457200" rtl="0" eaLnBrk="1" latinLnBrk="0" hangingPunct="1">
+      <a:defRPr sz="1200" kern="1200">
+        <a:solidFill>
+          <a:schemeClr val="tx1"/>
+        </a:solidFill>
+        <a:latin typeface="+mn-lt"/>
+        <a:ea typeface="+mn-ea"/>
+        <a:cs typeface="+mn-cs"/>
+      </a:defRPr>
+    </a:lvl9pPr>
+  </p:notesStyle>
+</p:notesMaster>
+</file>
+
+<file path=ppt/notesSlides/notesSlide1.xml><?xml version="1.0" encoding="utf-8"?>
+<p:notes xmlns:a="http://schemas.openxmlformats.org/drawingml/2006/main" xmlns:p="http://schemas.openxmlformats.org/presentationml/2006/main" xmlns:r="http://schemas.openxmlformats.org/officeDocument/2006/relationships">
+  <p:cSld>
+    <p:spTree>
+      <p:nvGrpSpPr>
+        <p:cNvPr id="1" name=""/>
+        <p:cNvGrpSpPr/>
+        <p:nvPr/>
+      </p:nvGrpSpPr>
+      <p:grpSpPr>
+        <a:xfrm>
+          <a:off x="0" y="0"/>
+          <a:ext cx="0" cy="0"/>
+          <a:chOff x="0" y="0"/>
+          <a:chExt cx="0" cy="0"/>
+        </a:xfrm>
+      </p:grpSpPr>
+      <p:sp>
+        <p:nvSpPr>
+          <p:cNvPr id="2" name="Slide Image Placeholder 1"/>
+          <p:cNvSpPr>
+            <a:spLocks noGrp="1"/>
+          </p:cNvSpPr>
+          <p:nvPr>
+            <p:ph type="sldImg" idx="2"/>
+          </p:nvPr>
+        </p:nvSpPr>
+        <p:spPr/>
+      </p:sp>
+      <p:sp>
+        <p:nvSpPr>
+          <p:cNvPr id="3" name="Notes Placeholder 2"/>
+          <p:cNvSpPr>
+            <a:spLocks noGrp="1"/>
+          </p:cNvSpPr>
+          <p:nvPr>
+            <p:ph type="body" idx="3" sz="quarter"/>
+          </p:nvPr>
+        </p:nvSpPr>
+        <p:spPr/>
+        <p:txBody>
+          <a:bodyPr/>
+          <a:lstStyle/>
+          <a:p>
+            <a:r>
+              <a:t>Title slide. Introduce the team and the one-line pitch: a working, cloud-native platform for construction project controls that predicts delay risk and visualizes cost/schedule health.</a:t>
+            </a:r>
+          </a:p>
+        </p:txBody>
+      </p:sp>
+      <p:sp>
+        <p:nvSpPr>
+          <p:cNvPr id="4" name="Slide Number Placeholder 3"/>
+          <p:cNvSpPr>
+            <a:spLocks noGrp="1"/>
+          </p:cNvSpPr>
+          <p:nvPr>
+            <p:ph type="sldNum" idx="5" sz="quarter"/>
+          </p:nvPr>
+        </p:nvSpPr>
+        <p:spPr/>
+      </p:sp>
+    </p:spTree>
+  </p:cSld>
+  <p:clrMapOvr>
+    <a:masterClrMapping/>
+  </p:clrMapOvr>
+</p:notes>
+</file>
+
+<file path=ppt/notesSlides/notesSlide10.xml><?xml version="1.0" encoding="utf-8"?>
+<p:notes xmlns:a="http://schemas.openxmlformats.org/drawingml/2006/main" xmlns:p="http://schemas.openxmlformats.org/presentationml/2006/main" xmlns:r="http://schemas.openxmlformats.org/officeDocument/2006/relationships">
+  <p:cSld>
+    <p:spTree>
+      <p:nvGrpSpPr>
+        <p:cNvPr id="1" name=""/>
+        <p:cNvGrpSpPr/>
+        <p:nvPr/>
+      </p:nvGrpSpPr>
+      <p:grpSpPr>
+        <a:xfrm>
+          <a:off x="0" y="0"/>
+          <a:ext cx="0" cy="0"/>
+          <a:chOff x="0" y="0"/>
+          <a:chExt cx="0" cy="0"/>
+        </a:xfrm>
+      </p:grpSpPr>
+      <p:sp>
+        <p:nvSpPr>
+          <p:cNvPr id="2" name="Slide Image Placeholder 1"/>
+          <p:cNvSpPr>
+            <a:spLocks noGrp="1"/>
+          </p:cNvSpPr>
+          <p:nvPr>
+            <p:ph type="sldImg" idx="2"/>
+          </p:nvPr>
+        </p:nvSpPr>
+        <p:spPr/>
+      </p:sp>
+      <p:sp>
+        <p:nvSpPr>
+          <p:cNvPr id="3" name="Notes Placeholder 2"/>
+          <p:cNvSpPr>
+            <a:spLocks noGrp="1"/>
+          </p:cNvSpPr>
+          <p:nvPr>
+            <p:ph type="body" idx="3" sz="quarter"/>
+          </p:nvPr>
+        </p:nvSpPr>
+        <p:spPr/>
+        <p:txBody>
+          <a:bodyPr/>
+          <a:lstStyle/>
+          <a:p>
+            <a:r>
+              <a:t>No single reproducible system does all of: ingest, compute EVM, predict with ML, visualize, and deploy. We close all three gaps in one platform.</a:t>
+            </a:r>
+          </a:p>
+        </p:txBody>
+      </p:sp>
+      <p:sp>
+        <p:nvSpPr>
+          <p:cNvPr id="4" name="Slide Number Placeholder 3"/>
+          <p:cNvSpPr>
+            <a:spLocks noGrp="1"/>
+          </p:cNvSpPr>
+          <p:nvPr>
+            <p:ph type="sldNum" idx="5" sz="quarter"/>
+          </p:nvPr>
+        </p:nvSpPr>
+        <p:spPr/>
+      </p:sp>
+    </p:spTree>
+  </p:cSld>
+  <p:clrMapOvr>
+    <a:masterClrMapping/>
+  </p:clrMapOvr>
+</p:notes>
+</file>
+
+<file path=ppt/notesSlides/notesSlide11.xml><?xml version="1.0" encoding="utf-8"?>
+<p:notes xmlns:a="http://schemas.openxmlformats.org/drawingml/2006/main" xmlns:p="http://schemas.openxmlformats.org/presentationml/2006/main" xmlns:r="http://schemas.openxmlformats.org/officeDocument/2006/relationships">
+  <p:cSld>
+    <p:spTree>
+      <p:nvGrpSpPr>
+        <p:cNvPr id="1" name=""/>
+        <p:cNvGrpSpPr/>
+        <p:nvPr/>
+      </p:nvGrpSpPr>
+      <p:grpSpPr>
+        <a:xfrm>
+          <a:off x="0" y="0"/>
+          <a:ext cx="0" cy="0"/>
+          <a:chOff x="0" y="0"/>
+          <a:chExt cx="0" cy="0"/>
+        </a:xfrm>
+      </p:grpSpPr>
+      <p:sp>
+        <p:nvSpPr>
+          <p:cNvPr id="2" name="Slide Image Placeholder 1"/>
+          <p:cNvSpPr>
+            <a:spLocks noGrp="1"/>
+          </p:cNvSpPr>
+          <p:nvPr>
+            <p:ph type="sldImg" idx="2"/>
+          </p:nvPr>
+        </p:nvSpPr>
+        <p:spPr/>
+      </p:sp>
+      <p:sp>
+        <p:nvSpPr>
+          <p:cNvPr id="3" name="Notes Placeholder 2"/>
+          <p:cNvSpPr>
+            <a:spLocks noGrp="1"/>
+          </p:cNvSpPr>
+          <p:nvPr>
+            <p:ph type="body" idx="3" sz="quarter"/>
+          </p:nvPr>
+        </p:nvSpPr>
+        <p:spPr/>
+        <p:txBody>
+          <a:bodyPr/>
+          <a:lstStyle/>
+          <a:p>
+            <a:r>
+              <a:t>Seven concrete objectives mapping to the system layers. Each is testable — see the validation slide later.</a:t>
+            </a:r>
+          </a:p>
+        </p:txBody>
+      </p:sp>
+      <p:sp>
+        <p:nvSpPr>
+          <p:cNvPr id="4" name="Slide Number Placeholder 3"/>
+          <p:cNvSpPr>
+            <a:spLocks noGrp="1"/>
+          </p:cNvSpPr>
+          <p:nvPr>
+            <p:ph type="sldNum" idx="5" sz="quarter"/>
+          </p:nvPr>
+        </p:nvSpPr>
+        <p:spPr/>
+      </p:sp>
+    </p:spTree>
+  </p:cSld>
+  <p:clrMapOvr>
+    <a:masterClrMapping/>
+  </p:clrMapOvr>
+</p:notes>
+</file>
+
+<file path=ppt/notesSlides/notesSlide12.xml><?xml version="1.0" encoding="utf-8"?>
+<p:notes xmlns:a="http://schemas.openxmlformats.org/drawingml/2006/main" xmlns:p="http://schemas.openxmlformats.org/presentationml/2006/main" xmlns:r="http://schemas.openxmlformats.org/officeDocument/2006/relationships">
+  <p:cSld>
+    <p:spTree>
+      <p:nvGrpSpPr>
+        <p:cNvPr id="1" name=""/>
+        <p:cNvGrpSpPr/>
+        <p:nvPr/>
+      </p:nvGrpSpPr>
+      <p:grpSpPr>
+        <a:xfrm>
+          <a:off x="0" y="0"/>
+          <a:ext cx="0" cy="0"/>
+          <a:chOff x="0" y="0"/>
+          <a:chExt cx="0" cy="0"/>
+        </a:xfrm>
+      </p:grpSpPr>
+      <p:sp>
+        <p:nvSpPr>
+          <p:cNvPr id="2" name="Slide Image Placeholder 1"/>
+          <p:cNvSpPr>
+            <a:spLocks noGrp="1"/>
+          </p:cNvSpPr>
+          <p:nvPr>
+            <p:ph type="sldImg" idx="2"/>
+          </p:nvPr>
+        </p:nvSpPr>
+        <p:spPr/>
+      </p:sp>
+      <p:sp>
+        <p:nvSpPr>
+          <p:cNvPr id="3" name="Notes Placeholder 2"/>
+          <p:cNvSpPr>
+            <a:spLocks noGrp="1"/>
+          </p:cNvSpPr>
+          <p:nvPr>
+            <p:ph type="body" idx="3" sz="quarter"/>
+          </p:nvPr>
+        </p:nvSpPr>
+        <p:spPr/>
+        <p:txBody>
+          <a:bodyPr/>
+          <a:lstStyle/>
+          <a:p>
+            <a:r>
+              <a:t>Explain why each tool: FastAPI for async validation, PostgreSQL for ACID + time series, scikit-learn for ML, Power BI for BI, Docker/K8s for reproducibility.</a:t>
+            </a:r>
+          </a:p>
+        </p:txBody>
+      </p:sp>
+      <p:sp>
+        <p:nvSpPr>
+          <p:cNvPr id="4" name="Slide Number Placeholder 3"/>
+          <p:cNvSpPr>
+            <a:spLocks noGrp="1"/>
+          </p:cNvSpPr>
+          <p:nvPr>
+            <p:ph type="sldNum" idx="5" sz="quarter"/>
+          </p:nvPr>
+        </p:nvSpPr>
+        <p:spPr/>
+      </p:sp>
+    </p:spTree>
+  </p:cSld>
+  <p:clrMapOvr>
+    <a:masterClrMapping/>
+  </p:clrMapOvr>
+</p:notes>
+</file>
+
+<file path=ppt/notesSlides/notesSlide13.xml><?xml version="1.0" encoding="utf-8"?>
+<p:notes xmlns:a="http://schemas.openxmlformats.org/drawingml/2006/main" xmlns:p="http://schemas.openxmlformats.org/presentationml/2006/main" xmlns:r="http://schemas.openxmlformats.org/officeDocument/2006/relationships">
+  <p:cSld>
+    <p:spTree>
+      <p:nvGrpSpPr>
+        <p:cNvPr id="1" name=""/>
+        <p:cNvGrpSpPr/>
+        <p:nvPr/>
+      </p:nvGrpSpPr>
+      <p:grpSpPr>
+        <a:xfrm>
+          <a:off x="0" y="0"/>
+          <a:ext cx="0" cy="0"/>
+          <a:chOff x="0" y="0"/>
+          <a:chExt cx="0" cy="0"/>
+        </a:xfrm>
+      </p:grpSpPr>
+      <p:sp>
+        <p:nvSpPr>
+          <p:cNvPr id="2" name="Slide Image Placeholder 1"/>
+          <p:cNvSpPr>
+            <a:spLocks noGrp="1"/>
+          </p:cNvSpPr>
+          <p:nvPr>
+            <p:ph type="sldImg" idx="2"/>
+          </p:nvPr>
+        </p:nvSpPr>
+        <p:spPr/>
+      </p:sp>
+      <p:sp>
+        <p:nvSpPr>
+          <p:cNvPr id="3" name="Notes Placeholder 2"/>
+          <p:cNvSpPr>
+            <a:spLocks noGrp="1"/>
+          </p:cNvSpPr>
+          <p:nvPr>
+            <p:ph type="body" idx="3" sz="quarter"/>
+          </p:nvPr>
+        </p:nvSpPr>
+        <p:spPr/>
+        <p:txBody>
+          <a:bodyPr/>
+          <a:lstStyle/>
+          <a:p>
+            <a:r>
+              <a:t>Walk the data-flow arrows left to right. Emphasize separation of concerns: a dashboard outage never stops data capture.</a:t>
+            </a:r>
+          </a:p>
+        </p:txBody>
+      </p:sp>
+      <p:sp>
+        <p:nvSpPr>
+          <p:cNvPr id="4" name="Slide Number Placeholder 3"/>
+          <p:cNvSpPr>
+            <a:spLocks noGrp="1"/>
+          </p:cNvSpPr>
+          <p:nvPr>
+            <p:ph type="sldNum" idx="5" sz="quarter"/>
+          </p:nvPr>
+        </p:nvSpPr>
+        <p:spPr/>
+      </p:sp>
+    </p:spTree>
+  </p:cSld>
+  <p:clrMapOvr>
+    <a:masterClrMapping/>
+  </p:clrMapOvr>
+</p:notes>
+</file>
+
+<file path=ppt/notesSlides/notesSlide14.xml><?xml version="1.0" encoding="utf-8"?>
+<p:notes xmlns:a="http://schemas.openxmlformats.org/drawingml/2006/main" xmlns:p="http://schemas.openxmlformats.org/presentationml/2006/main" xmlns:r="http://schemas.openxmlformats.org/officeDocument/2006/relationships">
+  <p:cSld>
+    <p:spTree>
+      <p:nvGrpSpPr>
+        <p:cNvPr id="1" name=""/>
+        <p:cNvGrpSpPr/>
+        <p:nvPr/>
+      </p:nvGrpSpPr>
+      <p:grpSpPr>
+        <a:xfrm>
+          <a:off x="0" y="0"/>
+          <a:ext cx="0" cy="0"/>
+          <a:chOff x="0" y="0"/>
+          <a:chExt cx="0" cy="0"/>
+        </a:xfrm>
+      </p:grpSpPr>
+      <p:sp>
+        <p:nvSpPr>
+          <p:cNvPr id="2" name="Slide Image Placeholder 1"/>
+          <p:cNvSpPr>
+            <a:spLocks noGrp="1"/>
+          </p:cNvSpPr>
+          <p:nvPr>
+            <p:ph type="sldImg" idx="2"/>
+          </p:nvPr>
+        </p:nvSpPr>
+        <p:spPr/>
+      </p:sp>
+      <p:sp>
+        <p:nvSpPr>
+          <p:cNvPr id="3" name="Notes Placeholder 2"/>
+          <p:cNvSpPr>
+            <a:spLocks noGrp="1"/>
+          </p:cNvSpPr>
+          <p:nvPr>
+            <p:ph type="body" idx="3" sz="quarter"/>
+          </p:nvPr>
+        </p:nvSpPr>
+        <p:spPr/>
+        <p:txBody>
+          <a:bodyPr/>
+          <a:lstStyle/>
+          <a:p>
+            <a:r>
+              <a:t>Three tiers: master entities, append-only time series, computed outputs. Curated views keep the BI model simple.</a:t>
+            </a:r>
+          </a:p>
+        </p:txBody>
+      </p:sp>
+      <p:sp>
+        <p:nvSpPr>
+          <p:cNvPr id="4" name="Slide Number Placeholder 3"/>
+          <p:cNvSpPr>
+            <a:spLocks noGrp="1"/>
+          </p:cNvSpPr>
+          <p:nvPr>
+            <p:ph type="sldNum" idx="5" sz="quarter"/>
+          </p:nvPr>
+        </p:nvSpPr>
+        <p:spPr/>
+      </p:sp>
+    </p:spTree>
+  </p:cSld>
+  <p:clrMapOvr>
+    <a:masterClrMapping/>
+  </p:clrMapOvr>
+</p:notes>
+</file>
+
+<file path=ppt/notesSlides/notesSlide15.xml><?xml version="1.0" encoding="utf-8"?>
+<p:notes xmlns:a="http://schemas.openxmlformats.org/drawingml/2006/main" xmlns:p="http://schemas.openxmlformats.org/presentationml/2006/main" xmlns:r="http://schemas.openxmlformats.org/officeDocument/2006/relationships">
+  <p:cSld>
+    <p:spTree>
+      <p:nvGrpSpPr>
+        <p:cNvPr id="1" name=""/>
+        <p:cNvGrpSpPr/>
+        <p:nvPr/>
+      </p:nvGrpSpPr>
+      <p:grpSpPr>
+        <a:xfrm>
+          <a:off x="0" y="0"/>
+          <a:ext cx="0" cy="0"/>
+          <a:chOff x="0" y="0"/>
+          <a:chExt cx="0" cy="0"/>
+        </a:xfrm>
+      </p:grpSpPr>
+      <p:sp>
+        <p:nvSpPr>
+          <p:cNvPr id="2" name="Slide Image Placeholder 1"/>
+          <p:cNvSpPr>
+            <a:spLocks noGrp="1"/>
+          </p:cNvSpPr>
+          <p:nvPr>
+            <p:ph type="sldImg" idx="2"/>
+          </p:nvPr>
+        </p:nvSpPr>
+        <p:spPr/>
+      </p:sp>
+      <p:sp>
+        <p:nvSpPr>
+          <p:cNvPr id="3" name="Notes Placeholder 2"/>
+          <p:cNvSpPr>
+            <a:spLocks noGrp="1"/>
+          </p:cNvSpPr>
+          <p:nvPr>
+            <p:ph type="body" idx="3" sz="quarter"/>
+          </p:nvPr>
+        </p:nvSpPr>
+        <p:spPr/>
+        <p:txBody>
+          <a:bodyPr/>
+          <a:lstStyle/>
+          <a:p>
+            <a:r>
+              <a:t>Show that validation is real: bad payloads get HTTP 422. In the verified run, 19,317 records were ingested with 0 rejected.</a:t>
+            </a:r>
+          </a:p>
+        </p:txBody>
+      </p:sp>
+      <p:sp>
+        <p:nvSpPr>
+          <p:cNvPr id="4" name="Slide Number Placeholder 3"/>
+          <p:cNvSpPr>
+            <a:spLocks noGrp="1"/>
+          </p:cNvSpPr>
+          <p:nvPr>
+            <p:ph type="sldNum" idx="5" sz="quarter"/>
+          </p:nvPr>
+        </p:nvSpPr>
+        <p:spPr/>
+      </p:sp>
+    </p:spTree>
+  </p:cSld>
+  <p:clrMapOvr>
+    <a:masterClrMapping/>
+  </p:clrMapOvr>
+</p:notes>
+</file>
+
+<file path=ppt/notesSlides/notesSlide16.xml><?xml version="1.0" encoding="utf-8"?>
+<p:notes xmlns:a="http://schemas.openxmlformats.org/drawingml/2006/main" xmlns:p="http://schemas.openxmlformats.org/presentationml/2006/main" xmlns:r="http://schemas.openxmlformats.org/officeDocument/2006/relationships">
+  <p:cSld>
+    <p:spTree>
+      <p:nvGrpSpPr>
+        <p:cNvPr id="1" name=""/>
+        <p:cNvGrpSpPr/>
+        <p:nvPr/>
+      </p:nvGrpSpPr>
+      <p:grpSpPr>
+        <a:xfrm>
+          <a:off x="0" y="0"/>
+          <a:ext cx="0" cy="0"/>
+          <a:chOff x="0" y="0"/>
+          <a:chExt cx="0" cy="0"/>
+        </a:xfrm>
+      </p:grpSpPr>
+      <p:sp>
+        <p:nvSpPr>
+          <p:cNvPr id="2" name="Slide Image Placeholder 1"/>
+          <p:cNvSpPr>
+            <a:spLocks noGrp="1"/>
+          </p:cNvSpPr>
+          <p:nvPr>
+            <p:ph type="sldImg" idx="2"/>
+          </p:nvPr>
+        </p:nvSpPr>
+        <p:spPr/>
+      </p:sp>
+      <p:sp>
+        <p:nvSpPr>
+          <p:cNvPr id="3" name="Notes Placeholder 2"/>
+          <p:cNvSpPr>
+            <a:spLocks noGrp="1"/>
+          </p:cNvSpPr>
+          <p:nvPr>
+            <p:ph type="body" idx="3" sz="quarter"/>
+          </p:nvPr>
+        </p:nvSpPr>
+        <p:spPr/>
+        <p:txBody>
+          <a:bodyPr/>
+          <a:lstStyle/>
+          <a:p>
+            <a:r>
+              <a:t>These six formulas are the backbone. The worker computes them as of a per-project status date.</a:t>
+            </a:r>
+          </a:p>
+        </p:txBody>
+      </p:sp>
+      <p:sp>
+        <p:nvSpPr>
+          <p:cNvPr id="4" name="Slide Number Placeholder 3"/>
+          <p:cNvSpPr>
+            <a:spLocks noGrp="1"/>
+          </p:cNvSpPr>
+          <p:nvPr>
+            <p:ph type="sldNum" idx="5" sz="quarter"/>
+          </p:nvPr>
+        </p:nvSpPr>
+        <p:spPr/>
+      </p:sp>
+    </p:spTree>
+  </p:cSld>
+  <p:clrMapOvr>
+    <a:masterClrMapping/>
+  </p:clrMapOvr>
+</p:notes>
+</file>
+
+<file path=ppt/notesSlides/notesSlide17.xml><?xml version="1.0" encoding="utf-8"?>
+<p:notes xmlns:a="http://schemas.openxmlformats.org/drawingml/2006/main" xmlns:p="http://schemas.openxmlformats.org/presentationml/2006/main" xmlns:r="http://schemas.openxmlformats.org/officeDocument/2006/relationships">
+  <p:cSld>
+    <p:spTree>
+      <p:nvGrpSpPr>
+        <p:cNvPr id="1" name=""/>
+        <p:cNvGrpSpPr/>
+        <p:nvPr/>
+      </p:nvGrpSpPr>
+      <p:grpSpPr>
+        <a:xfrm>
+          <a:off x="0" y="0"/>
+          <a:ext cx="0" cy="0"/>
+          <a:chOff x="0" y="0"/>
+          <a:chExt cx="0" cy="0"/>
+        </a:xfrm>
+      </p:grpSpPr>
+      <p:sp>
+        <p:nvSpPr>
+          <p:cNvPr id="2" name="Slide Image Placeholder 1"/>
+          <p:cNvSpPr>
+            <a:spLocks noGrp="1"/>
+          </p:cNvSpPr>
+          <p:nvPr>
+            <p:ph type="sldImg" idx="2"/>
+          </p:nvPr>
+        </p:nvSpPr>
+        <p:spPr/>
+      </p:sp>
+      <p:sp>
+        <p:nvSpPr>
+          <p:cNvPr id="3" name="Notes Placeholder 2"/>
+          <p:cNvSpPr>
+            <a:spLocks noGrp="1"/>
+          </p:cNvSpPr>
+          <p:nvPr>
+            <p:ph type="body" idx="3" sz="quarter"/>
+          </p:nvPr>
+        </p:nvSpPr>
+        <p:spPr/>
+        <p:txBody>
+          <a:bodyPr/>
+          <a:lstStyle/>
+          <a:p>
+            <a:r>
+              <a:t>Concrete numbers. CPI 0.89 = over budget, SPI 0.80 = behind, EAC forecasts an overrun. This is exactly what the platform automates.</a:t>
+            </a:r>
+          </a:p>
+        </p:txBody>
+      </p:sp>
+      <p:sp>
+        <p:nvSpPr>
+          <p:cNvPr id="4" name="Slide Number Placeholder 3"/>
+          <p:cNvSpPr>
+            <a:spLocks noGrp="1"/>
+          </p:cNvSpPr>
+          <p:nvPr>
+            <p:ph type="sldNum" idx="5" sz="quarter"/>
+          </p:nvPr>
+        </p:nvSpPr>
+        <p:spPr/>
+      </p:sp>
+    </p:spTree>
+  </p:cSld>
+  <p:clrMapOvr>
+    <a:masterClrMapping/>
+  </p:clrMapOvr>
+</p:notes>
+</file>
+
+<file path=ppt/notesSlides/notesSlide18.xml><?xml version="1.0" encoding="utf-8"?>
+<p:notes xmlns:a="http://schemas.openxmlformats.org/drawingml/2006/main" xmlns:p="http://schemas.openxmlformats.org/presentationml/2006/main" xmlns:r="http://schemas.openxmlformats.org/officeDocument/2006/relationships">
+  <p:cSld>
+    <p:spTree>
+      <p:nvGrpSpPr>
+        <p:cNvPr id="1" name=""/>
+        <p:cNvGrpSpPr/>
+        <p:nvPr/>
+      </p:nvGrpSpPr>
+      <p:grpSpPr>
+        <a:xfrm>
+          <a:off x="0" y="0"/>
+          <a:ext cx="0" cy="0"/>
+          <a:chOff x="0" y="0"/>
+          <a:chExt cx="0" cy="0"/>
+        </a:xfrm>
+      </p:grpSpPr>
+      <p:sp>
+        <p:nvSpPr>
+          <p:cNvPr id="2" name="Slide Image Placeholder 1"/>
+          <p:cNvSpPr>
+            <a:spLocks noGrp="1"/>
+          </p:cNvSpPr>
+          <p:nvPr>
+            <p:ph type="sldImg" idx="2"/>
+          </p:nvPr>
+        </p:nvSpPr>
+        <p:spPr/>
+      </p:sp>
+      <p:sp>
+        <p:nvSpPr>
+          <p:cNvPr id="3" name="Notes Placeholder 2"/>
+          <p:cNvSpPr>
+            <a:spLocks noGrp="1"/>
+          </p:cNvSpPr>
+          <p:nvPr>
+            <p:ph type="body" idx="3" sz="quarter"/>
+          </p:nvPr>
+        </p:nvSpPr>
+        <p:spPr/>
+        <p:txBody>
+          <a:bodyPr/>
+          <a:lstStyle/>
+          <a:p>
+            <a:r>
+              <a:t>Delay label is defined by a finish-date threshold tau. Features are project-control signals. SVM won on ROC-AUC (0.969). Softmax/MPP adds a probabilistic reliability view.</a:t>
+            </a:r>
+          </a:p>
+        </p:txBody>
+      </p:sp>
+      <p:sp>
+        <p:nvSpPr>
+          <p:cNvPr id="4" name="Slide Number Placeholder 3"/>
+          <p:cNvSpPr>
+            <a:spLocks noGrp="1"/>
+          </p:cNvSpPr>
+          <p:nvPr>
+            <p:ph type="sldNum" idx="5" sz="quarter"/>
+          </p:nvPr>
+        </p:nvSpPr>
+        <p:spPr/>
+      </p:sp>
+    </p:spTree>
+  </p:cSld>
+  <p:clrMapOvr>
+    <a:masterClrMapping/>
+  </p:clrMapOvr>
+</p:notes>
+</file>
+
+<file path=ppt/notesSlides/notesSlide19.xml><?xml version="1.0" encoding="utf-8"?>
+<p:notes xmlns:a="http://schemas.openxmlformats.org/drawingml/2006/main" xmlns:p="http://schemas.openxmlformats.org/presentationml/2006/main" xmlns:r="http://schemas.openxmlformats.org/officeDocument/2006/relationships">
+  <p:cSld>
+    <p:spTree>
+      <p:nvGrpSpPr>
+        <p:cNvPr id="1" name=""/>
+        <p:cNvGrpSpPr/>
+        <p:nvPr/>
+      </p:nvGrpSpPr>
+      <p:grpSpPr>
+        <a:xfrm>
+          <a:off x="0" y="0"/>
+          <a:ext cx="0" cy="0"/>
+          <a:chOff x="0" y="0"/>
+          <a:chExt cx="0" cy="0"/>
+        </a:xfrm>
+      </p:grpSpPr>
+      <p:sp>
+        <p:nvSpPr>
+          <p:cNvPr id="2" name="Slide Image Placeholder 1"/>
+          <p:cNvSpPr>
+            <a:spLocks noGrp="1"/>
+          </p:cNvSpPr>
+          <p:nvPr>
+            <p:ph type="sldImg" idx="2"/>
+          </p:nvPr>
+        </p:nvSpPr>
+        <p:spPr/>
+      </p:sp>
+      <p:sp>
+        <p:nvSpPr>
+          <p:cNvPr id="3" name="Notes Placeholder 2"/>
+          <p:cNvSpPr>
+            <a:spLocks noGrp="1"/>
+          </p:cNvSpPr>
+          <p:nvPr>
+            <p:ph type="body" idx="3" sz="quarter"/>
+          </p:nvPr>
+        </p:nvSpPr>
+        <p:spPr/>
+        <p:txBody>
+          <a:bodyPr/>
+          <a:lstStyle/>
+          <a:p>
+            <a:r>
+              <a:t>This is the real dashboard, not a mockup. Point out CPI 0.982 and SPI 0.991 and the 57 high-risk activities.</a:t>
+            </a:r>
+          </a:p>
+        </p:txBody>
+      </p:sp>
+      <p:sp>
+        <p:nvSpPr>
+          <p:cNvPr id="4" name="Slide Number Placeholder 3"/>
+          <p:cNvSpPr>
+            <a:spLocks noGrp="1"/>
+          </p:cNvSpPr>
+          <p:nvPr>
+            <p:ph type="sldNum" idx="5" sz="quarter"/>
+          </p:nvPr>
+        </p:nvSpPr>
+        <p:spPr/>
+      </p:sp>
+    </p:spTree>
+  </p:cSld>
+  <p:clrMapOvr>
+    <a:masterClrMapping/>
+  </p:clrMapOvr>
+</p:notes>
+</file>
+
+<file path=ppt/notesSlides/notesSlide2.xml><?xml version="1.0" encoding="utf-8"?>
+<p:notes xmlns:a="http://schemas.openxmlformats.org/drawingml/2006/main" xmlns:p="http://schemas.openxmlformats.org/presentationml/2006/main" xmlns:r="http://schemas.openxmlformats.org/officeDocument/2006/relationships">
+  <p:cSld>
+    <p:spTree>
+      <p:nvGrpSpPr>
+        <p:cNvPr id="1" name=""/>
+        <p:cNvGrpSpPr/>
+        <p:nvPr/>
+      </p:nvGrpSpPr>
+      <p:grpSpPr>
+        <a:xfrm>
+          <a:off x="0" y="0"/>
+          <a:ext cx="0" cy="0"/>
+          <a:chOff x="0" y="0"/>
+          <a:chExt cx="0" cy="0"/>
+        </a:xfrm>
+      </p:grpSpPr>
+      <p:sp>
+        <p:nvSpPr>
+          <p:cNvPr id="2" name="Slide Image Placeholder 1"/>
+          <p:cNvSpPr>
+            <a:spLocks noGrp="1"/>
+          </p:cNvSpPr>
+          <p:nvPr>
+            <p:ph type="sldImg" idx="2"/>
+          </p:nvPr>
+        </p:nvSpPr>
+        <p:spPr/>
+      </p:sp>
+      <p:sp>
+        <p:nvSpPr>
+          <p:cNvPr id="3" name="Notes Placeholder 2"/>
+          <p:cNvSpPr>
+            <a:spLocks noGrp="1"/>
+          </p:cNvSpPr>
+          <p:nvPr>
+            <p:ph type="body" idx="3" sz="quarter"/>
+          </p:nvPr>
+        </p:nvSpPr>
+        <p:spPr/>
+        <p:txBody>
+          <a:bodyPr/>
+          <a:lstStyle/>
+          <a:p>
+            <a:r>
+              <a:t>Each member's area: Hasnain (data/platform), Sahil (analytics/ML), Aryan (architecture/visualization). Stress that it was delivered as one integrated system, not three separate pieces.</a:t>
+            </a:r>
+          </a:p>
+        </p:txBody>
+      </p:sp>
+      <p:sp>
+        <p:nvSpPr>
+          <p:cNvPr id="4" name="Slide Number Placeholder 3"/>
+          <p:cNvSpPr>
+            <a:spLocks noGrp="1"/>
+          </p:cNvSpPr>
+          <p:nvPr>
+            <p:ph type="sldNum" idx="5" sz="quarter"/>
+          </p:nvPr>
+        </p:nvSpPr>
+        <p:spPr/>
+      </p:sp>
+    </p:spTree>
+  </p:cSld>
+  <p:clrMapOvr>
+    <a:masterClrMapping/>
+  </p:clrMapOvr>
+</p:notes>
+</file>
+
+<file path=ppt/notesSlides/notesSlide20.xml><?xml version="1.0" encoding="utf-8"?>
+<p:notes xmlns:a="http://schemas.openxmlformats.org/drawingml/2006/main" xmlns:p="http://schemas.openxmlformats.org/presentationml/2006/main" xmlns:r="http://schemas.openxmlformats.org/officeDocument/2006/relationships">
+  <p:cSld>
+    <p:spTree>
+      <p:nvGrpSpPr>
+        <p:cNvPr id="1" name=""/>
+        <p:cNvGrpSpPr/>
+        <p:nvPr/>
+      </p:nvGrpSpPr>
+      <p:grpSpPr>
+        <a:xfrm>
+          <a:off x="0" y="0"/>
+          <a:ext cx="0" cy="0"/>
+          <a:chOff x="0" y="0"/>
+          <a:chExt cx="0" cy="0"/>
+        </a:xfrm>
+      </p:grpSpPr>
+      <p:sp>
+        <p:nvSpPr>
+          <p:cNvPr id="2" name="Slide Image Placeholder 1"/>
+          <p:cNvSpPr>
+            <a:spLocks noGrp="1"/>
+          </p:cNvSpPr>
+          <p:nvPr>
+            <p:ph type="sldImg" idx="2"/>
+          </p:nvPr>
+        </p:nvSpPr>
+        <p:spPr/>
+      </p:sp>
+      <p:sp>
+        <p:nvSpPr>
+          <p:cNvPr id="3" name="Notes Placeholder 2"/>
+          <p:cNvSpPr>
+            <a:spLocks noGrp="1"/>
+          </p:cNvSpPr>
+          <p:nvPr>
+            <p:ph type="body" idx="3" sz="quarter"/>
+          </p:nvPr>
+        </p:nvSpPr>
+        <p:spPr/>
+        <p:txBody>
+          <a:bodyPr/>
+          <a:lstStyle/>
+          <a:p>
+            <a:r>
+              <a:t>Cost page shows cumulative actual cost; schedule page shows planned-vs-earned S-curve. Both recompute live from the database.</a:t>
+            </a:r>
+          </a:p>
+        </p:txBody>
+      </p:sp>
+      <p:sp>
+        <p:nvSpPr>
+          <p:cNvPr id="4" name="Slide Number Placeholder 3"/>
+          <p:cNvSpPr>
+            <a:spLocks noGrp="1"/>
+          </p:cNvSpPr>
+          <p:nvPr>
+            <p:ph type="sldNum" idx="5" sz="quarter"/>
+          </p:nvPr>
+        </p:nvSpPr>
+        <p:spPr/>
+      </p:sp>
+    </p:spTree>
+  </p:cSld>
+  <p:clrMapOvr>
+    <a:masterClrMapping/>
+  </p:clrMapOvr>
+</p:notes>
+</file>
+
+<file path=ppt/notesSlides/notesSlide21.xml><?xml version="1.0" encoding="utf-8"?>
+<p:notes xmlns:a="http://schemas.openxmlformats.org/drawingml/2006/main" xmlns:p="http://schemas.openxmlformats.org/presentationml/2006/main" xmlns:r="http://schemas.openxmlformats.org/officeDocument/2006/relationships">
+  <p:cSld>
+    <p:spTree>
+      <p:nvGrpSpPr>
+        <p:cNvPr id="1" name=""/>
+        <p:cNvGrpSpPr/>
+        <p:nvPr/>
+      </p:nvGrpSpPr>
+      <p:grpSpPr>
+        <a:xfrm>
+          <a:off x="0" y="0"/>
+          <a:ext cx="0" cy="0"/>
+          <a:chOff x="0" y="0"/>
+          <a:chExt cx="0" cy="0"/>
+        </a:xfrm>
+      </p:grpSpPr>
+      <p:sp>
+        <p:nvSpPr>
+          <p:cNvPr id="2" name="Slide Image Placeholder 1"/>
+          <p:cNvSpPr>
+            <a:spLocks noGrp="1"/>
+          </p:cNvSpPr>
+          <p:nvPr>
+            <p:ph type="sldImg" idx="2"/>
+          </p:nvPr>
+        </p:nvSpPr>
+        <p:spPr/>
+      </p:sp>
+      <p:sp>
+        <p:nvSpPr>
+          <p:cNvPr id="3" name="Notes Placeholder 2"/>
+          <p:cNvSpPr>
+            <a:spLocks noGrp="1"/>
+          </p:cNvSpPr>
+          <p:nvPr>
+            <p:ph type="body" idx="3" sz="quarter"/>
+          </p:nvPr>
+        </p:nvSpPr>
+        <p:spPr/>
+        <p:txBody>
+          <a:bodyPr/>
+          <a:lstStyle/>
+          <a:p>
+            <a:r>
+              <a:t>Risk page shows the probability distribution and the top-risk list with badges; the explorer lets you filter by project, risk, trade, criticality.</a:t>
+            </a:r>
+          </a:p>
+        </p:txBody>
+      </p:sp>
+      <p:sp>
+        <p:nvSpPr>
+          <p:cNvPr id="4" name="Slide Number Placeholder 3"/>
+          <p:cNvSpPr>
+            <a:spLocks noGrp="1"/>
+          </p:cNvSpPr>
+          <p:nvPr>
+            <p:ph type="sldNum" idx="5" sz="quarter"/>
+          </p:nvPr>
+        </p:nvSpPr>
+        <p:spPr/>
+      </p:sp>
+    </p:spTree>
+  </p:cSld>
+  <p:clrMapOvr>
+    <a:masterClrMapping/>
+  </p:clrMapOvr>
+</p:notes>
+</file>
+
+<file path=ppt/notesSlides/notesSlide22.xml><?xml version="1.0" encoding="utf-8"?>
+<p:notes xmlns:a="http://schemas.openxmlformats.org/drawingml/2006/main" xmlns:p="http://schemas.openxmlformats.org/presentationml/2006/main" xmlns:r="http://schemas.openxmlformats.org/officeDocument/2006/relationships">
+  <p:cSld>
+    <p:spTree>
+      <p:nvGrpSpPr>
+        <p:cNvPr id="1" name=""/>
+        <p:cNvGrpSpPr/>
+        <p:nvPr/>
+      </p:nvGrpSpPr>
+      <p:grpSpPr>
+        <a:xfrm>
+          <a:off x="0" y="0"/>
+          <a:ext cx="0" cy="0"/>
+          <a:chOff x="0" y="0"/>
+          <a:chExt cx="0" cy="0"/>
+        </a:xfrm>
+      </p:grpSpPr>
+      <p:sp>
+        <p:nvSpPr>
+          <p:cNvPr id="2" name="Slide Image Placeholder 1"/>
+          <p:cNvSpPr>
+            <a:spLocks noGrp="1"/>
+          </p:cNvSpPr>
+          <p:nvPr>
+            <p:ph type="sldImg" idx="2"/>
+          </p:nvPr>
+        </p:nvSpPr>
+        <p:spPr/>
+      </p:sp>
+      <p:sp>
+        <p:nvSpPr>
+          <p:cNvPr id="3" name="Notes Placeholder 2"/>
+          <p:cNvSpPr>
+            <a:spLocks noGrp="1"/>
+          </p:cNvSpPr>
+          <p:nvPr>
+            <p:ph type="body" idx="3" sz="quarter"/>
+          </p:nvPr>
+        </p:nvSpPr>
+        <p:spPr/>
+        <p:txBody>
+          <a:bodyPr/>
+          <a:lstStyle/>
+          <a:p>
+            <a:r>
+              <a:t>Data &amp; Actions page: upload CSV, recompute EVM+Risk, retrain the model — all from the browser, no CLI.</a:t>
+            </a:r>
+          </a:p>
+        </p:txBody>
+      </p:sp>
+      <p:sp>
+        <p:nvSpPr>
+          <p:cNvPr id="4" name="Slide Number Placeholder 3"/>
+          <p:cNvSpPr>
+            <a:spLocks noGrp="1"/>
+          </p:cNvSpPr>
+          <p:nvPr>
+            <p:ph type="sldNum" idx="5" sz="quarter"/>
+          </p:nvPr>
+        </p:nvSpPr>
+        <p:spPr/>
+      </p:sp>
+    </p:spTree>
+  </p:cSld>
+  <p:clrMapOvr>
+    <a:masterClrMapping/>
+  </p:clrMapOvr>
+</p:notes>
+</file>
+
+<file path=ppt/notesSlides/notesSlide23.xml><?xml version="1.0" encoding="utf-8"?>
+<p:notes xmlns:a="http://schemas.openxmlformats.org/drawingml/2006/main" xmlns:p="http://schemas.openxmlformats.org/presentationml/2006/main" xmlns:r="http://schemas.openxmlformats.org/officeDocument/2006/relationships">
+  <p:cSld>
+    <p:spTree>
+      <p:nvGrpSpPr>
+        <p:cNvPr id="1" name=""/>
+        <p:cNvGrpSpPr/>
+        <p:nvPr/>
+      </p:nvGrpSpPr>
+      <p:grpSpPr>
+        <a:xfrm>
+          <a:off x="0" y="0"/>
+          <a:ext cx="0" cy="0"/>
+          <a:chOff x="0" y="0"/>
+          <a:chExt cx="0" cy="0"/>
+        </a:xfrm>
+      </p:grpSpPr>
+      <p:sp>
+        <p:nvSpPr>
+          <p:cNvPr id="2" name="Slide Image Placeholder 1"/>
+          <p:cNvSpPr>
+            <a:spLocks noGrp="1"/>
+          </p:cNvSpPr>
+          <p:nvPr>
+            <p:ph type="sldImg" idx="2"/>
+          </p:nvPr>
+        </p:nvSpPr>
+        <p:spPr/>
+      </p:sp>
+      <p:sp>
+        <p:nvSpPr>
+          <p:cNvPr id="3" name="Notes Placeholder 2"/>
+          <p:cNvSpPr>
+            <a:spLocks noGrp="1"/>
+          </p:cNvSpPr>
+          <p:nvPr>
+            <p:ph type="body" idx="3" sz="quarter"/>
+          </p:nvPr>
+        </p:nvSpPr>
+        <p:spPr/>
+        <p:txBody>
+          <a:bodyPr/>
+          <a:lstStyle/>
+          <a:p>
+            <a:r>
+              <a:t>Power BI is the enterprise BI layer. It reads curated views, not raw tables, and reproduces the four decision tiers with DAX.</a:t>
+            </a:r>
+          </a:p>
+        </p:txBody>
+      </p:sp>
+      <p:sp>
+        <p:nvSpPr>
+          <p:cNvPr id="4" name="Slide Number Placeholder 3"/>
+          <p:cNvSpPr>
+            <a:spLocks noGrp="1"/>
+          </p:cNvSpPr>
+          <p:nvPr>
+            <p:ph type="sldNum" idx="5" sz="quarter"/>
+          </p:nvPr>
+        </p:nvSpPr>
+        <p:spPr/>
+      </p:sp>
+    </p:spTree>
+  </p:cSld>
+  <p:clrMapOvr>
+    <a:masterClrMapping/>
+  </p:clrMapOvr>
+</p:notes>
+</file>
+
+<file path=ppt/notesSlides/notesSlide24.xml><?xml version="1.0" encoding="utf-8"?>
+<p:notes xmlns:a="http://schemas.openxmlformats.org/drawingml/2006/main" xmlns:p="http://schemas.openxmlformats.org/presentationml/2006/main" xmlns:r="http://schemas.openxmlformats.org/officeDocument/2006/relationships">
+  <p:cSld>
+    <p:spTree>
+      <p:nvGrpSpPr>
+        <p:cNvPr id="1" name=""/>
+        <p:cNvGrpSpPr/>
+        <p:nvPr/>
+      </p:nvGrpSpPr>
+      <p:grpSpPr>
+        <a:xfrm>
+          <a:off x="0" y="0"/>
+          <a:ext cx="0" cy="0"/>
+          <a:chOff x="0" y="0"/>
+          <a:chExt cx="0" cy="0"/>
+        </a:xfrm>
+      </p:grpSpPr>
+      <p:sp>
+        <p:nvSpPr>
+          <p:cNvPr id="2" name="Slide Image Placeholder 1"/>
+          <p:cNvSpPr>
+            <a:spLocks noGrp="1"/>
+          </p:cNvSpPr>
+          <p:nvPr>
+            <p:ph type="sldImg" idx="2"/>
+          </p:nvPr>
+        </p:nvSpPr>
+        <p:spPr/>
+      </p:sp>
+      <p:sp>
+        <p:nvSpPr>
+          <p:cNvPr id="3" name="Notes Placeholder 2"/>
+          <p:cNvSpPr>
+            <a:spLocks noGrp="1"/>
+          </p:cNvSpPr>
+          <p:nvPr>
+            <p:ph type="body" idx="3" sz="quarter"/>
+          </p:nvPr>
+        </p:nvSpPr>
+        <p:spPr/>
+        <p:txBody>
+          <a:bodyPr/>
+          <a:lstStyle/>
+          <a:p>
+            <a:r>
+              <a:t>Kubernetes gives health probes, autoscaling, and persistent storage. Self-healing was verified: a deleted pod returns in ~1 second.</a:t>
+            </a:r>
+          </a:p>
+        </p:txBody>
+      </p:sp>
+      <p:sp>
+        <p:nvSpPr>
+          <p:cNvPr id="4" name="Slide Number Placeholder 3"/>
+          <p:cNvSpPr>
+            <a:spLocks noGrp="1"/>
+          </p:cNvSpPr>
+          <p:nvPr>
+            <p:ph type="sldNum" idx="5" sz="quarter"/>
+          </p:nvPr>
+        </p:nvSpPr>
+        <p:spPr/>
+      </p:sp>
+    </p:spTree>
+  </p:cSld>
+  <p:clrMapOvr>
+    <a:masterClrMapping/>
+  </p:clrMapOvr>
+</p:notes>
+</file>
+
+<file path=ppt/notesSlides/notesSlide25.xml><?xml version="1.0" encoding="utf-8"?>
+<p:notes xmlns:a="http://schemas.openxmlformats.org/drawingml/2006/main" xmlns:p="http://schemas.openxmlformats.org/presentationml/2006/main" xmlns:r="http://schemas.openxmlformats.org/officeDocument/2006/relationships">
+  <p:cSld>
+    <p:spTree>
+      <p:nvGrpSpPr>
+        <p:cNvPr id="1" name=""/>
+        <p:cNvGrpSpPr/>
+        <p:nvPr/>
+      </p:nvGrpSpPr>
+      <p:grpSpPr>
+        <a:xfrm>
+          <a:off x="0" y="0"/>
+          <a:ext cx="0" cy="0"/>
+          <a:chOff x="0" y="0"/>
+          <a:chExt cx="0" cy="0"/>
+        </a:xfrm>
+      </p:grpSpPr>
+      <p:sp>
+        <p:nvSpPr>
+          <p:cNvPr id="2" name="Slide Image Placeholder 1"/>
+          <p:cNvSpPr>
+            <a:spLocks noGrp="1"/>
+          </p:cNvSpPr>
+          <p:nvPr>
+            <p:ph type="sldImg" idx="2"/>
+          </p:nvPr>
+        </p:nvSpPr>
+        <p:spPr/>
+      </p:sp>
+      <p:sp>
+        <p:nvSpPr>
+          <p:cNvPr id="3" name="Notes Placeholder 2"/>
+          <p:cNvSpPr>
+            <a:spLocks noGrp="1"/>
+          </p:cNvSpPr>
+          <p:nvPr>
+            <p:ph type="body" idx="3" sz="quarter"/>
+          </p:nvPr>
+        </p:nvSpPr>
+        <p:spPr/>
+        <p:txBody>
+          <a:bodyPr/>
+          <a:lstStyle/>
+          <a:p>
+            <a:r>
+              <a:t>Table II: SVM best at ROC-AUC 0.969, F1 0.811. Explain why ROC-AUC/F1 matter more than raw accuracy on imbalanced delay data.</a:t>
+            </a:r>
+          </a:p>
+        </p:txBody>
+      </p:sp>
+      <p:sp>
+        <p:nvSpPr>
+          <p:cNvPr id="4" name="Slide Number Placeholder 3"/>
+          <p:cNvSpPr>
+            <a:spLocks noGrp="1"/>
+          </p:cNvSpPr>
+          <p:nvPr>
+            <p:ph type="sldNum" idx="5" sz="quarter"/>
+          </p:nvPr>
+        </p:nvSpPr>
+        <p:spPr/>
+      </p:sp>
+    </p:spTree>
+  </p:cSld>
+  <p:clrMapOvr>
+    <a:masterClrMapping/>
+  </p:clrMapOvr>
+</p:notes>
+</file>
+
+<file path=ppt/notesSlides/notesSlide26.xml><?xml version="1.0" encoding="utf-8"?>
+<p:notes xmlns:a="http://schemas.openxmlformats.org/drawingml/2006/main" xmlns:p="http://schemas.openxmlformats.org/presentationml/2006/main" xmlns:r="http://schemas.openxmlformats.org/officeDocument/2006/relationships">
+  <p:cSld>
+    <p:spTree>
+      <p:nvGrpSpPr>
+        <p:cNvPr id="1" name=""/>
+        <p:cNvGrpSpPr/>
+        <p:nvPr/>
+      </p:nvGrpSpPr>
+      <p:grpSpPr>
+        <a:xfrm>
+          <a:off x="0" y="0"/>
+          <a:ext cx="0" cy="0"/>
+          <a:chOff x="0" y="0"/>
+          <a:chExt cx="0" cy="0"/>
+        </a:xfrm>
+      </p:grpSpPr>
+      <p:sp>
+        <p:nvSpPr>
+          <p:cNvPr id="2" name="Slide Image Placeholder 1"/>
+          <p:cNvSpPr>
+            <a:spLocks noGrp="1"/>
+          </p:cNvSpPr>
+          <p:nvPr>
+            <p:ph type="sldImg" idx="2"/>
+          </p:nvPr>
+        </p:nvSpPr>
+        <p:spPr/>
+      </p:sp>
+      <p:sp>
+        <p:nvSpPr>
+          <p:cNvPr id="3" name="Notes Placeholder 2"/>
+          <p:cNvSpPr>
+            <a:spLocks noGrp="1"/>
+          </p:cNvSpPr>
+          <p:nvPr>
+            <p:ph type="body" idx="3" sz="quarter"/>
+          </p:nvPr>
+        </p:nvSpPr>
+        <p:spPr/>
+        <p:txBody>
+          <a:bodyPr/>
+          <a:lstStyle/>
+          <a:p>
+            <a:r>
+              <a:t>Six checks passed: EVM identities, E2E verification, self-healing, autoscaling, ingestion integrity, reproducibility.</a:t>
+            </a:r>
+          </a:p>
+        </p:txBody>
+      </p:sp>
+      <p:sp>
+        <p:nvSpPr>
+          <p:cNvPr id="4" name="Slide Number Placeholder 3"/>
+          <p:cNvSpPr>
+            <a:spLocks noGrp="1"/>
+          </p:cNvSpPr>
+          <p:nvPr>
+            <p:ph type="sldNum" idx="5" sz="quarter"/>
+          </p:nvPr>
+        </p:nvSpPr>
+        <p:spPr/>
+      </p:sp>
+    </p:spTree>
+  </p:cSld>
+  <p:clrMapOvr>
+    <a:masterClrMapping/>
+  </p:clrMapOvr>
+</p:notes>
+</file>
+
+<file path=ppt/notesSlides/notesSlide27.xml><?xml version="1.0" encoding="utf-8"?>
+<p:notes xmlns:a="http://schemas.openxmlformats.org/drawingml/2006/main" xmlns:p="http://schemas.openxmlformats.org/presentationml/2006/main" xmlns:r="http://schemas.openxmlformats.org/officeDocument/2006/relationships">
+  <p:cSld>
+    <p:spTree>
+      <p:nvGrpSpPr>
+        <p:cNvPr id="1" name=""/>
+        <p:cNvGrpSpPr/>
+        <p:nvPr/>
+      </p:nvGrpSpPr>
+      <p:grpSpPr>
+        <a:xfrm>
+          <a:off x="0" y="0"/>
+          <a:ext cx="0" cy="0"/>
+          <a:chOff x="0" y="0"/>
+          <a:chExt cx="0" cy="0"/>
+        </a:xfrm>
+      </p:grpSpPr>
+      <p:sp>
+        <p:nvSpPr>
+          <p:cNvPr id="2" name="Slide Image Placeholder 1"/>
+          <p:cNvSpPr>
+            <a:spLocks noGrp="1"/>
+          </p:cNvSpPr>
+          <p:nvPr>
+            <p:ph type="sldImg" idx="2"/>
+          </p:nvPr>
+        </p:nvSpPr>
+        <p:spPr/>
+      </p:sp>
+      <p:sp>
+        <p:nvSpPr>
+          <p:cNvPr id="3" name="Notes Placeholder 2"/>
+          <p:cNvSpPr>
+            <a:spLocks noGrp="1"/>
+          </p:cNvSpPr>
+          <p:nvPr>
+            <p:ph type="body" idx="3" sz="quarter"/>
+          </p:nvPr>
+        </p:nvSpPr>
+        <p:spPr/>
+        <p:txBody>
+          <a:bodyPr/>
+          <a:lstStyle/>
+          <a:p>
+            <a:r>
+              <a:t>One command on Linux/macOS (./run.sh) or Windows (._x000D_un.ps1). The six-stage flow runs automatically and prints the dashboard URL.</a:t>
+            </a:r>
+          </a:p>
+        </p:txBody>
+      </p:sp>
+      <p:sp>
+        <p:nvSpPr>
+          <p:cNvPr id="4" name="Slide Number Placeholder 3"/>
+          <p:cNvSpPr>
+            <a:spLocks noGrp="1"/>
+          </p:cNvSpPr>
+          <p:nvPr>
+            <p:ph type="sldNum" idx="5" sz="quarter"/>
+          </p:nvPr>
+        </p:nvSpPr>
+        <p:spPr/>
+      </p:sp>
+    </p:spTree>
+  </p:cSld>
+  <p:clrMapOvr>
+    <a:masterClrMapping/>
+  </p:clrMapOvr>
+</p:notes>
+</file>
+
+<file path=ppt/notesSlides/notesSlide28.xml><?xml version="1.0" encoding="utf-8"?>
+<p:notes xmlns:a="http://schemas.openxmlformats.org/drawingml/2006/main" xmlns:p="http://schemas.openxmlformats.org/presentationml/2006/main" xmlns:r="http://schemas.openxmlformats.org/officeDocument/2006/relationships">
+  <p:cSld>
+    <p:spTree>
+      <p:nvGrpSpPr>
+        <p:cNvPr id="1" name=""/>
+        <p:cNvGrpSpPr/>
+        <p:nvPr/>
+      </p:nvGrpSpPr>
+      <p:grpSpPr>
+        <a:xfrm>
+          <a:off x="0" y="0"/>
+          <a:ext cx="0" cy="0"/>
+          <a:chOff x="0" y="0"/>
+          <a:chExt cx="0" cy="0"/>
+        </a:xfrm>
+      </p:grpSpPr>
+      <p:sp>
+        <p:nvSpPr>
+          <p:cNvPr id="2" name="Slide Image Placeholder 1"/>
+          <p:cNvSpPr>
+            <a:spLocks noGrp="1"/>
+          </p:cNvSpPr>
+          <p:nvPr>
+            <p:ph type="sldImg" idx="2"/>
+          </p:nvPr>
+        </p:nvSpPr>
+        <p:spPr/>
+      </p:sp>
+      <p:sp>
+        <p:nvSpPr>
+          <p:cNvPr id="3" name="Notes Placeholder 2"/>
+          <p:cNvSpPr>
+            <a:spLocks noGrp="1"/>
+          </p:cNvSpPr>
+          <p:nvPr>
+            <p:ph type="body" idx="3" sz="quarter"/>
+          </p:nvPr>
+        </p:nvSpPr>
+        <p:spPr/>
+        <p:txBody>
+          <a:bodyPr/>
+          <a:lstStyle/>
+          <a:p>
+            <a:r>
+              <a:t>Six contributions. The headline: one reproducible platform that unifies the whole project-control pipeline.</a:t>
+            </a:r>
+          </a:p>
+        </p:txBody>
+      </p:sp>
+      <p:sp>
+        <p:nvSpPr>
+          <p:cNvPr id="4" name="Slide Number Placeholder 3"/>
+          <p:cNvSpPr>
+            <a:spLocks noGrp="1"/>
+          </p:cNvSpPr>
+          <p:nvPr>
+            <p:ph type="sldNum" idx="5" sz="quarter"/>
+          </p:nvPr>
+        </p:nvSpPr>
+        <p:spPr/>
+      </p:sp>
+    </p:spTree>
+  </p:cSld>
+  <p:clrMapOvr>
+    <a:masterClrMapping/>
+  </p:clrMapOvr>
+</p:notes>
+</file>
+
+<file path=ppt/notesSlides/notesSlide29.xml><?xml version="1.0" encoding="utf-8"?>
+<p:notes xmlns:a="http://schemas.openxmlformats.org/drawingml/2006/main" xmlns:p="http://schemas.openxmlformats.org/presentationml/2006/main" xmlns:r="http://schemas.openxmlformats.org/officeDocument/2006/relationships">
+  <p:cSld>
+    <p:spTree>
+      <p:nvGrpSpPr>
+        <p:cNvPr id="1" name=""/>
+        <p:cNvGrpSpPr/>
+        <p:nvPr/>
+      </p:nvGrpSpPr>
+      <p:grpSpPr>
+        <a:xfrm>
+          <a:off x="0" y="0"/>
+          <a:ext cx="0" cy="0"/>
+          <a:chOff x="0" y="0"/>
+          <a:chExt cx="0" cy="0"/>
+        </a:xfrm>
+      </p:grpSpPr>
+      <p:sp>
+        <p:nvSpPr>
+          <p:cNvPr id="2" name="Slide Image Placeholder 1"/>
+          <p:cNvSpPr>
+            <a:spLocks noGrp="1"/>
+          </p:cNvSpPr>
+          <p:nvPr>
+            <p:ph type="sldImg" idx="2"/>
+          </p:nvPr>
+        </p:nvSpPr>
+        <p:spPr/>
+      </p:sp>
+      <p:sp>
+        <p:nvSpPr>
+          <p:cNvPr id="3" name="Notes Placeholder 2"/>
+          <p:cNvSpPr>
+            <a:spLocks noGrp="1"/>
+          </p:cNvSpPr>
+          <p:nvPr>
+            <p:ph type="body" idx="3" sz="quarter"/>
+          </p:nvPr>
+        </p:nvSpPr>
+        <p:spPr/>
+        <p:txBody>
+          <a:bodyPr/>
+          <a:lstStyle/>
+          <a:p>
+            <a:r>
+              <a:t>Be honest: synthetic data, correlational model, baseline dependency, single-node cluster, no auth, network dependency. Each has a path forward.</a:t>
+            </a:r>
+          </a:p>
+        </p:txBody>
+      </p:sp>
+      <p:sp>
+        <p:nvSpPr>
+          <p:cNvPr id="4" name="Slide Number Placeholder 3"/>
+          <p:cNvSpPr>
+            <a:spLocks noGrp="1"/>
+          </p:cNvSpPr>
+          <p:nvPr>
+            <p:ph type="sldNum" idx="5" sz="quarter"/>
+          </p:nvPr>
+        </p:nvSpPr>
+        <p:spPr/>
+      </p:sp>
+    </p:spTree>
+  </p:cSld>
+  <p:clrMapOvr>
+    <a:masterClrMapping/>
+  </p:clrMapOvr>
+</p:notes>
+</file>
+
+<file path=ppt/notesSlides/notesSlide3.xml><?xml version="1.0" encoding="utf-8"?>
+<p:notes xmlns:a="http://schemas.openxmlformats.org/drawingml/2006/main" xmlns:p="http://schemas.openxmlformats.org/presentationml/2006/main" xmlns:r="http://schemas.openxmlformats.org/officeDocument/2006/relationships">
+  <p:cSld>
+    <p:spTree>
+      <p:nvGrpSpPr>
+        <p:cNvPr id="1" name=""/>
+        <p:cNvGrpSpPr/>
+        <p:nvPr/>
+      </p:nvGrpSpPr>
+      <p:grpSpPr>
+        <a:xfrm>
+          <a:off x="0" y="0"/>
+          <a:ext cx="0" cy="0"/>
+          <a:chOff x="0" y="0"/>
+          <a:chExt cx="0" cy="0"/>
+        </a:xfrm>
+      </p:grpSpPr>
+      <p:sp>
+        <p:nvSpPr>
+          <p:cNvPr id="2" name="Slide Image Placeholder 1"/>
+          <p:cNvSpPr>
+            <a:spLocks noGrp="1"/>
+          </p:cNvSpPr>
+          <p:nvPr>
+            <p:ph type="sldImg" idx="2"/>
+          </p:nvPr>
+        </p:nvSpPr>
+        <p:spPr/>
+      </p:sp>
+      <p:sp>
+        <p:nvSpPr>
+          <p:cNvPr id="3" name="Notes Placeholder 2"/>
+          <p:cNvSpPr>
+            <a:spLocks noGrp="1"/>
+          </p:cNvSpPr>
+          <p:nvPr>
+            <p:ph type="body" idx="3" sz="quarter"/>
+          </p:nvPr>
+        </p:nvSpPr>
+        <p:spPr/>
+        <p:txBody>
+          <a:bodyPr/>
+          <a:lstStyle/>
+          <a:p>
+            <a:r>
+              <a:t>Walk the audience through the flow: why (motivation) -&gt; what's missing (gap) -&gt; how we built it -&gt; proof it works (live screenshots + results) -&gt; conclusion.</a:t>
+            </a:r>
+          </a:p>
+        </p:txBody>
+      </p:sp>
+      <p:sp>
+        <p:nvSpPr>
+          <p:cNvPr id="4" name="Slide Number Placeholder 3"/>
+          <p:cNvSpPr>
+            <a:spLocks noGrp="1"/>
+          </p:cNvSpPr>
+          <p:nvPr>
+            <p:ph type="sldNum" idx="5" sz="quarter"/>
+          </p:nvPr>
+        </p:nvSpPr>
+        <p:spPr/>
+      </p:sp>
+    </p:spTree>
+  </p:cSld>
+  <p:clrMapOvr>
+    <a:masterClrMapping/>
+  </p:clrMapOvr>
+</p:notes>
+</file>
+
+<file path=ppt/notesSlides/notesSlide30.xml><?xml version="1.0" encoding="utf-8"?>
+<p:notes xmlns:a="http://schemas.openxmlformats.org/drawingml/2006/main" xmlns:p="http://schemas.openxmlformats.org/presentationml/2006/main" xmlns:r="http://schemas.openxmlformats.org/officeDocument/2006/relationships">
+  <p:cSld>
+    <p:spTree>
+      <p:nvGrpSpPr>
+        <p:cNvPr id="1" name=""/>
+        <p:cNvGrpSpPr/>
+        <p:nvPr/>
+      </p:nvGrpSpPr>
+      <p:grpSpPr>
+        <a:xfrm>
+          <a:off x="0" y="0"/>
+          <a:ext cx="0" cy="0"/>
+          <a:chOff x="0" y="0"/>
+          <a:chExt cx="0" cy="0"/>
+        </a:xfrm>
+      </p:grpSpPr>
+      <p:sp>
+        <p:nvSpPr>
+          <p:cNvPr id="2" name="Slide Image Placeholder 1"/>
+          <p:cNvSpPr>
+            <a:spLocks noGrp="1"/>
+          </p:cNvSpPr>
+          <p:nvPr>
+            <p:ph type="sldImg" idx="2"/>
+          </p:nvPr>
+        </p:nvSpPr>
+        <p:spPr/>
+      </p:sp>
+      <p:sp>
+        <p:nvSpPr>
+          <p:cNvPr id="3" name="Notes Placeholder 2"/>
+          <p:cNvSpPr>
+            <a:spLocks noGrp="1"/>
+          </p:cNvSpPr>
+          <p:nvPr>
+            <p:ph type="body" idx="3" sz="quarter"/>
+          </p:nvPr>
+        </p:nvSpPr>
+        <p:spPr/>
+        <p:txBody>
+          <a:bodyPr/>
+          <a:lstStyle/>
+          <a:p>
+            <a:r>
+              <a:t>Vision feeds, 4D BIM, real-world validation, graph features, access control, cost forecasting.</a:t>
+            </a:r>
+          </a:p>
+        </p:txBody>
+      </p:sp>
+      <p:sp>
+        <p:nvSpPr>
+          <p:cNvPr id="4" name="Slide Number Placeholder 3"/>
+          <p:cNvSpPr>
+            <a:spLocks noGrp="1"/>
+          </p:cNvSpPr>
+          <p:nvPr>
+            <p:ph type="sldNum" idx="5" sz="quarter"/>
+          </p:nvPr>
+        </p:nvSpPr>
+        <p:spPr/>
+      </p:sp>
+    </p:spTree>
+  </p:cSld>
+  <p:clrMapOvr>
+    <a:masterClrMapping/>
+  </p:clrMapOvr>
+</p:notes>
+</file>
+
+<file path=ppt/notesSlides/notesSlide31.xml><?xml version="1.0" encoding="utf-8"?>
+<p:notes xmlns:a="http://schemas.openxmlformats.org/drawingml/2006/main" xmlns:p="http://schemas.openxmlformats.org/presentationml/2006/main" xmlns:r="http://schemas.openxmlformats.org/officeDocument/2006/relationships">
+  <p:cSld>
+    <p:spTree>
+      <p:nvGrpSpPr>
+        <p:cNvPr id="1" name=""/>
+        <p:cNvGrpSpPr/>
+        <p:nvPr/>
+      </p:nvGrpSpPr>
+      <p:grpSpPr>
+        <a:xfrm>
+          <a:off x="0" y="0"/>
+          <a:ext cx="0" cy="0"/>
+          <a:chOff x="0" y="0"/>
+          <a:chExt cx="0" cy="0"/>
+        </a:xfrm>
+      </p:grpSpPr>
+      <p:sp>
+        <p:nvSpPr>
+          <p:cNvPr id="2" name="Slide Image Placeholder 1"/>
+          <p:cNvSpPr>
+            <a:spLocks noGrp="1"/>
+          </p:cNvSpPr>
+          <p:nvPr>
+            <p:ph type="sldImg" idx="2"/>
+          </p:nvPr>
+        </p:nvSpPr>
+        <p:spPr/>
+      </p:sp>
+      <p:sp>
+        <p:nvSpPr>
+          <p:cNvPr id="3" name="Notes Placeholder 2"/>
+          <p:cNvSpPr>
+            <a:spLocks noGrp="1"/>
+          </p:cNvSpPr>
+          <p:nvPr>
+            <p:ph type="body" idx="3" sz="quarter"/>
+          </p:nvPr>
+        </p:nvSpPr>
+        <p:spPr/>
+        <p:txBody>
+          <a:bodyPr/>
+          <a:lstStyle/>
+          <a:p>
+            <a:r>
+              <a:t>Full citations for the literature underpinning the design.</a:t>
+            </a:r>
+          </a:p>
+        </p:txBody>
+      </p:sp>
+      <p:sp>
+        <p:nvSpPr>
+          <p:cNvPr id="4" name="Slide Number Placeholder 3"/>
+          <p:cNvSpPr>
+            <a:spLocks noGrp="1"/>
+          </p:cNvSpPr>
+          <p:nvPr>
+            <p:ph type="sldNum" idx="5" sz="quarter"/>
+          </p:nvPr>
+        </p:nvSpPr>
+        <p:spPr/>
+      </p:sp>
+    </p:spTree>
+  </p:cSld>
+  <p:clrMapOvr>
+    <a:masterClrMapping/>
+  </p:clrMapOvr>
+</p:notes>
+</file>
+
+<file path=ppt/notesSlides/notesSlide4.xml><?xml version="1.0" encoding="utf-8"?>
+<p:notes xmlns:a="http://schemas.openxmlformats.org/drawingml/2006/main" xmlns:p="http://schemas.openxmlformats.org/presentationml/2006/main" xmlns:r="http://schemas.openxmlformats.org/officeDocument/2006/relationships">
+  <p:cSld>
+    <p:spTree>
+      <p:nvGrpSpPr>
+        <p:cNvPr id="1" name=""/>
+        <p:cNvGrpSpPr/>
+        <p:nvPr/>
+      </p:nvGrpSpPr>
+      <p:grpSpPr>
+        <a:xfrm>
+          <a:off x="0" y="0"/>
+          <a:ext cx="0" cy="0"/>
+          <a:chOff x="0" y="0"/>
+          <a:chExt cx="0" cy="0"/>
+        </a:xfrm>
+      </p:grpSpPr>
+      <p:sp>
+        <p:nvSpPr>
+          <p:cNvPr id="2" name="Slide Image Placeholder 1"/>
+          <p:cNvSpPr>
+            <a:spLocks noGrp="1"/>
+          </p:cNvSpPr>
+          <p:nvPr>
+            <p:ph type="sldImg" idx="2"/>
+          </p:nvPr>
+        </p:nvSpPr>
+        <p:spPr/>
+      </p:sp>
+      <p:sp>
+        <p:nvSpPr>
+          <p:cNvPr id="3" name="Notes Placeholder 2"/>
+          <p:cNvSpPr>
+            <a:spLocks noGrp="1"/>
+          </p:cNvSpPr>
+          <p:nvPr>
+            <p:ph type="body" idx="3" sz="quarter"/>
+          </p:nvPr>
+        </p:nvSpPr>
+        <p:spPr/>
+        <p:txBody>
+          <a:bodyPr/>
+          <a:lstStyle/>
+          <a:p>
+            <a:r>
+              <a:t>Plain-language summary. If someone remembers nothing else, they should remember: 'it turns scattered project data into early warnings on a dashboard.'</a:t>
+            </a:r>
+          </a:p>
+        </p:txBody>
+      </p:sp>
+      <p:sp>
+        <p:nvSpPr>
+          <p:cNvPr id="4" name="Slide Number Placeholder 3"/>
+          <p:cNvSpPr>
+            <a:spLocks noGrp="1"/>
+          </p:cNvSpPr>
+          <p:nvPr>
+            <p:ph type="sldNum" idx="5" sz="quarter"/>
+          </p:nvPr>
+        </p:nvSpPr>
+        <p:spPr/>
+      </p:sp>
+    </p:spTree>
+  </p:cSld>
+  <p:clrMapOvr>
+    <a:masterClrMapping/>
+  </p:clrMapOvr>
+</p:notes>
+</file>
+
+<file path=ppt/notesSlides/notesSlide5.xml><?xml version="1.0" encoding="utf-8"?>
+<p:notes xmlns:a="http://schemas.openxmlformats.org/drawingml/2006/main" xmlns:p="http://schemas.openxmlformats.org/presentationml/2006/main" xmlns:r="http://schemas.openxmlformats.org/officeDocument/2006/relationships">
+  <p:cSld>
+    <p:spTree>
+      <p:nvGrpSpPr>
+        <p:cNvPr id="1" name=""/>
+        <p:cNvGrpSpPr/>
+        <p:nvPr/>
+      </p:nvGrpSpPr>
+      <p:grpSpPr>
+        <a:xfrm>
+          <a:off x="0" y="0"/>
+          <a:ext cx="0" cy="0"/>
+          <a:chOff x="0" y="0"/>
+          <a:chExt cx="0" cy="0"/>
+        </a:xfrm>
+      </p:grpSpPr>
+      <p:sp>
+        <p:nvSpPr>
+          <p:cNvPr id="2" name="Slide Image Placeholder 1"/>
+          <p:cNvSpPr>
+            <a:spLocks noGrp="1"/>
+          </p:cNvSpPr>
+          <p:nvPr>
+            <p:ph type="sldImg" idx="2"/>
+          </p:nvPr>
+        </p:nvSpPr>
+        <p:spPr/>
+      </p:sp>
+      <p:sp>
+        <p:nvSpPr>
+          <p:cNvPr id="3" name="Notes Placeholder 2"/>
+          <p:cNvSpPr>
+            <a:spLocks noGrp="1"/>
+          </p:cNvSpPr>
+          <p:nvPr>
+            <p:ph type="body" idx="3" sz="quarter"/>
+          </p:nvPr>
+        </p:nvSpPr>
+        <p:spPr/>
+        <p:txBody>
+          <a:bodyPr/>
+          <a:lstStyle/>
+          <a:p>
+            <a:r>
+              <a:t>Define the jargon before using it. EVM, PV, EV, AC, CPI, SPI, EAC and delay-risk. Point out CPI and SPI rule of thumb: &gt;1 good, &lt;1 bad.</a:t>
+            </a:r>
+          </a:p>
+        </p:txBody>
+      </p:sp>
+      <p:sp>
+        <p:nvSpPr>
+          <p:cNvPr id="4" name="Slide Number Placeholder 3"/>
+          <p:cNvSpPr>
+            <a:spLocks noGrp="1"/>
+          </p:cNvSpPr>
+          <p:nvPr>
+            <p:ph type="sldNum" idx="5" sz="quarter"/>
+          </p:nvPr>
+        </p:nvSpPr>
+        <p:spPr/>
+      </p:sp>
+    </p:spTree>
+  </p:cSld>
+  <p:clrMapOvr>
+    <a:masterClrMapping/>
+  </p:clrMapOvr>
+</p:notes>
+</file>
+
+<file path=ppt/notesSlides/notesSlide6.xml><?xml version="1.0" encoding="utf-8"?>
+<p:notes xmlns:a="http://schemas.openxmlformats.org/drawingml/2006/main" xmlns:p="http://schemas.openxmlformats.org/presentationml/2006/main" xmlns:r="http://schemas.openxmlformats.org/officeDocument/2006/relationships">
+  <p:cSld>
+    <p:spTree>
+      <p:nvGrpSpPr>
+        <p:cNvPr id="1" name=""/>
+        <p:cNvGrpSpPr/>
+        <p:nvPr/>
+      </p:nvGrpSpPr>
+      <p:grpSpPr>
+        <a:xfrm>
+          <a:off x="0" y="0"/>
+          <a:ext cx="0" cy="0"/>
+          <a:chOff x="0" y="0"/>
+          <a:chExt cx="0" cy="0"/>
+        </a:xfrm>
+      </p:grpSpPr>
+      <p:sp>
+        <p:nvSpPr>
+          <p:cNvPr id="2" name="Slide Image Placeholder 1"/>
+          <p:cNvSpPr>
+            <a:spLocks noGrp="1"/>
+          </p:cNvSpPr>
+          <p:nvPr>
+            <p:ph type="sldImg" idx="2"/>
+          </p:nvPr>
+        </p:nvSpPr>
+        <p:spPr/>
+      </p:sp>
+      <p:sp>
+        <p:nvSpPr>
+          <p:cNvPr id="3" name="Notes Placeholder 2"/>
+          <p:cNvSpPr>
+            <a:spLocks noGrp="1"/>
+          </p:cNvSpPr>
+          <p:nvPr>
+            <p:ph type="body" idx="3" sz="quarter"/>
+          </p:nvPr>
+        </p:nvSpPr>
+        <p:spPr/>
+        <p:txBody>
+          <a:bodyPr/>
+          <a:lstStyle/>
+          <a:p>
+            <a:r>
+              <a:t>Construction runs on the triple constraint. Despite P6/MS Project, overruns persist because data is fragmented and reported late. Industry 4.0 tools exist but are siloed.</a:t>
+            </a:r>
+          </a:p>
+        </p:txBody>
+      </p:sp>
+      <p:sp>
+        <p:nvSpPr>
+          <p:cNvPr id="4" name="Slide Number Placeholder 3"/>
+          <p:cNvSpPr>
+            <a:spLocks noGrp="1"/>
+          </p:cNvSpPr>
+          <p:nvPr>
+            <p:ph type="sldNum" idx="5" sz="quarter"/>
+          </p:nvPr>
+        </p:nvSpPr>
+        <p:spPr/>
+      </p:sp>
+    </p:spTree>
+  </p:cSld>
+  <p:clrMapOvr>
+    <a:masterClrMapping/>
+  </p:clrMapOvr>
+</p:notes>
+</file>
+
+<file path=ppt/notesSlides/notesSlide7.xml><?xml version="1.0" encoding="utf-8"?>
+<p:notes xmlns:a="http://schemas.openxmlformats.org/drawingml/2006/main" xmlns:p="http://schemas.openxmlformats.org/presentationml/2006/main" xmlns:r="http://schemas.openxmlformats.org/officeDocument/2006/relationships">
+  <p:cSld>
+    <p:spTree>
+      <p:nvGrpSpPr>
+        <p:cNvPr id="1" name=""/>
+        <p:cNvGrpSpPr/>
+        <p:nvPr/>
+      </p:nvGrpSpPr>
+      <p:grpSpPr>
+        <a:xfrm>
+          <a:off x="0" y="0"/>
+          <a:ext cx="0" cy="0"/>
+          <a:chOff x="0" y="0"/>
+          <a:chExt cx="0" cy="0"/>
+        </a:xfrm>
+      </p:grpSpPr>
+      <p:sp>
+        <p:nvSpPr>
+          <p:cNvPr id="2" name="Slide Image Placeholder 1"/>
+          <p:cNvSpPr>
+            <a:spLocks noGrp="1"/>
+          </p:cNvSpPr>
+          <p:nvPr>
+            <p:ph type="sldImg" idx="2"/>
+          </p:nvPr>
+        </p:nvSpPr>
+        <p:spPr/>
+      </p:sp>
+      <p:sp>
+        <p:nvSpPr>
+          <p:cNvPr id="3" name="Notes Placeholder 2"/>
+          <p:cNvSpPr>
+            <a:spLocks noGrp="1"/>
+          </p:cNvSpPr>
+          <p:nvPr>
+            <p:ph type="body" idx="3" sz="quarter"/>
+          </p:nvPr>
+        </p:nvSpPr>
+        <p:spPr/>
+        <p:txBody>
+          <a:bodyPr/>
+          <a:lstStyle/>
+          <a:p>
+            <a:r>
+              <a:t>Three deficiencies: fragmentation, retrospection (EVM is backward-looking), and analytics disconnected from deployment. The consequence is reacting too late.</a:t>
+            </a:r>
+          </a:p>
+        </p:txBody>
+      </p:sp>
+      <p:sp>
+        <p:nvSpPr>
+          <p:cNvPr id="4" name="Slide Number Placeholder 3"/>
+          <p:cNvSpPr>
+            <a:spLocks noGrp="1"/>
+          </p:cNvSpPr>
+          <p:nvPr>
+            <p:ph type="sldNum" idx="5" sz="quarter"/>
+          </p:nvPr>
+        </p:nvSpPr>
+        <p:spPr/>
+      </p:sp>
+    </p:spTree>
+  </p:cSld>
+  <p:clrMapOvr>
+    <a:masterClrMapping/>
+  </p:clrMapOvr>
+</p:notes>
+</file>
+
+<file path=ppt/notesSlides/notesSlide8.xml><?xml version="1.0" encoding="utf-8"?>
+<p:notes xmlns:a="http://schemas.openxmlformats.org/drawingml/2006/main" xmlns:p="http://schemas.openxmlformats.org/presentationml/2006/main" xmlns:r="http://schemas.openxmlformats.org/officeDocument/2006/relationships">
+  <p:cSld>
+    <p:spTree>
+      <p:nvGrpSpPr>
+        <p:cNvPr id="1" name=""/>
+        <p:cNvGrpSpPr/>
+        <p:nvPr/>
+      </p:nvGrpSpPr>
+      <p:grpSpPr>
+        <a:xfrm>
+          <a:off x="0" y="0"/>
+          <a:ext cx="0" cy="0"/>
+          <a:chOff x="0" y="0"/>
+          <a:chExt cx="0" cy="0"/>
+        </a:xfrm>
+      </p:grpSpPr>
+      <p:sp>
+        <p:nvSpPr>
+          <p:cNvPr id="2" name="Slide Image Placeholder 1"/>
+          <p:cNvSpPr>
+            <a:spLocks noGrp="1"/>
+          </p:cNvSpPr>
+          <p:nvPr>
+            <p:ph type="sldImg" idx="2"/>
+          </p:nvPr>
+        </p:nvSpPr>
+        <p:spPr/>
+      </p:sp>
+      <p:sp>
+        <p:nvSpPr>
+          <p:cNvPr id="3" name="Notes Placeholder 2"/>
+          <p:cNvSpPr>
+            <a:spLocks noGrp="1"/>
+          </p:cNvSpPr>
+          <p:nvPr>
+            <p:ph type="body" idx="3" sz="quarter"/>
+          </p:nvPr>
+        </p:nvSpPr>
+        <p:spPr/>
+        <p:txBody>
+          <a:bodyPr/>
+          <a:lstStyle/>
+          <a:p>
+            <a:r>
+              <a:t>Prior visualization and lifecycle work is mature but descriptive and schedule-centric. Cite Chiu &amp; Russell, Al-Sulaiti, Radman.</a:t>
+            </a:r>
+          </a:p>
+        </p:txBody>
+      </p:sp>
+      <p:sp>
+        <p:nvSpPr>
+          <p:cNvPr id="4" name="Slide Number Placeholder 3"/>
+          <p:cNvSpPr>
+            <a:spLocks noGrp="1"/>
+          </p:cNvSpPr>
+          <p:nvPr>
+            <p:ph type="sldNum" idx="5" sz="quarter"/>
+          </p:nvPr>
+        </p:nvSpPr>
+        <p:spPr/>
+      </p:sp>
+    </p:spTree>
+  </p:cSld>
+  <p:clrMapOvr>
+    <a:masterClrMapping/>
+  </p:clrMapOvr>
+</p:notes>
+</file>
+
+<file path=ppt/notesSlides/notesSlide9.xml><?xml version="1.0" encoding="utf-8"?>
+<p:notes xmlns:a="http://schemas.openxmlformats.org/drawingml/2006/main" xmlns:p="http://schemas.openxmlformats.org/presentationml/2006/main" xmlns:r="http://schemas.openxmlformats.org/officeDocument/2006/relationships">
+  <p:cSld>
+    <p:spTree>
+      <p:nvGrpSpPr>
+        <p:cNvPr id="1" name=""/>
+        <p:cNvGrpSpPr/>
+        <p:nvPr/>
+      </p:nvGrpSpPr>
+      <p:grpSpPr>
+        <a:xfrm>
+          <a:off x="0" y="0"/>
+          <a:ext cx="0" cy="0"/>
+          <a:chOff x="0" y="0"/>
+          <a:chExt cx="0" cy="0"/>
+        </a:xfrm>
+      </p:grpSpPr>
+      <p:sp>
+        <p:nvSpPr>
+          <p:cNvPr id="2" name="Slide Image Placeholder 1"/>
+          <p:cNvSpPr>
+            <a:spLocks noGrp="1"/>
+          </p:cNvSpPr>
+          <p:nvPr>
+            <p:ph type="sldImg" idx="2"/>
+          </p:nvPr>
+        </p:nvSpPr>
+        <p:spPr/>
+      </p:sp>
+      <p:sp>
+        <p:nvSpPr>
+          <p:cNvPr id="3" name="Notes Placeholder 2"/>
+          <p:cNvSpPr>
+            <a:spLocks noGrp="1"/>
+          </p:cNvSpPr>
+          <p:nvPr>
+            <p:ph type="body" idx="3" sz="quarter"/>
+          </p:nvPr>
+        </p:nvSpPr>
+        <p:spPr/>
+        <p:txBody>
+          <a:bodyPr/>
+          <a:lstStyle/>
+          <a:p>
+            <a:r>
+              <a:t>Predictive and deployment techniques exist (Gajera, Zhang &amp; Wang, RealCONs) but never combined. That isolation is the opening for our work.</a:t>
+            </a:r>
+          </a:p>
+        </p:txBody>
+      </p:sp>
+      <p:sp>
+        <p:nvSpPr>
+          <p:cNvPr id="4" name="Slide Number Placeholder 3"/>
+          <p:cNvSpPr>
+            <a:spLocks noGrp="1"/>
+          </p:cNvSpPr>
+          <p:nvPr>
+            <p:ph type="sldNum" idx="5" sz="quarter"/>
+          </p:nvPr>
+        </p:nvSpPr>
+        <p:spPr/>
+      </p:sp>
+    </p:spTree>
+  </p:cSld>
+  <p:clrMapOvr>
+    <a:masterClrMapping/>
+  </p:clrMapOvr>
+</p:notes>
 </file>
 
 <file path=ppt/slideLayouts/slideLayout1.xml><?xml version="1.0" encoding="utf-8"?>
@@ -5156,13 +7680,13 @@
           <a:p>
             <a:pPr algn="r"/>
             <a:r>
-              <a:rPr sz="900" b="0" i="0">
+              <a:rPr sz="900">
                 <a:solidFill>
                   <a:srgbClr val="94A3B8"/>
                 </a:solidFill>
                 <a:latin typeface="Calibri"/>
               </a:rPr>
-              <a:t>10</a:t>
+              <a:t>12</a:t>
             </a:r>
           </a:p>
         </p:txBody>
@@ -6712,13 +9236,13 @@
           <a:p>
             <a:pPr algn="r"/>
             <a:r>
-              <a:rPr sz="900" b="0" i="0">
+              <a:rPr sz="900">
                 <a:solidFill>
                   <a:srgbClr val="94A3B8"/>
                 </a:solidFill>
                 <a:latin typeface="Calibri"/>
               </a:rPr>
-              <a:t>11</a:t>
+              <a:t>13</a:t>
             </a:r>
           </a:p>
         </p:txBody>
@@ -8032,13 +10556,13 @@
           <a:p>
             <a:pPr algn="r"/>
             <a:r>
-              <a:rPr sz="900" b="0" i="0">
+              <a:rPr sz="900">
                 <a:solidFill>
                   <a:srgbClr val="94A3B8"/>
                 </a:solidFill>
                 <a:latin typeface="Calibri"/>
               </a:rPr>
-              <a:t>12</a:t>
+              <a:t>14</a:t>
             </a:r>
           </a:p>
         </p:txBody>
@@ -8597,13 +11121,13 @@
           <a:p>
             <a:pPr algn="r"/>
             <a:r>
-              <a:rPr sz="900" b="0" i="0">
+              <a:rPr sz="900">
                 <a:solidFill>
                   <a:srgbClr val="94A3B8"/>
                 </a:solidFill>
                 <a:latin typeface="Calibri"/>
               </a:rPr>
-              <a:t>13</a:t>
+              <a:t>15</a:t>
             </a:r>
           </a:p>
         </p:txBody>
@@ -9831,13 +12355,13 @@
           <a:p>
             <a:pPr algn="r"/>
             <a:r>
-              <a:rPr sz="900" b="0" i="0">
+              <a:rPr sz="900">
                 <a:solidFill>
                   <a:srgbClr val="94A3B8"/>
                 </a:solidFill>
                 <a:latin typeface="Calibri"/>
               </a:rPr>
-              <a:t>14</a:t>
+              <a:t>16</a:t>
             </a:r>
           </a:p>
         </p:txBody>
@@ -10983,13 +13507,13 @@
           <a:p>
             <a:pPr algn="r"/>
             <a:r>
-              <a:rPr sz="900" b="0" i="0">
+              <a:rPr sz="900">
                 <a:solidFill>
                   <a:srgbClr val="94A3B8"/>
                 </a:solidFill>
                 <a:latin typeface="Calibri"/>
               </a:rPr>
-              <a:t>15</a:t>
+              <a:t>18</a:t>
             </a:r>
           </a:p>
         </p:txBody>
@@ -11775,13 +14299,13 @@
           <a:p>
             <a:pPr algn="r"/>
             <a:r>
-              <a:rPr sz="900" b="0" i="0">
+              <a:rPr sz="900">
                 <a:solidFill>
                   <a:srgbClr val="94A3B8"/>
                 </a:solidFill>
                 <a:latin typeface="Calibri"/>
               </a:rPr>
-              <a:t>16</a:t>
+              <a:t>19</a:t>
             </a:r>
           </a:p>
         </p:txBody>
@@ -12278,13 +14802,13 @@
           <a:p>
             <a:pPr algn="r"/>
             <a:r>
-              <a:rPr sz="900" b="0" i="0">
+              <a:rPr sz="900">
                 <a:solidFill>
                   <a:srgbClr val="94A3B8"/>
                 </a:solidFill>
                 <a:latin typeface="Calibri"/>
               </a:rPr>
-              <a:t>17</a:t>
+              <a:t>20</a:t>
             </a:r>
           </a:p>
         </p:txBody>
@@ -12781,13 +15305,13 @@
           <a:p>
             <a:pPr algn="r"/>
             <a:r>
-              <a:rPr sz="900" b="0" i="0">
+              <a:rPr sz="900">
                 <a:solidFill>
                   <a:srgbClr val="94A3B8"/>
                 </a:solidFill>
                 <a:latin typeface="Calibri"/>
               </a:rPr>
-              <a:t>18</a:t>
+              <a:t>21</a:t>
             </a:r>
           </a:p>
         </p:txBody>
@@ -13573,13 +16097,13 @@
           <a:p>
             <a:pPr algn="r"/>
             <a:r>
-              <a:rPr sz="900" b="0" i="0">
+              <a:rPr sz="900">
                 <a:solidFill>
                   <a:srgbClr val="94A3B8"/>
                 </a:solidFill>
                 <a:latin typeface="Calibri"/>
               </a:rPr>
-              <a:t>19</a:t>
+              <a:t>22</a:t>
             </a:r>
           </a:p>
         </p:txBody>
@@ -14517,7 +17041,7 @@
           <a:p>
             <a:pPr algn="r"/>
             <a:r>
-              <a:rPr sz="900" b="0" i="0">
+              <a:rPr sz="900">
                 <a:solidFill>
                   <a:srgbClr val="94A3B8"/>
                 </a:solidFill>
@@ -15305,13 +17829,13 @@
           <a:p>
             <a:pPr algn="r"/>
             <a:r>
-              <a:rPr sz="900" b="0" i="0">
+              <a:rPr sz="900">
                 <a:solidFill>
                   <a:srgbClr val="94A3B8"/>
                 </a:solidFill>
                 <a:latin typeface="Calibri"/>
               </a:rPr>
-              <a:t>20</a:t>
+              <a:t>23</a:t>
             </a:r>
           </a:p>
         </p:txBody>
@@ -16586,13 +19110,13 @@
           <a:p>
             <a:pPr algn="r"/>
             <a:r>
-              <a:rPr sz="900" b="0" i="0">
+              <a:rPr sz="900">
                 <a:solidFill>
                   <a:srgbClr val="94A3B8"/>
                 </a:solidFill>
                 <a:latin typeface="Calibri"/>
               </a:rPr>
-              <a:t>21</a:t>
+              <a:t>24</a:t>
             </a:r>
           </a:p>
         </p:txBody>
@@ -17602,13 +20126,13 @@
           <a:p>
             <a:pPr algn="r"/>
             <a:r>
-              <a:rPr sz="900" b="0" i="0">
+              <a:rPr sz="900">
                 <a:solidFill>
                   <a:srgbClr val="94A3B8"/>
                 </a:solidFill>
                 <a:latin typeface="Calibri"/>
               </a:rPr>
-              <a:t>22</a:t>
+              <a:t>25</a:t>
             </a:r>
           </a:p>
         </p:txBody>
@@ -18994,13 +21518,13 @@
           <a:p>
             <a:pPr algn="r"/>
             <a:r>
-              <a:rPr sz="900" b="0" i="0">
+              <a:rPr sz="900">
                 <a:solidFill>
                   <a:srgbClr val="94A3B8"/>
                 </a:solidFill>
                 <a:latin typeface="Calibri"/>
               </a:rPr>
-              <a:t>23</a:t>
+              <a:t>26</a:t>
             </a:r>
           </a:p>
         </p:txBody>
@@ -20438,13 +22962,13 @@
           <a:p>
             <a:pPr algn="r"/>
             <a:r>
-              <a:rPr sz="900" b="0" i="0">
+              <a:rPr sz="900">
                 <a:solidFill>
                   <a:srgbClr val="94A3B8"/>
                 </a:solidFill>
                 <a:latin typeface="Calibri"/>
               </a:rPr>
-              <a:t>24</a:t>
+              <a:t>27</a:t>
             </a:r>
           </a:p>
         </p:txBody>
@@ -20850,13 +23374,13 @@
           <a:p>
             <a:pPr algn="r"/>
             <a:r>
-              <a:rPr sz="900" b="0" i="0">
+              <a:rPr sz="900">
                 <a:solidFill>
                   <a:srgbClr val="94A3B8"/>
                 </a:solidFill>
                 <a:latin typeface="Calibri"/>
               </a:rPr>
-              <a:t>25</a:t>
+              <a:t>28</a:t>
             </a:r>
           </a:p>
         </p:txBody>
@@ -21768,13 +24292,13 @@
           <a:p>
             <a:pPr algn="r"/>
             <a:r>
-              <a:rPr sz="900" b="0" i="0">
+              <a:rPr sz="900">
                 <a:solidFill>
                   <a:srgbClr val="94A3B8"/>
                 </a:solidFill>
                 <a:latin typeface="Calibri"/>
               </a:rPr>
-              <a:t>26</a:t>
+              <a:t>30</a:t>
             </a:r>
           </a:p>
         </p:txBody>
@@ -22113,13 +24637,2389 @@
           <a:p>
             <a:pPr algn="r"/>
             <a:r>
+              <a:rPr sz="900">
+                <a:solidFill>
+                  <a:srgbClr val="94A3B8"/>
+                </a:solidFill>
+                <a:latin typeface="Calibri"/>
+              </a:rPr>
+              <a:t>31</a:t>
+            </a:r>
+          </a:p>
+        </p:txBody>
+      </p:sp>
+    </p:spTree>
+  </p:cSld>
+  <p:clrMapOvr>
+    <a:masterClrMapping/>
+  </p:clrMapOvr>
+</p:sld>
+</file>
+
+<file path=ppt/slides/slide28.xml><?xml version="1.0" encoding="utf-8"?>
+<p:sld xmlns:a="http://schemas.openxmlformats.org/drawingml/2006/main" xmlns:p="http://schemas.openxmlformats.org/presentationml/2006/main" xmlns:r="http://schemas.openxmlformats.org/officeDocument/2006/relationships">
+  <p:cSld>
+    <p:bg>
+      <p:bgPr>
+        <a:solidFill>
+          <a:srgbClr val="0F172A"/>
+        </a:solidFill>
+        <a:effectLst/>
+      </p:bgPr>
+    </p:bg>
+    <p:spTree>
+      <p:nvGrpSpPr>
+        <p:cNvPr id="1" name=""/>
+        <p:cNvGrpSpPr/>
+        <p:nvPr/>
+      </p:nvGrpSpPr>
+      <p:grpSpPr/>
+      <p:sp>
+        <p:nvSpPr>
+          <p:cNvPr id="2" name="TextBox 1"/>
+          <p:cNvSpPr txBox="1"/>
+          <p:nvPr/>
+        </p:nvSpPr>
+        <p:spPr>
+          <a:xfrm>
+            <a:off x="640080" y="438912"/>
+            <a:ext cx="10972800" cy="310896"/>
+          </a:xfrm>
+          <a:prstGeom prst="rect">
+            <a:avLst/>
+          </a:prstGeom>
+          <a:noFill/>
+        </p:spPr>
+        <p:txBody>
+          <a:bodyPr wrap="square" anchor="t" lIns="0" rIns="0" tIns="0" bIns="0">
+            <a:spAutoFit/>
+          </a:bodyPr>
+          <a:lstStyle/>
+          <a:p>
+            <a:pPr algn="l"/>
+            <a:r>
+              <a:rPr sz="1200" b="1" i="0" spc="150">
+                <a:solidFill>
+                  <a:srgbClr val="38BDF8"/>
+                </a:solidFill>
+                <a:latin typeface="Calibri"/>
+              </a:rPr>
+              <a:t>OVERVIEW</a:t>
+            </a:r>
+          </a:p>
+        </p:txBody>
+      </p:sp>
+      <p:sp>
+        <p:nvSpPr>
+          <p:cNvPr id="3" name="TextBox 2"/>
+          <p:cNvSpPr txBox="1"/>
+          <p:nvPr/>
+        </p:nvSpPr>
+        <p:spPr>
+          <a:xfrm>
+            <a:off x="640080" y="749808"/>
+            <a:ext cx="10972800" cy="731520"/>
+          </a:xfrm>
+          <a:prstGeom prst="rect">
+            <a:avLst/>
+          </a:prstGeom>
+          <a:noFill/>
+        </p:spPr>
+        <p:txBody>
+          <a:bodyPr wrap="square" anchor="t" lIns="0" rIns="0" tIns="0" bIns="0">
+            <a:spAutoFit/>
+          </a:bodyPr>
+          <a:lstStyle/>
+          <a:p>
+            <a:pPr algn="l"/>
+            <a:r>
+              <a:rPr sz="2900" b="1" i="0">
+                <a:solidFill>
+                  <a:srgbClr val="FFFFFF"/>
+                </a:solidFill>
+                <a:latin typeface="Calibri"/>
+              </a:rPr>
+              <a:t>Project at a Glance</a:t>
+            </a:r>
+          </a:p>
+        </p:txBody>
+      </p:sp>
+      <p:sp>
+        <p:nvSpPr>
+          <p:cNvPr id="4" name="Rectangle 3"/>
+          <p:cNvSpPr/>
+          <p:nvPr/>
+        </p:nvSpPr>
+        <p:spPr>
+          <a:xfrm>
+            <a:off x="658368" y="1481328"/>
+            <a:ext cx="1051560" cy="54864"/>
+          </a:xfrm>
+          <a:prstGeom prst="rect">
+            <a:avLst/>
+          </a:prstGeom>
+          <a:solidFill>
+            <a:srgbClr val="38BDF8"/>
+          </a:solidFill>
+          <a:ln>
+            <a:noFill/>
+          </a:ln>
+          <a:effectLst/>
+        </p:spPr>
+        <p:style>
+          <a:lnRef idx="1">
+            <a:schemeClr val="accent1"/>
+          </a:lnRef>
+          <a:fillRef idx="3">
+            <a:schemeClr val="accent1"/>
+          </a:fillRef>
+          <a:effectRef idx="2">
+            <a:schemeClr val="accent1"/>
+          </a:effectRef>
+          <a:fontRef idx="minor">
+            <a:schemeClr val="lt1"/>
+          </a:fontRef>
+        </p:style>
+        <p:txBody>
+          <a:bodyPr rtlCol="0" anchor="ctr"/>
+          <a:lstStyle/>
+          <a:p>
+            <a:pPr algn="ctr"/>
+          </a:p>
+        </p:txBody>
+      </p:sp>
+      <p:sp>
+        <p:nvSpPr>
+          <p:cNvPr id="5" name="TextBox 4"/>
+          <p:cNvSpPr txBox="1"/>
+          <p:nvPr/>
+        </p:nvSpPr>
+        <p:spPr>
+          <a:xfrm>
+            <a:off x="640080" y="1783080"/>
+            <a:ext cx="10881360" cy="548640"/>
+          </a:xfrm>
+          <a:prstGeom prst="rect">
+            <a:avLst/>
+          </a:prstGeom>
+          <a:noFill/>
+        </p:spPr>
+        <p:txBody>
+          <a:bodyPr wrap="square" anchor="t" lIns="0" rIns="0" tIns="0" bIns="0">
+            <a:spAutoFit/>
+          </a:bodyPr>
+          <a:lstStyle/>
+          <a:p>
+            <a:pPr algn="l"/>
+            <a:r>
+              <a:rPr sz="1500" b="0" i="0">
+                <a:solidFill>
+                  <a:srgbClr val="E2E8F0"/>
+                </a:solidFill>
+                <a:latin typeface="Calibri"/>
+              </a:rPr>
+              <a:t>In one sentence: we built a working web platform that watches a construction project's cost and schedule in near real time, predicts which activities will run late, and shows it all on a dashboard.</a:t>
+            </a:r>
+          </a:p>
+        </p:txBody>
+      </p:sp>
+      <p:sp>
+        <p:nvSpPr>
+          <p:cNvPr id="6" name="Rounded Rectangle 5"/>
+          <p:cNvSpPr/>
+          <p:nvPr/>
+        </p:nvSpPr>
+        <p:spPr>
+          <a:xfrm>
+            <a:off x="640080" y="2514600"/>
+            <a:ext cx="10927080" cy="1051560"/>
+          </a:xfrm>
+          <a:prstGeom prst="roundRect">
+            <a:avLst>
+              <a:gd name="adj" fmla="val 6000"/>
+            </a:avLst>
+          </a:prstGeom>
+          <a:solidFill>
+            <a:srgbClr val="1E293B"/>
+          </a:solidFill>
+          <a:ln w="12700">
+            <a:solidFill>
+              <a:srgbClr val="334155"/>
+            </a:solidFill>
+          </a:ln>
+          <a:effectLst/>
+        </p:spPr>
+        <p:style>
+          <a:lnRef idx="1">
+            <a:schemeClr val="accent1"/>
+          </a:lnRef>
+          <a:fillRef idx="3">
+            <a:schemeClr val="accent1"/>
+          </a:fillRef>
+          <a:effectRef idx="2">
+            <a:schemeClr val="accent1"/>
+          </a:effectRef>
+          <a:fontRef idx="minor">
+            <a:schemeClr val="lt1"/>
+          </a:fontRef>
+        </p:style>
+        <p:txBody>
+          <a:bodyPr rtlCol="0" anchor="ctr"/>
+          <a:lstStyle/>
+          <a:p>
+            <a:pPr algn="ctr"/>
+          </a:p>
+        </p:txBody>
+      </p:sp>
+      <p:sp>
+        <p:nvSpPr>
+          <p:cNvPr id="7" name="Rectangle 6"/>
+          <p:cNvSpPr/>
+          <p:nvPr/>
+        </p:nvSpPr>
+        <p:spPr>
+          <a:xfrm>
+            <a:off x="640080" y="2514600"/>
+            <a:ext cx="73152" cy="1051560"/>
+          </a:xfrm>
+          <a:prstGeom prst="rect">
+            <a:avLst/>
+          </a:prstGeom>
+          <a:solidFill>
+            <a:srgbClr val="EF4444"/>
+          </a:solidFill>
+          <a:ln>
+            <a:noFill/>
+          </a:ln>
+          <a:effectLst/>
+        </p:spPr>
+        <p:style>
+          <a:lnRef idx="1">
+            <a:schemeClr val="accent1"/>
+          </a:lnRef>
+          <a:fillRef idx="3">
+            <a:schemeClr val="accent1"/>
+          </a:fillRef>
+          <a:effectRef idx="2">
+            <a:schemeClr val="accent1"/>
+          </a:effectRef>
+          <a:fontRef idx="minor">
+            <a:schemeClr val="lt1"/>
+          </a:fontRef>
+        </p:style>
+        <p:txBody>
+          <a:bodyPr rtlCol="0" anchor="ctr"/>
+          <a:lstStyle/>
+          <a:p>
+            <a:pPr algn="ctr"/>
+          </a:p>
+        </p:txBody>
+      </p:sp>
+      <p:sp>
+        <p:nvSpPr>
+          <p:cNvPr id="8" name="TextBox 7"/>
+          <p:cNvSpPr txBox="1"/>
+          <p:nvPr/>
+        </p:nvSpPr>
+        <p:spPr>
+          <a:xfrm>
+            <a:off x="914400" y="2642616"/>
+            <a:ext cx="2286000" cy="320040"/>
+          </a:xfrm>
+          <a:prstGeom prst="rect">
+            <a:avLst/>
+          </a:prstGeom>
+          <a:noFill/>
+        </p:spPr>
+        <p:txBody>
+          <a:bodyPr wrap="square" anchor="t" lIns="0" rIns="0" tIns="0" bIns="0">
+            <a:spAutoFit/>
+          </a:bodyPr>
+          <a:lstStyle/>
+          <a:p>
+            <a:pPr algn="l"/>
+            <a:r>
+              <a:rPr sz="1200" b="1" i="0" spc="100">
+                <a:solidFill>
+                  <a:srgbClr val="EF4444"/>
+                </a:solidFill>
+                <a:latin typeface="Calibri"/>
+              </a:rPr>
+              <a:t>THE PROBLEM</a:t>
+            </a:r>
+          </a:p>
+        </p:txBody>
+      </p:sp>
+      <p:sp>
+        <p:nvSpPr>
+          <p:cNvPr id="9" name="TextBox 8"/>
+          <p:cNvSpPr txBox="1"/>
+          <p:nvPr/>
+        </p:nvSpPr>
+        <p:spPr>
+          <a:xfrm>
+            <a:off x="3200400" y="2642616"/>
+            <a:ext cx="8138160" cy="822960"/>
+          </a:xfrm>
+          <a:prstGeom prst="rect">
+            <a:avLst/>
+          </a:prstGeom>
+          <a:noFill/>
+        </p:spPr>
+        <p:txBody>
+          <a:bodyPr wrap="square" anchor="ctr" lIns="0" rIns="0" tIns="0" bIns="0">
+            <a:spAutoFit/>
+          </a:bodyPr>
+          <a:lstStyle/>
+          <a:p>
+            <a:pPr algn="l"/>
+            <a:r>
+              <a:rPr sz="1250" b="0" i="0">
+                <a:solidFill>
+                  <a:srgbClr val="E2E8F0"/>
+                </a:solidFill>
+                <a:latin typeface="Calibri"/>
+              </a:rPr>
+              <a:t>Project teams learn about cost overruns and delays too late — data lives in spreadsheets, and analytics is disconnected from the tools people actually use.</a:t>
+            </a:r>
+          </a:p>
+        </p:txBody>
+      </p:sp>
+      <p:sp>
+        <p:nvSpPr>
+          <p:cNvPr id="10" name="Rounded Rectangle 9"/>
+          <p:cNvSpPr/>
+          <p:nvPr/>
+        </p:nvSpPr>
+        <p:spPr>
+          <a:xfrm>
+            <a:off x="640080" y="3703320"/>
+            <a:ext cx="10927080" cy="1051560"/>
+          </a:xfrm>
+          <a:prstGeom prst="roundRect">
+            <a:avLst>
+              <a:gd name="adj" fmla="val 6000"/>
+            </a:avLst>
+          </a:prstGeom>
+          <a:solidFill>
+            <a:srgbClr val="1E293B"/>
+          </a:solidFill>
+          <a:ln w="12700">
+            <a:solidFill>
+              <a:srgbClr val="334155"/>
+            </a:solidFill>
+          </a:ln>
+          <a:effectLst/>
+        </p:spPr>
+        <p:style>
+          <a:lnRef idx="1">
+            <a:schemeClr val="accent1"/>
+          </a:lnRef>
+          <a:fillRef idx="3">
+            <a:schemeClr val="accent1"/>
+          </a:fillRef>
+          <a:effectRef idx="2">
+            <a:schemeClr val="accent1"/>
+          </a:effectRef>
+          <a:fontRef idx="minor">
+            <a:schemeClr val="lt1"/>
+          </a:fontRef>
+        </p:style>
+        <p:txBody>
+          <a:bodyPr rtlCol="0" anchor="ctr"/>
+          <a:lstStyle/>
+          <a:p>
+            <a:pPr algn="ctr"/>
+          </a:p>
+        </p:txBody>
+      </p:sp>
+      <p:sp>
+        <p:nvSpPr>
+          <p:cNvPr id="11" name="Rectangle 10"/>
+          <p:cNvSpPr/>
+          <p:nvPr/>
+        </p:nvSpPr>
+        <p:spPr>
+          <a:xfrm>
+            <a:off x="640080" y="3703320"/>
+            <a:ext cx="73152" cy="1051560"/>
+          </a:xfrm>
+          <a:prstGeom prst="rect">
+            <a:avLst/>
+          </a:prstGeom>
+          <a:solidFill>
+            <a:srgbClr val="38BDF8"/>
+          </a:solidFill>
+          <a:ln>
+            <a:noFill/>
+          </a:ln>
+          <a:effectLst/>
+        </p:spPr>
+        <p:style>
+          <a:lnRef idx="1">
+            <a:schemeClr val="accent1"/>
+          </a:lnRef>
+          <a:fillRef idx="3">
+            <a:schemeClr val="accent1"/>
+          </a:fillRef>
+          <a:effectRef idx="2">
+            <a:schemeClr val="accent1"/>
+          </a:effectRef>
+          <a:fontRef idx="minor">
+            <a:schemeClr val="lt1"/>
+          </a:fontRef>
+        </p:style>
+        <p:txBody>
+          <a:bodyPr rtlCol="0" anchor="ctr"/>
+          <a:lstStyle/>
+          <a:p>
+            <a:pPr algn="ctr"/>
+          </a:p>
+        </p:txBody>
+      </p:sp>
+      <p:sp>
+        <p:nvSpPr>
+          <p:cNvPr id="12" name="TextBox 11"/>
+          <p:cNvSpPr txBox="1"/>
+          <p:nvPr/>
+        </p:nvSpPr>
+        <p:spPr>
+          <a:xfrm>
+            <a:off x="914400" y="3831335"/>
+            <a:ext cx="2286000" cy="320040"/>
+          </a:xfrm>
+          <a:prstGeom prst="rect">
+            <a:avLst/>
+          </a:prstGeom>
+          <a:noFill/>
+        </p:spPr>
+        <p:txBody>
+          <a:bodyPr wrap="square" anchor="t" lIns="0" rIns="0" tIns="0" bIns="0">
+            <a:spAutoFit/>
+          </a:bodyPr>
+          <a:lstStyle/>
+          <a:p>
+            <a:pPr algn="l"/>
+            <a:r>
+              <a:rPr sz="1200" b="1" i="0" spc="100">
+                <a:solidFill>
+                  <a:srgbClr val="38BDF8"/>
+                </a:solidFill>
+                <a:latin typeface="Calibri"/>
+              </a:rPr>
+              <a:t>WHAT WE BUILT</a:t>
+            </a:r>
+          </a:p>
+        </p:txBody>
+      </p:sp>
+      <p:sp>
+        <p:nvSpPr>
+          <p:cNvPr id="13" name="TextBox 12"/>
+          <p:cNvSpPr txBox="1"/>
+          <p:nvPr/>
+        </p:nvSpPr>
+        <p:spPr>
+          <a:xfrm>
+            <a:off x="3200400" y="3831335"/>
+            <a:ext cx="8138160" cy="822960"/>
+          </a:xfrm>
+          <a:prstGeom prst="rect">
+            <a:avLst/>
+          </a:prstGeom>
+          <a:noFill/>
+        </p:spPr>
+        <p:txBody>
+          <a:bodyPr wrap="square" anchor="ctr" lIns="0" rIns="0" tIns="0" bIns="0">
+            <a:spAutoFit/>
+          </a:bodyPr>
+          <a:lstStyle/>
+          <a:p>
+            <a:pPr algn="l"/>
+            <a:r>
+              <a:rPr sz="1250" b="0" i="0">
+                <a:solidFill>
+                  <a:srgbClr val="E2E8F0"/>
+                </a:solidFill>
+                <a:latin typeface="Calibri"/>
+              </a:rPr>
+              <a:t>A containerized system: a validated API ingests project data, a database stores it, analytics compute standard project-control metrics, a model predicts delay risk, and a web dashboard (plus Power BI) presents it.</a:t>
+            </a:r>
+          </a:p>
+        </p:txBody>
+      </p:sp>
+      <p:sp>
+        <p:nvSpPr>
+          <p:cNvPr id="14" name="Rounded Rectangle 13"/>
+          <p:cNvSpPr/>
+          <p:nvPr/>
+        </p:nvSpPr>
+        <p:spPr>
+          <a:xfrm>
+            <a:off x="640080" y="4892040"/>
+            <a:ext cx="10927080" cy="1051560"/>
+          </a:xfrm>
+          <a:prstGeom prst="roundRect">
+            <a:avLst>
+              <a:gd name="adj" fmla="val 6000"/>
+            </a:avLst>
+          </a:prstGeom>
+          <a:solidFill>
+            <a:srgbClr val="1E293B"/>
+          </a:solidFill>
+          <a:ln w="12700">
+            <a:solidFill>
+              <a:srgbClr val="334155"/>
+            </a:solidFill>
+          </a:ln>
+          <a:effectLst/>
+        </p:spPr>
+        <p:style>
+          <a:lnRef idx="1">
+            <a:schemeClr val="accent1"/>
+          </a:lnRef>
+          <a:fillRef idx="3">
+            <a:schemeClr val="accent1"/>
+          </a:fillRef>
+          <a:effectRef idx="2">
+            <a:schemeClr val="accent1"/>
+          </a:effectRef>
+          <a:fontRef idx="minor">
+            <a:schemeClr val="lt1"/>
+          </a:fontRef>
+        </p:style>
+        <p:txBody>
+          <a:bodyPr rtlCol="0" anchor="ctr"/>
+          <a:lstStyle/>
+          <a:p>
+            <a:pPr algn="ctr"/>
+          </a:p>
+        </p:txBody>
+      </p:sp>
+      <p:sp>
+        <p:nvSpPr>
+          <p:cNvPr id="15" name="Rectangle 14"/>
+          <p:cNvSpPr/>
+          <p:nvPr/>
+        </p:nvSpPr>
+        <p:spPr>
+          <a:xfrm>
+            <a:off x="640080" y="4892040"/>
+            <a:ext cx="73152" cy="1051560"/>
+          </a:xfrm>
+          <a:prstGeom prst="rect">
+            <a:avLst/>
+          </a:prstGeom>
+          <a:solidFill>
+            <a:srgbClr val="22C55E"/>
+          </a:solidFill>
+          <a:ln>
+            <a:noFill/>
+          </a:ln>
+          <a:effectLst/>
+        </p:spPr>
+        <p:style>
+          <a:lnRef idx="1">
+            <a:schemeClr val="accent1"/>
+          </a:lnRef>
+          <a:fillRef idx="3">
+            <a:schemeClr val="accent1"/>
+          </a:fillRef>
+          <a:effectRef idx="2">
+            <a:schemeClr val="accent1"/>
+          </a:effectRef>
+          <a:fontRef idx="minor">
+            <a:schemeClr val="lt1"/>
+          </a:fontRef>
+        </p:style>
+        <p:txBody>
+          <a:bodyPr rtlCol="0" anchor="ctr"/>
+          <a:lstStyle/>
+          <a:p>
+            <a:pPr algn="ctr"/>
+          </a:p>
+        </p:txBody>
+      </p:sp>
+      <p:sp>
+        <p:nvSpPr>
+          <p:cNvPr id="16" name="TextBox 15"/>
+          <p:cNvSpPr txBox="1"/>
+          <p:nvPr/>
+        </p:nvSpPr>
+        <p:spPr>
+          <a:xfrm>
+            <a:off x="914400" y="5020055"/>
+            <a:ext cx="2286000" cy="320040"/>
+          </a:xfrm>
+          <a:prstGeom prst="rect">
+            <a:avLst/>
+          </a:prstGeom>
+          <a:noFill/>
+        </p:spPr>
+        <p:txBody>
+          <a:bodyPr wrap="square" anchor="t" lIns="0" rIns="0" tIns="0" bIns="0">
+            <a:spAutoFit/>
+          </a:bodyPr>
+          <a:lstStyle/>
+          <a:p>
+            <a:pPr algn="l"/>
+            <a:r>
+              <a:rPr sz="1200" b="1" i="0" spc="100">
+                <a:solidFill>
+                  <a:srgbClr val="22C55E"/>
+                </a:solidFill>
+                <a:latin typeface="Calibri"/>
+              </a:rPr>
+              <a:t>WHY IT MATTERS</a:t>
+            </a:r>
+          </a:p>
+        </p:txBody>
+      </p:sp>
+      <p:sp>
+        <p:nvSpPr>
+          <p:cNvPr id="17" name="TextBox 16"/>
+          <p:cNvSpPr txBox="1"/>
+          <p:nvPr/>
+        </p:nvSpPr>
+        <p:spPr>
+          <a:xfrm>
+            <a:off x="3200400" y="5020055"/>
+            <a:ext cx="8138160" cy="822960"/>
+          </a:xfrm>
+          <a:prstGeom prst="rect">
+            <a:avLst/>
+          </a:prstGeom>
+          <a:noFill/>
+        </p:spPr>
+        <p:txBody>
+          <a:bodyPr wrap="square" anchor="ctr" lIns="0" rIns="0" tIns="0" bIns="0">
+            <a:spAutoFit/>
+          </a:bodyPr>
+          <a:lstStyle/>
+          <a:p>
+            <a:pPr algn="l"/>
+            <a:r>
+              <a:rPr sz="1250" b="0" i="0">
+                <a:solidFill>
+                  <a:srgbClr val="E2E8F0"/>
+                </a:solidFill>
+                <a:latin typeface="Calibri"/>
+              </a:rPr>
+              <a:t>Managers get an early warning and a single, trustworthy view — instead of reconstructing reports by hand every cycle.</a:t>
+            </a:r>
+          </a:p>
+        </p:txBody>
+      </p:sp>
+      <p:sp>
+        <p:nvSpPr>
+          <p:cNvPr id="18" name="TextBox 17"/>
+          <p:cNvSpPr txBox="1"/>
+          <p:nvPr/>
+        </p:nvSpPr>
+        <p:spPr>
+          <a:xfrm>
+            <a:off x="640080" y="5989320"/>
+            <a:ext cx="10881360" cy="365760"/>
+          </a:xfrm>
+          <a:prstGeom prst="rect">
+            <a:avLst/>
+          </a:prstGeom>
+          <a:noFill/>
+        </p:spPr>
+        <p:txBody>
+          <a:bodyPr wrap="square" anchor="t" lIns="0" rIns="0" tIns="0" bIns="0">
+            <a:spAutoFit/>
+          </a:bodyPr>
+          <a:lstStyle/>
+          <a:p>
+            <a:pPr algn="l"/>
+            <a:r>
+              <a:rPr sz="1150" b="0" i="1">
+                <a:solidFill>
+                  <a:srgbClr val="38BDF8"/>
+                </a:solidFill>
+                <a:latin typeface="Calibri"/>
+              </a:rPr>
+              <a:t>Everything is reproducible: one command builds and runs the whole platform, on Linux, macOS, or Windows.</a:t>
+            </a:r>
+          </a:p>
+        </p:txBody>
+      </p:sp>
+      <p:sp>
+        <p:nvSpPr>
+          <p:cNvPr id="19" name="TextBox 18"/>
+          <p:cNvSpPr txBox="1"/>
+          <p:nvPr/>
+        </p:nvSpPr>
+        <p:spPr>
+          <a:xfrm>
+            <a:off x="640080" y="6419088"/>
+            <a:ext cx="6400800" cy="274320"/>
+          </a:xfrm>
+          <a:prstGeom prst="rect">
+            <a:avLst/>
+          </a:prstGeom>
+          <a:noFill/>
+        </p:spPr>
+        <p:txBody>
+          <a:bodyPr wrap="square" anchor="t" lIns="0" rIns="0" tIns="0" bIns="0">
+            <a:spAutoFit/>
+          </a:bodyPr>
+          <a:lstStyle/>
+          <a:p>
+            <a:pPr algn="l"/>
+            <a:r>
               <a:rPr sz="900" b="0" i="0">
                 <a:solidFill>
                   <a:srgbClr val="94A3B8"/>
                 </a:solidFill>
                 <a:latin typeface="Calibri"/>
               </a:rPr>
-              <a:t>27</a:t>
+              <a:t>CCPIP — Final-Year Project</a:t>
+            </a:r>
+          </a:p>
+        </p:txBody>
+      </p:sp>
+      <p:sp>
+        <p:nvSpPr>
+          <p:cNvPr id="20" name="TextBox 19"/>
+          <p:cNvSpPr txBox="1"/>
+          <p:nvPr/>
+        </p:nvSpPr>
+        <p:spPr>
+          <a:xfrm>
+            <a:off x="10881360" y="6419088"/>
+            <a:ext cx="731520" cy="274320"/>
+          </a:xfrm>
+          <a:prstGeom prst="rect">
+            <a:avLst/>
+          </a:prstGeom>
+          <a:noFill/>
+        </p:spPr>
+        <p:txBody>
+          <a:bodyPr wrap="square" anchor="t" lIns="0" rIns="0" tIns="0" bIns="0">
+            <a:spAutoFit/>
+          </a:bodyPr>
+          <a:lstStyle/>
+          <a:p>
+            <a:pPr algn="r"/>
+            <a:r>
+              <a:rPr sz="900">
+                <a:solidFill>
+                  <a:srgbClr val="94A3B8"/>
+                </a:solidFill>
+                <a:latin typeface="Calibri"/>
+              </a:rPr>
+              <a:t>04</a:t>
+            </a:r>
+          </a:p>
+        </p:txBody>
+      </p:sp>
+    </p:spTree>
+  </p:cSld>
+  <p:clrMapOvr>
+    <a:masterClrMapping/>
+  </p:clrMapOvr>
+</p:sld>
+</file>
+
+<file path=ppt/slides/slide29.xml><?xml version="1.0" encoding="utf-8"?>
+<p:sld xmlns:a="http://schemas.openxmlformats.org/drawingml/2006/main" xmlns:p="http://schemas.openxmlformats.org/presentationml/2006/main" xmlns:r="http://schemas.openxmlformats.org/officeDocument/2006/relationships">
+  <p:cSld>
+    <p:bg>
+      <p:bgPr>
+        <a:solidFill>
+          <a:srgbClr val="0F172A"/>
+        </a:solidFill>
+        <a:effectLst/>
+      </p:bgPr>
+    </p:bg>
+    <p:spTree>
+      <p:nvGrpSpPr>
+        <p:cNvPr id="1" name=""/>
+        <p:cNvGrpSpPr/>
+        <p:nvPr/>
+      </p:nvGrpSpPr>
+      <p:grpSpPr/>
+      <p:sp>
+        <p:nvSpPr>
+          <p:cNvPr id="2" name="TextBox 1"/>
+          <p:cNvSpPr txBox="1"/>
+          <p:nvPr/>
+        </p:nvSpPr>
+        <p:spPr>
+          <a:xfrm>
+            <a:off x="640080" y="438912"/>
+            <a:ext cx="10972800" cy="310896"/>
+          </a:xfrm>
+          <a:prstGeom prst="rect">
+            <a:avLst/>
+          </a:prstGeom>
+          <a:noFill/>
+        </p:spPr>
+        <p:txBody>
+          <a:bodyPr wrap="square" anchor="t" lIns="0" rIns="0" tIns="0" bIns="0">
+            <a:spAutoFit/>
+          </a:bodyPr>
+          <a:lstStyle/>
+          <a:p>
+            <a:pPr algn="l"/>
+            <a:r>
+              <a:rPr sz="1200" b="1" i="0" spc="150">
+                <a:solidFill>
+                  <a:srgbClr val="38BDF8"/>
+                </a:solidFill>
+                <a:latin typeface="Calibri"/>
+              </a:rPr>
+              <a:t>OVERVIEW</a:t>
+            </a:r>
+          </a:p>
+        </p:txBody>
+      </p:sp>
+      <p:sp>
+        <p:nvSpPr>
+          <p:cNvPr id="3" name="TextBox 2"/>
+          <p:cNvSpPr txBox="1"/>
+          <p:nvPr/>
+        </p:nvSpPr>
+        <p:spPr>
+          <a:xfrm>
+            <a:off x="640080" y="749808"/>
+            <a:ext cx="10972800" cy="731520"/>
+          </a:xfrm>
+          <a:prstGeom prst="rect">
+            <a:avLst/>
+          </a:prstGeom>
+          <a:noFill/>
+        </p:spPr>
+        <p:txBody>
+          <a:bodyPr wrap="square" anchor="t" lIns="0" rIns="0" tIns="0" bIns="0">
+            <a:spAutoFit/>
+          </a:bodyPr>
+          <a:lstStyle/>
+          <a:p>
+            <a:pPr algn="l"/>
+            <a:r>
+              <a:rPr sz="2900" b="1" i="0">
+                <a:solidFill>
+                  <a:srgbClr val="FFFFFF"/>
+                </a:solidFill>
+                <a:latin typeface="Calibri"/>
+              </a:rPr>
+              <a:t>Key Concepts (Plain Language)</a:t>
+            </a:r>
+          </a:p>
+        </p:txBody>
+      </p:sp>
+      <p:sp>
+        <p:nvSpPr>
+          <p:cNvPr id="4" name="Rectangle 3"/>
+          <p:cNvSpPr/>
+          <p:nvPr/>
+        </p:nvSpPr>
+        <p:spPr>
+          <a:xfrm>
+            <a:off x="658368" y="1481328"/>
+            <a:ext cx="1051560" cy="54864"/>
+          </a:xfrm>
+          <a:prstGeom prst="rect">
+            <a:avLst/>
+          </a:prstGeom>
+          <a:solidFill>
+            <a:srgbClr val="38BDF8"/>
+          </a:solidFill>
+          <a:ln>
+            <a:noFill/>
+          </a:ln>
+          <a:effectLst/>
+        </p:spPr>
+        <p:style>
+          <a:lnRef idx="1">
+            <a:schemeClr val="accent1"/>
+          </a:lnRef>
+          <a:fillRef idx="3">
+            <a:schemeClr val="accent1"/>
+          </a:fillRef>
+          <a:effectRef idx="2">
+            <a:schemeClr val="accent1"/>
+          </a:effectRef>
+          <a:fontRef idx="minor">
+            <a:schemeClr val="lt1"/>
+          </a:fontRef>
+        </p:style>
+        <p:txBody>
+          <a:bodyPr rtlCol="0" anchor="ctr"/>
+          <a:lstStyle/>
+          <a:p>
+            <a:pPr algn="ctr"/>
+          </a:p>
+        </p:txBody>
+      </p:sp>
+      <p:sp>
+        <p:nvSpPr>
+          <p:cNvPr id="5" name="Rounded Rectangle 4"/>
+          <p:cNvSpPr/>
+          <p:nvPr/>
+        </p:nvSpPr>
+        <p:spPr>
+          <a:xfrm>
+            <a:off x="640080" y="1783080"/>
+            <a:ext cx="5349240" cy="960120"/>
+          </a:xfrm>
+          <a:prstGeom prst="roundRect">
+            <a:avLst>
+              <a:gd name="adj" fmla="val 8000"/>
+            </a:avLst>
+          </a:prstGeom>
+          <a:solidFill>
+            <a:srgbClr val="1E293B"/>
+          </a:solidFill>
+          <a:ln w="12700">
+            <a:solidFill>
+              <a:srgbClr val="334155"/>
+            </a:solidFill>
+          </a:ln>
+          <a:effectLst/>
+        </p:spPr>
+        <p:style>
+          <a:lnRef idx="1">
+            <a:schemeClr val="accent1"/>
+          </a:lnRef>
+          <a:fillRef idx="3">
+            <a:schemeClr val="accent1"/>
+          </a:fillRef>
+          <a:effectRef idx="2">
+            <a:schemeClr val="accent1"/>
+          </a:effectRef>
+          <a:fontRef idx="minor">
+            <a:schemeClr val="lt1"/>
+          </a:fontRef>
+        </p:style>
+        <p:txBody>
+          <a:bodyPr rtlCol="0" anchor="ctr"/>
+          <a:lstStyle/>
+          <a:p>
+            <a:pPr algn="ctr"/>
+          </a:p>
+        </p:txBody>
+      </p:sp>
+      <p:sp>
+        <p:nvSpPr>
+          <p:cNvPr id="6" name="Rounded Rectangle 5"/>
+          <p:cNvSpPr/>
+          <p:nvPr/>
+        </p:nvSpPr>
+        <p:spPr>
+          <a:xfrm>
+            <a:off x="777240" y="1984248"/>
+            <a:ext cx="822960" cy="548640"/>
+          </a:xfrm>
+          <a:prstGeom prst="roundRect">
+            <a:avLst>
+              <a:gd name="adj" fmla="val 12000"/>
+            </a:avLst>
+          </a:prstGeom>
+          <a:solidFill>
+            <a:srgbClr val="162033"/>
+          </a:solidFill>
+          <a:ln w="12700">
+            <a:solidFill>
+              <a:srgbClr val="38BDF8"/>
+            </a:solidFill>
+          </a:ln>
+          <a:effectLst/>
+        </p:spPr>
+        <p:style>
+          <a:lnRef idx="1">
+            <a:schemeClr val="accent1"/>
+          </a:lnRef>
+          <a:fillRef idx="3">
+            <a:schemeClr val="accent1"/>
+          </a:fillRef>
+          <a:effectRef idx="2">
+            <a:schemeClr val="accent1"/>
+          </a:effectRef>
+          <a:fontRef idx="minor">
+            <a:schemeClr val="lt1"/>
+          </a:fontRef>
+        </p:style>
+        <p:txBody>
+          <a:bodyPr rtlCol="0" anchor="ctr" wrap="square" lIns="73152" rIns="73152" tIns="27432" bIns="27432"/>
+          <a:lstStyle/>
+          <a:p>
+            <a:pPr algn="ctr"/>
+            <a:r>
+              <a:rPr sz="1400" b="1">
+                <a:solidFill>
+                  <a:srgbClr val="38BDF8"/>
+                </a:solidFill>
+                <a:latin typeface="Calibri"/>
+              </a:rPr>
+              <a:t>EVM</a:t>
+            </a:r>
+          </a:p>
+        </p:txBody>
+      </p:sp>
+      <p:sp>
+        <p:nvSpPr>
+          <p:cNvPr id="7" name="TextBox 6"/>
+          <p:cNvSpPr txBox="1"/>
+          <p:nvPr/>
+        </p:nvSpPr>
+        <p:spPr>
+          <a:xfrm>
+            <a:off x="1737360" y="1901952"/>
+            <a:ext cx="4114800" cy="274320"/>
+          </a:xfrm>
+          <a:prstGeom prst="rect">
+            <a:avLst/>
+          </a:prstGeom>
+          <a:noFill/>
+        </p:spPr>
+        <p:txBody>
+          <a:bodyPr wrap="square" anchor="t" lIns="0" rIns="0" tIns="0" bIns="0">
+            <a:spAutoFit/>
+          </a:bodyPr>
+          <a:lstStyle/>
+          <a:p>
+            <a:pPr algn="l"/>
+            <a:r>
+              <a:rPr sz="1200" b="1" i="0">
+                <a:solidFill>
+                  <a:srgbClr val="FFFFFF"/>
+                </a:solidFill>
+                <a:latin typeface="Calibri"/>
+              </a:rPr>
+              <a:t>Earned Value Management</a:t>
+            </a:r>
+          </a:p>
+        </p:txBody>
+      </p:sp>
+      <p:sp>
+        <p:nvSpPr>
+          <p:cNvPr id="8" name="TextBox 7"/>
+          <p:cNvSpPr txBox="1"/>
+          <p:nvPr/>
+        </p:nvSpPr>
+        <p:spPr>
+          <a:xfrm>
+            <a:off x="1737360" y="2194560"/>
+            <a:ext cx="4114800" cy="502920"/>
+          </a:xfrm>
+          <a:prstGeom prst="rect">
+            <a:avLst/>
+          </a:prstGeom>
+          <a:noFill/>
+        </p:spPr>
+        <p:txBody>
+          <a:bodyPr wrap="square" anchor="t" lIns="0" rIns="0" tIns="0" bIns="0">
+            <a:spAutoFit/>
+          </a:bodyPr>
+          <a:lstStyle/>
+          <a:p>
+            <a:pPr algn="l"/>
+            <a:r>
+              <a:rPr sz="950" b="0" i="0">
+                <a:solidFill>
+                  <a:srgbClr val="94A3B8"/>
+                </a:solidFill>
+                <a:latin typeface="Calibri"/>
+              </a:rPr>
+              <a:t>A standard way to measure project health by comparing planned work, work actually done, and money spent.</a:t>
+            </a:r>
+          </a:p>
+        </p:txBody>
+      </p:sp>
+      <p:sp>
+        <p:nvSpPr>
+          <p:cNvPr id="9" name="Rounded Rectangle 8"/>
+          <p:cNvSpPr/>
+          <p:nvPr/>
+        </p:nvSpPr>
+        <p:spPr>
+          <a:xfrm>
+            <a:off x="6263640" y="1783080"/>
+            <a:ext cx="5349240" cy="960120"/>
+          </a:xfrm>
+          <a:prstGeom prst="roundRect">
+            <a:avLst>
+              <a:gd name="adj" fmla="val 8000"/>
+            </a:avLst>
+          </a:prstGeom>
+          <a:solidFill>
+            <a:srgbClr val="1E293B"/>
+          </a:solidFill>
+          <a:ln w="12700">
+            <a:solidFill>
+              <a:srgbClr val="334155"/>
+            </a:solidFill>
+          </a:ln>
+          <a:effectLst/>
+        </p:spPr>
+        <p:style>
+          <a:lnRef idx="1">
+            <a:schemeClr val="accent1"/>
+          </a:lnRef>
+          <a:fillRef idx="3">
+            <a:schemeClr val="accent1"/>
+          </a:fillRef>
+          <a:effectRef idx="2">
+            <a:schemeClr val="accent1"/>
+          </a:effectRef>
+          <a:fontRef idx="minor">
+            <a:schemeClr val="lt1"/>
+          </a:fontRef>
+        </p:style>
+        <p:txBody>
+          <a:bodyPr rtlCol="0" anchor="ctr"/>
+          <a:lstStyle/>
+          <a:p>
+            <a:pPr algn="ctr"/>
+          </a:p>
+        </p:txBody>
+      </p:sp>
+      <p:sp>
+        <p:nvSpPr>
+          <p:cNvPr id="10" name="Rounded Rectangle 9"/>
+          <p:cNvSpPr/>
+          <p:nvPr/>
+        </p:nvSpPr>
+        <p:spPr>
+          <a:xfrm>
+            <a:off x="6400800" y="1984248"/>
+            <a:ext cx="822960" cy="548640"/>
+          </a:xfrm>
+          <a:prstGeom prst="roundRect">
+            <a:avLst>
+              <a:gd name="adj" fmla="val 12000"/>
+            </a:avLst>
+          </a:prstGeom>
+          <a:solidFill>
+            <a:srgbClr val="162033"/>
+          </a:solidFill>
+          <a:ln w="12700">
+            <a:solidFill>
+              <a:srgbClr val="38BDF8"/>
+            </a:solidFill>
+          </a:ln>
+          <a:effectLst/>
+        </p:spPr>
+        <p:style>
+          <a:lnRef idx="1">
+            <a:schemeClr val="accent1"/>
+          </a:lnRef>
+          <a:fillRef idx="3">
+            <a:schemeClr val="accent1"/>
+          </a:fillRef>
+          <a:effectRef idx="2">
+            <a:schemeClr val="accent1"/>
+          </a:effectRef>
+          <a:fontRef idx="minor">
+            <a:schemeClr val="lt1"/>
+          </a:fontRef>
+        </p:style>
+        <p:txBody>
+          <a:bodyPr rtlCol="0" anchor="ctr" wrap="square" lIns="73152" rIns="73152" tIns="27432" bIns="27432"/>
+          <a:lstStyle/>
+          <a:p>
+            <a:pPr algn="ctr"/>
+            <a:r>
+              <a:rPr sz="1400" b="1">
+                <a:solidFill>
+                  <a:srgbClr val="38BDF8"/>
+                </a:solidFill>
+                <a:latin typeface="Calibri"/>
+              </a:rPr>
+              <a:t>PV</a:t>
+            </a:r>
+          </a:p>
+        </p:txBody>
+      </p:sp>
+      <p:sp>
+        <p:nvSpPr>
+          <p:cNvPr id="11" name="TextBox 10"/>
+          <p:cNvSpPr txBox="1"/>
+          <p:nvPr/>
+        </p:nvSpPr>
+        <p:spPr>
+          <a:xfrm>
+            <a:off x="7360920" y="1901952"/>
+            <a:ext cx="4114800" cy="274320"/>
+          </a:xfrm>
+          <a:prstGeom prst="rect">
+            <a:avLst/>
+          </a:prstGeom>
+          <a:noFill/>
+        </p:spPr>
+        <p:txBody>
+          <a:bodyPr wrap="square" anchor="t" lIns="0" rIns="0" tIns="0" bIns="0">
+            <a:spAutoFit/>
+          </a:bodyPr>
+          <a:lstStyle/>
+          <a:p>
+            <a:pPr algn="l"/>
+            <a:r>
+              <a:rPr sz="1200" b="1" i="0">
+                <a:solidFill>
+                  <a:srgbClr val="FFFFFF"/>
+                </a:solidFill>
+                <a:latin typeface="Calibri"/>
+              </a:rPr>
+              <a:t>Planned Value</a:t>
+            </a:r>
+          </a:p>
+        </p:txBody>
+      </p:sp>
+      <p:sp>
+        <p:nvSpPr>
+          <p:cNvPr id="12" name="TextBox 11"/>
+          <p:cNvSpPr txBox="1"/>
+          <p:nvPr/>
+        </p:nvSpPr>
+        <p:spPr>
+          <a:xfrm>
+            <a:off x="7360920" y="2194560"/>
+            <a:ext cx="4114800" cy="502920"/>
+          </a:xfrm>
+          <a:prstGeom prst="rect">
+            <a:avLst/>
+          </a:prstGeom>
+          <a:noFill/>
+        </p:spPr>
+        <p:txBody>
+          <a:bodyPr wrap="square" anchor="t" lIns="0" rIns="0" tIns="0" bIns="0">
+            <a:spAutoFit/>
+          </a:bodyPr>
+          <a:lstStyle/>
+          <a:p>
+            <a:pPr algn="l"/>
+            <a:r>
+              <a:rPr sz="950" b="0" i="0">
+                <a:solidFill>
+                  <a:srgbClr val="94A3B8"/>
+                </a:solidFill>
+                <a:latin typeface="Calibri"/>
+              </a:rPr>
+              <a:t>The budgeted cost of the work that should be done by a given date.</a:t>
+            </a:r>
+          </a:p>
+        </p:txBody>
+      </p:sp>
+      <p:sp>
+        <p:nvSpPr>
+          <p:cNvPr id="13" name="Rounded Rectangle 12"/>
+          <p:cNvSpPr/>
+          <p:nvPr/>
+        </p:nvSpPr>
+        <p:spPr>
+          <a:xfrm>
+            <a:off x="640080" y="2880360"/>
+            <a:ext cx="5349240" cy="960120"/>
+          </a:xfrm>
+          <a:prstGeom prst="roundRect">
+            <a:avLst>
+              <a:gd name="adj" fmla="val 8000"/>
+            </a:avLst>
+          </a:prstGeom>
+          <a:solidFill>
+            <a:srgbClr val="1E293B"/>
+          </a:solidFill>
+          <a:ln w="12700">
+            <a:solidFill>
+              <a:srgbClr val="334155"/>
+            </a:solidFill>
+          </a:ln>
+          <a:effectLst/>
+        </p:spPr>
+        <p:style>
+          <a:lnRef idx="1">
+            <a:schemeClr val="accent1"/>
+          </a:lnRef>
+          <a:fillRef idx="3">
+            <a:schemeClr val="accent1"/>
+          </a:fillRef>
+          <a:effectRef idx="2">
+            <a:schemeClr val="accent1"/>
+          </a:effectRef>
+          <a:fontRef idx="minor">
+            <a:schemeClr val="lt1"/>
+          </a:fontRef>
+        </p:style>
+        <p:txBody>
+          <a:bodyPr rtlCol="0" anchor="ctr"/>
+          <a:lstStyle/>
+          <a:p>
+            <a:pPr algn="ctr"/>
+          </a:p>
+        </p:txBody>
+      </p:sp>
+      <p:sp>
+        <p:nvSpPr>
+          <p:cNvPr id="14" name="Rounded Rectangle 13"/>
+          <p:cNvSpPr/>
+          <p:nvPr/>
+        </p:nvSpPr>
+        <p:spPr>
+          <a:xfrm>
+            <a:off x="777240" y="3081528"/>
+            <a:ext cx="822960" cy="548640"/>
+          </a:xfrm>
+          <a:prstGeom prst="roundRect">
+            <a:avLst>
+              <a:gd name="adj" fmla="val 12000"/>
+            </a:avLst>
+          </a:prstGeom>
+          <a:solidFill>
+            <a:srgbClr val="162033"/>
+          </a:solidFill>
+          <a:ln w="12700">
+            <a:solidFill>
+              <a:srgbClr val="38BDF8"/>
+            </a:solidFill>
+          </a:ln>
+          <a:effectLst/>
+        </p:spPr>
+        <p:style>
+          <a:lnRef idx="1">
+            <a:schemeClr val="accent1"/>
+          </a:lnRef>
+          <a:fillRef idx="3">
+            <a:schemeClr val="accent1"/>
+          </a:fillRef>
+          <a:effectRef idx="2">
+            <a:schemeClr val="accent1"/>
+          </a:effectRef>
+          <a:fontRef idx="minor">
+            <a:schemeClr val="lt1"/>
+          </a:fontRef>
+        </p:style>
+        <p:txBody>
+          <a:bodyPr rtlCol="0" anchor="ctr" wrap="square" lIns="73152" rIns="73152" tIns="27432" bIns="27432"/>
+          <a:lstStyle/>
+          <a:p>
+            <a:pPr algn="ctr"/>
+            <a:r>
+              <a:rPr sz="1400" b="1">
+                <a:solidFill>
+                  <a:srgbClr val="38BDF8"/>
+                </a:solidFill>
+                <a:latin typeface="Calibri"/>
+              </a:rPr>
+              <a:t>EV</a:t>
+            </a:r>
+          </a:p>
+        </p:txBody>
+      </p:sp>
+      <p:sp>
+        <p:nvSpPr>
+          <p:cNvPr id="15" name="TextBox 14"/>
+          <p:cNvSpPr txBox="1"/>
+          <p:nvPr/>
+        </p:nvSpPr>
+        <p:spPr>
+          <a:xfrm>
+            <a:off x="1737360" y="2999232"/>
+            <a:ext cx="4114800" cy="274320"/>
+          </a:xfrm>
+          <a:prstGeom prst="rect">
+            <a:avLst/>
+          </a:prstGeom>
+          <a:noFill/>
+        </p:spPr>
+        <p:txBody>
+          <a:bodyPr wrap="square" anchor="t" lIns="0" rIns="0" tIns="0" bIns="0">
+            <a:spAutoFit/>
+          </a:bodyPr>
+          <a:lstStyle/>
+          <a:p>
+            <a:pPr algn="l"/>
+            <a:r>
+              <a:rPr sz="1200" b="1" i="0">
+                <a:solidFill>
+                  <a:srgbClr val="FFFFFF"/>
+                </a:solidFill>
+                <a:latin typeface="Calibri"/>
+              </a:rPr>
+              <a:t>Earned Value</a:t>
+            </a:r>
+          </a:p>
+        </p:txBody>
+      </p:sp>
+      <p:sp>
+        <p:nvSpPr>
+          <p:cNvPr id="16" name="TextBox 15"/>
+          <p:cNvSpPr txBox="1"/>
+          <p:nvPr/>
+        </p:nvSpPr>
+        <p:spPr>
+          <a:xfrm>
+            <a:off x="1737360" y="3291840"/>
+            <a:ext cx="4114800" cy="502920"/>
+          </a:xfrm>
+          <a:prstGeom prst="rect">
+            <a:avLst/>
+          </a:prstGeom>
+          <a:noFill/>
+        </p:spPr>
+        <p:txBody>
+          <a:bodyPr wrap="square" anchor="t" lIns="0" rIns="0" tIns="0" bIns="0">
+            <a:spAutoFit/>
+          </a:bodyPr>
+          <a:lstStyle/>
+          <a:p>
+            <a:pPr algn="l"/>
+            <a:r>
+              <a:rPr sz="950" b="0" i="0">
+                <a:solidFill>
+                  <a:srgbClr val="94A3B8"/>
+                </a:solidFill>
+                <a:latin typeface="Calibri"/>
+              </a:rPr>
+              <a:t>The budgeted cost of the work actually completed by that date.</a:t>
+            </a:r>
+          </a:p>
+        </p:txBody>
+      </p:sp>
+      <p:sp>
+        <p:nvSpPr>
+          <p:cNvPr id="17" name="Rounded Rectangle 16"/>
+          <p:cNvSpPr/>
+          <p:nvPr/>
+        </p:nvSpPr>
+        <p:spPr>
+          <a:xfrm>
+            <a:off x="6263640" y="2880360"/>
+            <a:ext cx="5349240" cy="960120"/>
+          </a:xfrm>
+          <a:prstGeom prst="roundRect">
+            <a:avLst>
+              <a:gd name="adj" fmla="val 8000"/>
+            </a:avLst>
+          </a:prstGeom>
+          <a:solidFill>
+            <a:srgbClr val="1E293B"/>
+          </a:solidFill>
+          <a:ln w="12700">
+            <a:solidFill>
+              <a:srgbClr val="334155"/>
+            </a:solidFill>
+          </a:ln>
+          <a:effectLst/>
+        </p:spPr>
+        <p:style>
+          <a:lnRef idx="1">
+            <a:schemeClr val="accent1"/>
+          </a:lnRef>
+          <a:fillRef idx="3">
+            <a:schemeClr val="accent1"/>
+          </a:fillRef>
+          <a:effectRef idx="2">
+            <a:schemeClr val="accent1"/>
+          </a:effectRef>
+          <a:fontRef idx="minor">
+            <a:schemeClr val="lt1"/>
+          </a:fontRef>
+        </p:style>
+        <p:txBody>
+          <a:bodyPr rtlCol="0" anchor="ctr"/>
+          <a:lstStyle/>
+          <a:p>
+            <a:pPr algn="ctr"/>
+          </a:p>
+        </p:txBody>
+      </p:sp>
+      <p:sp>
+        <p:nvSpPr>
+          <p:cNvPr id="18" name="Rounded Rectangle 17"/>
+          <p:cNvSpPr/>
+          <p:nvPr/>
+        </p:nvSpPr>
+        <p:spPr>
+          <a:xfrm>
+            <a:off x="6400800" y="3081528"/>
+            <a:ext cx="822960" cy="548640"/>
+          </a:xfrm>
+          <a:prstGeom prst="roundRect">
+            <a:avLst>
+              <a:gd name="adj" fmla="val 12000"/>
+            </a:avLst>
+          </a:prstGeom>
+          <a:solidFill>
+            <a:srgbClr val="162033"/>
+          </a:solidFill>
+          <a:ln w="12700">
+            <a:solidFill>
+              <a:srgbClr val="38BDF8"/>
+            </a:solidFill>
+          </a:ln>
+          <a:effectLst/>
+        </p:spPr>
+        <p:style>
+          <a:lnRef idx="1">
+            <a:schemeClr val="accent1"/>
+          </a:lnRef>
+          <a:fillRef idx="3">
+            <a:schemeClr val="accent1"/>
+          </a:fillRef>
+          <a:effectRef idx="2">
+            <a:schemeClr val="accent1"/>
+          </a:effectRef>
+          <a:fontRef idx="minor">
+            <a:schemeClr val="lt1"/>
+          </a:fontRef>
+        </p:style>
+        <p:txBody>
+          <a:bodyPr rtlCol="0" anchor="ctr" wrap="square" lIns="73152" rIns="73152" tIns="27432" bIns="27432"/>
+          <a:lstStyle/>
+          <a:p>
+            <a:pPr algn="ctr"/>
+            <a:r>
+              <a:rPr sz="1400" b="1">
+                <a:solidFill>
+                  <a:srgbClr val="38BDF8"/>
+                </a:solidFill>
+                <a:latin typeface="Calibri"/>
+              </a:rPr>
+              <a:t>AC</a:t>
+            </a:r>
+          </a:p>
+        </p:txBody>
+      </p:sp>
+      <p:sp>
+        <p:nvSpPr>
+          <p:cNvPr id="19" name="TextBox 18"/>
+          <p:cNvSpPr txBox="1"/>
+          <p:nvPr/>
+        </p:nvSpPr>
+        <p:spPr>
+          <a:xfrm>
+            <a:off x="7360920" y="2999232"/>
+            <a:ext cx="4114800" cy="274320"/>
+          </a:xfrm>
+          <a:prstGeom prst="rect">
+            <a:avLst/>
+          </a:prstGeom>
+          <a:noFill/>
+        </p:spPr>
+        <p:txBody>
+          <a:bodyPr wrap="square" anchor="t" lIns="0" rIns="0" tIns="0" bIns="0">
+            <a:spAutoFit/>
+          </a:bodyPr>
+          <a:lstStyle/>
+          <a:p>
+            <a:pPr algn="l"/>
+            <a:r>
+              <a:rPr sz="1200" b="1" i="0">
+                <a:solidFill>
+                  <a:srgbClr val="FFFFFF"/>
+                </a:solidFill>
+                <a:latin typeface="Calibri"/>
+              </a:rPr>
+              <a:t>Actual Cost</a:t>
+            </a:r>
+          </a:p>
+        </p:txBody>
+      </p:sp>
+      <p:sp>
+        <p:nvSpPr>
+          <p:cNvPr id="20" name="TextBox 19"/>
+          <p:cNvSpPr txBox="1"/>
+          <p:nvPr/>
+        </p:nvSpPr>
+        <p:spPr>
+          <a:xfrm>
+            <a:off x="7360920" y="3291840"/>
+            <a:ext cx="4114800" cy="502920"/>
+          </a:xfrm>
+          <a:prstGeom prst="rect">
+            <a:avLst/>
+          </a:prstGeom>
+          <a:noFill/>
+        </p:spPr>
+        <p:txBody>
+          <a:bodyPr wrap="square" anchor="t" lIns="0" rIns="0" tIns="0" bIns="0">
+            <a:spAutoFit/>
+          </a:bodyPr>
+          <a:lstStyle/>
+          <a:p>
+            <a:pPr algn="l"/>
+            <a:r>
+              <a:rPr sz="950" b="0" i="0">
+                <a:solidFill>
+                  <a:srgbClr val="94A3B8"/>
+                </a:solidFill>
+                <a:latin typeface="Calibri"/>
+              </a:rPr>
+              <a:t>The real money spent so far.</a:t>
+            </a:r>
+          </a:p>
+        </p:txBody>
+      </p:sp>
+      <p:sp>
+        <p:nvSpPr>
+          <p:cNvPr id="21" name="Rounded Rectangle 20"/>
+          <p:cNvSpPr/>
+          <p:nvPr/>
+        </p:nvSpPr>
+        <p:spPr>
+          <a:xfrm>
+            <a:off x="640080" y="3977639"/>
+            <a:ext cx="5349240" cy="960120"/>
+          </a:xfrm>
+          <a:prstGeom prst="roundRect">
+            <a:avLst>
+              <a:gd name="adj" fmla="val 8000"/>
+            </a:avLst>
+          </a:prstGeom>
+          <a:solidFill>
+            <a:srgbClr val="1E293B"/>
+          </a:solidFill>
+          <a:ln w="12700">
+            <a:solidFill>
+              <a:srgbClr val="334155"/>
+            </a:solidFill>
+          </a:ln>
+          <a:effectLst/>
+        </p:spPr>
+        <p:style>
+          <a:lnRef idx="1">
+            <a:schemeClr val="accent1"/>
+          </a:lnRef>
+          <a:fillRef idx="3">
+            <a:schemeClr val="accent1"/>
+          </a:fillRef>
+          <a:effectRef idx="2">
+            <a:schemeClr val="accent1"/>
+          </a:effectRef>
+          <a:fontRef idx="minor">
+            <a:schemeClr val="lt1"/>
+          </a:fontRef>
+        </p:style>
+        <p:txBody>
+          <a:bodyPr rtlCol="0" anchor="ctr"/>
+          <a:lstStyle/>
+          <a:p>
+            <a:pPr algn="ctr"/>
+          </a:p>
+        </p:txBody>
+      </p:sp>
+      <p:sp>
+        <p:nvSpPr>
+          <p:cNvPr id="22" name="Rounded Rectangle 21"/>
+          <p:cNvSpPr/>
+          <p:nvPr/>
+        </p:nvSpPr>
+        <p:spPr>
+          <a:xfrm>
+            <a:off x="777240" y="4178807"/>
+            <a:ext cx="822960" cy="548640"/>
+          </a:xfrm>
+          <a:prstGeom prst="roundRect">
+            <a:avLst>
+              <a:gd name="adj" fmla="val 12000"/>
+            </a:avLst>
+          </a:prstGeom>
+          <a:solidFill>
+            <a:srgbClr val="162033"/>
+          </a:solidFill>
+          <a:ln w="12700">
+            <a:solidFill>
+              <a:srgbClr val="38BDF8"/>
+            </a:solidFill>
+          </a:ln>
+          <a:effectLst/>
+        </p:spPr>
+        <p:style>
+          <a:lnRef idx="1">
+            <a:schemeClr val="accent1"/>
+          </a:lnRef>
+          <a:fillRef idx="3">
+            <a:schemeClr val="accent1"/>
+          </a:fillRef>
+          <a:effectRef idx="2">
+            <a:schemeClr val="accent1"/>
+          </a:effectRef>
+          <a:fontRef idx="minor">
+            <a:schemeClr val="lt1"/>
+          </a:fontRef>
+        </p:style>
+        <p:txBody>
+          <a:bodyPr rtlCol="0" anchor="ctr" wrap="square" lIns="73152" rIns="73152" tIns="27432" bIns="27432"/>
+          <a:lstStyle/>
+          <a:p>
+            <a:pPr algn="ctr"/>
+            <a:r>
+              <a:rPr sz="1400" b="1">
+                <a:solidFill>
+                  <a:srgbClr val="38BDF8"/>
+                </a:solidFill>
+                <a:latin typeface="Calibri"/>
+              </a:rPr>
+              <a:t>CPI</a:t>
+            </a:r>
+          </a:p>
+        </p:txBody>
+      </p:sp>
+      <p:sp>
+        <p:nvSpPr>
+          <p:cNvPr id="23" name="TextBox 22"/>
+          <p:cNvSpPr txBox="1"/>
+          <p:nvPr/>
+        </p:nvSpPr>
+        <p:spPr>
+          <a:xfrm>
+            <a:off x="1737360" y="4096511"/>
+            <a:ext cx="4114800" cy="274320"/>
+          </a:xfrm>
+          <a:prstGeom prst="rect">
+            <a:avLst/>
+          </a:prstGeom>
+          <a:noFill/>
+        </p:spPr>
+        <p:txBody>
+          <a:bodyPr wrap="square" anchor="t" lIns="0" rIns="0" tIns="0" bIns="0">
+            <a:spAutoFit/>
+          </a:bodyPr>
+          <a:lstStyle/>
+          <a:p>
+            <a:pPr algn="l"/>
+            <a:r>
+              <a:rPr sz="1200" b="1" i="0">
+                <a:solidFill>
+                  <a:srgbClr val="FFFFFF"/>
+                </a:solidFill>
+                <a:latin typeface="Calibri"/>
+              </a:rPr>
+              <a:t>Cost Performance Index</a:t>
+            </a:r>
+          </a:p>
+        </p:txBody>
+      </p:sp>
+      <p:sp>
+        <p:nvSpPr>
+          <p:cNvPr id="24" name="TextBox 23"/>
+          <p:cNvSpPr txBox="1"/>
+          <p:nvPr/>
+        </p:nvSpPr>
+        <p:spPr>
+          <a:xfrm>
+            <a:off x="1737360" y="4389120"/>
+            <a:ext cx="4114800" cy="502920"/>
+          </a:xfrm>
+          <a:prstGeom prst="rect">
+            <a:avLst/>
+          </a:prstGeom>
+          <a:noFill/>
+        </p:spPr>
+        <p:txBody>
+          <a:bodyPr wrap="square" anchor="t" lIns="0" rIns="0" tIns="0" bIns="0">
+            <a:spAutoFit/>
+          </a:bodyPr>
+          <a:lstStyle/>
+          <a:p>
+            <a:pPr algn="l"/>
+            <a:r>
+              <a:rPr sz="950" b="0" i="0">
+                <a:solidFill>
+                  <a:srgbClr val="94A3B8"/>
+                </a:solidFill>
+                <a:latin typeface="Calibri"/>
+              </a:rPr>
+              <a:t>EV / AC. Above 1 = under budget; below 1 = over budget.</a:t>
+            </a:r>
+          </a:p>
+        </p:txBody>
+      </p:sp>
+      <p:sp>
+        <p:nvSpPr>
+          <p:cNvPr id="25" name="Rounded Rectangle 24"/>
+          <p:cNvSpPr/>
+          <p:nvPr/>
+        </p:nvSpPr>
+        <p:spPr>
+          <a:xfrm>
+            <a:off x="6263640" y="3977639"/>
+            <a:ext cx="5349240" cy="960120"/>
+          </a:xfrm>
+          <a:prstGeom prst="roundRect">
+            <a:avLst>
+              <a:gd name="adj" fmla="val 8000"/>
+            </a:avLst>
+          </a:prstGeom>
+          <a:solidFill>
+            <a:srgbClr val="1E293B"/>
+          </a:solidFill>
+          <a:ln w="12700">
+            <a:solidFill>
+              <a:srgbClr val="334155"/>
+            </a:solidFill>
+          </a:ln>
+          <a:effectLst/>
+        </p:spPr>
+        <p:style>
+          <a:lnRef idx="1">
+            <a:schemeClr val="accent1"/>
+          </a:lnRef>
+          <a:fillRef idx="3">
+            <a:schemeClr val="accent1"/>
+          </a:fillRef>
+          <a:effectRef idx="2">
+            <a:schemeClr val="accent1"/>
+          </a:effectRef>
+          <a:fontRef idx="minor">
+            <a:schemeClr val="lt1"/>
+          </a:fontRef>
+        </p:style>
+        <p:txBody>
+          <a:bodyPr rtlCol="0" anchor="ctr"/>
+          <a:lstStyle/>
+          <a:p>
+            <a:pPr algn="ctr"/>
+          </a:p>
+        </p:txBody>
+      </p:sp>
+      <p:sp>
+        <p:nvSpPr>
+          <p:cNvPr id="26" name="Rounded Rectangle 25"/>
+          <p:cNvSpPr/>
+          <p:nvPr/>
+        </p:nvSpPr>
+        <p:spPr>
+          <a:xfrm>
+            <a:off x="6400800" y="4178807"/>
+            <a:ext cx="822960" cy="548640"/>
+          </a:xfrm>
+          <a:prstGeom prst="roundRect">
+            <a:avLst>
+              <a:gd name="adj" fmla="val 12000"/>
+            </a:avLst>
+          </a:prstGeom>
+          <a:solidFill>
+            <a:srgbClr val="162033"/>
+          </a:solidFill>
+          <a:ln w="12700">
+            <a:solidFill>
+              <a:srgbClr val="38BDF8"/>
+            </a:solidFill>
+          </a:ln>
+          <a:effectLst/>
+        </p:spPr>
+        <p:style>
+          <a:lnRef idx="1">
+            <a:schemeClr val="accent1"/>
+          </a:lnRef>
+          <a:fillRef idx="3">
+            <a:schemeClr val="accent1"/>
+          </a:fillRef>
+          <a:effectRef idx="2">
+            <a:schemeClr val="accent1"/>
+          </a:effectRef>
+          <a:fontRef idx="minor">
+            <a:schemeClr val="lt1"/>
+          </a:fontRef>
+        </p:style>
+        <p:txBody>
+          <a:bodyPr rtlCol="0" anchor="ctr" wrap="square" lIns="73152" rIns="73152" tIns="27432" bIns="27432"/>
+          <a:lstStyle/>
+          <a:p>
+            <a:pPr algn="ctr"/>
+            <a:r>
+              <a:rPr sz="1400" b="1">
+                <a:solidFill>
+                  <a:srgbClr val="38BDF8"/>
+                </a:solidFill>
+                <a:latin typeface="Calibri"/>
+              </a:rPr>
+              <a:t>SPI</a:t>
+            </a:r>
+          </a:p>
+        </p:txBody>
+      </p:sp>
+      <p:sp>
+        <p:nvSpPr>
+          <p:cNvPr id="27" name="TextBox 26"/>
+          <p:cNvSpPr txBox="1"/>
+          <p:nvPr/>
+        </p:nvSpPr>
+        <p:spPr>
+          <a:xfrm>
+            <a:off x="7360920" y="4096511"/>
+            <a:ext cx="4114800" cy="274320"/>
+          </a:xfrm>
+          <a:prstGeom prst="rect">
+            <a:avLst/>
+          </a:prstGeom>
+          <a:noFill/>
+        </p:spPr>
+        <p:txBody>
+          <a:bodyPr wrap="square" anchor="t" lIns="0" rIns="0" tIns="0" bIns="0">
+            <a:spAutoFit/>
+          </a:bodyPr>
+          <a:lstStyle/>
+          <a:p>
+            <a:pPr algn="l"/>
+            <a:r>
+              <a:rPr sz="1200" b="1" i="0">
+                <a:solidFill>
+                  <a:srgbClr val="FFFFFF"/>
+                </a:solidFill>
+                <a:latin typeface="Calibri"/>
+              </a:rPr>
+              <a:t>Schedule Performance Index</a:t>
+            </a:r>
+          </a:p>
+        </p:txBody>
+      </p:sp>
+      <p:sp>
+        <p:nvSpPr>
+          <p:cNvPr id="28" name="TextBox 27"/>
+          <p:cNvSpPr txBox="1"/>
+          <p:nvPr/>
+        </p:nvSpPr>
+        <p:spPr>
+          <a:xfrm>
+            <a:off x="7360920" y="4389120"/>
+            <a:ext cx="4114800" cy="502920"/>
+          </a:xfrm>
+          <a:prstGeom prst="rect">
+            <a:avLst/>
+          </a:prstGeom>
+          <a:noFill/>
+        </p:spPr>
+        <p:txBody>
+          <a:bodyPr wrap="square" anchor="t" lIns="0" rIns="0" tIns="0" bIns="0">
+            <a:spAutoFit/>
+          </a:bodyPr>
+          <a:lstStyle/>
+          <a:p>
+            <a:pPr algn="l"/>
+            <a:r>
+              <a:rPr sz="950" b="0" i="0">
+                <a:solidFill>
+                  <a:srgbClr val="94A3B8"/>
+                </a:solidFill>
+                <a:latin typeface="Calibri"/>
+              </a:rPr>
+              <a:t>EV / PV. Above 1 = ahead of schedule; below 1 = behind.</a:t>
+            </a:r>
+          </a:p>
+        </p:txBody>
+      </p:sp>
+      <p:sp>
+        <p:nvSpPr>
+          <p:cNvPr id="29" name="Rounded Rectangle 28"/>
+          <p:cNvSpPr/>
+          <p:nvPr/>
+        </p:nvSpPr>
+        <p:spPr>
+          <a:xfrm>
+            <a:off x="640080" y="5074920"/>
+            <a:ext cx="5349240" cy="960120"/>
+          </a:xfrm>
+          <a:prstGeom prst="roundRect">
+            <a:avLst>
+              <a:gd name="adj" fmla="val 8000"/>
+            </a:avLst>
+          </a:prstGeom>
+          <a:solidFill>
+            <a:srgbClr val="1E293B"/>
+          </a:solidFill>
+          <a:ln w="12700">
+            <a:solidFill>
+              <a:srgbClr val="334155"/>
+            </a:solidFill>
+          </a:ln>
+          <a:effectLst/>
+        </p:spPr>
+        <p:style>
+          <a:lnRef idx="1">
+            <a:schemeClr val="accent1"/>
+          </a:lnRef>
+          <a:fillRef idx="3">
+            <a:schemeClr val="accent1"/>
+          </a:fillRef>
+          <a:effectRef idx="2">
+            <a:schemeClr val="accent1"/>
+          </a:effectRef>
+          <a:fontRef idx="minor">
+            <a:schemeClr val="lt1"/>
+          </a:fontRef>
+        </p:style>
+        <p:txBody>
+          <a:bodyPr rtlCol="0" anchor="ctr"/>
+          <a:lstStyle/>
+          <a:p>
+            <a:pPr algn="ctr"/>
+          </a:p>
+        </p:txBody>
+      </p:sp>
+      <p:sp>
+        <p:nvSpPr>
+          <p:cNvPr id="30" name="Rounded Rectangle 29"/>
+          <p:cNvSpPr/>
+          <p:nvPr/>
+        </p:nvSpPr>
+        <p:spPr>
+          <a:xfrm>
+            <a:off x="777240" y="5276088"/>
+            <a:ext cx="822960" cy="548640"/>
+          </a:xfrm>
+          <a:prstGeom prst="roundRect">
+            <a:avLst>
+              <a:gd name="adj" fmla="val 12000"/>
+            </a:avLst>
+          </a:prstGeom>
+          <a:solidFill>
+            <a:srgbClr val="162033"/>
+          </a:solidFill>
+          <a:ln w="12700">
+            <a:solidFill>
+              <a:srgbClr val="38BDF8"/>
+            </a:solidFill>
+          </a:ln>
+          <a:effectLst/>
+        </p:spPr>
+        <p:style>
+          <a:lnRef idx="1">
+            <a:schemeClr val="accent1"/>
+          </a:lnRef>
+          <a:fillRef idx="3">
+            <a:schemeClr val="accent1"/>
+          </a:fillRef>
+          <a:effectRef idx="2">
+            <a:schemeClr val="accent1"/>
+          </a:effectRef>
+          <a:fontRef idx="minor">
+            <a:schemeClr val="lt1"/>
+          </a:fontRef>
+        </p:style>
+        <p:txBody>
+          <a:bodyPr rtlCol="0" anchor="ctr" wrap="square" lIns="73152" rIns="73152" tIns="27432" bIns="27432"/>
+          <a:lstStyle/>
+          <a:p>
+            <a:pPr algn="ctr"/>
+            <a:r>
+              <a:rPr sz="1400" b="1">
+                <a:solidFill>
+                  <a:srgbClr val="38BDF8"/>
+                </a:solidFill>
+                <a:latin typeface="Calibri"/>
+              </a:rPr>
+              <a:t>EAC</a:t>
+            </a:r>
+          </a:p>
+        </p:txBody>
+      </p:sp>
+      <p:sp>
+        <p:nvSpPr>
+          <p:cNvPr id="31" name="TextBox 30"/>
+          <p:cNvSpPr txBox="1"/>
+          <p:nvPr/>
+        </p:nvSpPr>
+        <p:spPr>
+          <a:xfrm>
+            <a:off x="1737360" y="5193792"/>
+            <a:ext cx="4114800" cy="274320"/>
+          </a:xfrm>
+          <a:prstGeom prst="rect">
+            <a:avLst/>
+          </a:prstGeom>
+          <a:noFill/>
+        </p:spPr>
+        <p:txBody>
+          <a:bodyPr wrap="square" anchor="t" lIns="0" rIns="0" tIns="0" bIns="0">
+            <a:spAutoFit/>
+          </a:bodyPr>
+          <a:lstStyle/>
+          <a:p>
+            <a:pPr algn="l"/>
+            <a:r>
+              <a:rPr sz="1200" b="1" i="0">
+                <a:solidFill>
+                  <a:srgbClr val="FFFFFF"/>
+                </a:solidFill>
+                <a:latin typeface="Calibri"/>
+              </a:rPr>
+              <a:t>Estimate At Completion</a:t>
+            </a:r>
+          </a:p>
+        </p:txBody>
+      </p:sp>
+      <p:sp>
+        <p:nvSpPr>
+          <p:cNvPr id="32" name="TextBox 31"/>
+          <p:cNvSpPr txBox="1"/>
+          <p:nvPr/>
+        </p:nvSpPr>
+        <p:spPr>
+          <a:xfrm>
+            <a:off x="1737360" y="5486400"/>
+            <a:ext cx="4114800" cy="502920"/>
+          </a:xfrm>
+          <a:prstGeom prst="rect">
+            <a:avLst/>
+          </a:prstGeom>
+          <a:noFill/>
+        </p:spPr>
+        <p:txBody>
+          <a:bodyPr wrap="square" anchor="t" lIns="0" rIns="0" tIns="0" bIns="0">
+            <a:spAutoFit/>
+          </a:bodyPr>
+          <a:lstStyle/>
+          <a:p>
+            <a:pPr algn="l"/>
+            <a:r>
+              <a:rPr sz="950" b="0" i="0">
+                <a:solidFill>
+                  <a:srgbClr val="94A3B8"/>
+                </a:solidFill>
+                <a:latin typeface="Calibri"/>
+              </a:rPr>
+              <a:t>A forecast of the final project cost based on current performance.</a:t>
+            </a:r>
+          </a:p>
+        </p:txBody>
+      </p:sp>
+      <p:sp>
+        <p:nvSpPr>
+          <p:cNvPr id="33" name="Rounded Rectangle 32"/>
+          <p:cNvSpPr/>
+          <p:nvPr/>
+        </p:nvSpPr>
+        <p:spPr>
+          <a:xfrm>
+            <a:off x="6263640" y="5074920"/>
+            <a:ext cx="5349240" cy="960120"/>
+          </a:xfrm>
+          <a:prstGeom prst="roundRect">
+            <a:avLst>
+              <a:gd name="adj" fmla="val 8000"/>
+            </a:avLst>
+          </a:prstGeom>
+          <a:solidFill>
+            <a:srgbClr val="1E293B"/>
+          </a:solidFill>
+          <a:ln w="12700">
+            <a:solidFill>
+              <a:srgbClr val="334155"/>
+            </a:solidFill>
+          </a:ln>
+          <a:effectLst/>
+        </p:spPr>
+        <p:style>
+          <a:lnRef idx="1">
+            <a:schemeClr val="accent1"/>
+          </a:lnRef>
+          <a:fillRef idx="3">
+            <a:schemeClr val="accent1"/>
+          </a:fillRef>
+          <a:effectRef idx="2">
+            <a:schemeClr val="accent1"/>
+          </a:effectRef>
+          <a:fontRef idx="minor">
+            <a:schemeClr val="lt1"/>
+          </a:fontRef>
+        </p:style>
+        <p:txBody>
+          <a:bodyPr rtlCol="0" anchor="ctr"/>
+          <a:lstStyle/>
+          <a:p>
+            <a:pPr algn="ctr"/>
+          </a:p>
+        </p:txBody>
+      </p:sp>
+      <p:sp>
+        <p:nvSpPr>
+          <p:cNvPr id="34" name="Rounded Rectangle 33"/>
+          <p:cNvSpPr/>
+          <p:nvPr/>
+        </p:nvSpPr>
+        <p:spPr>
+          <a:xfrm>
+            <a:off x="6400800" y="5276088"/>
+            <a:ext cx="822960" cy="548640"/>
+          </a:xfrm>
+          <a:prstGeom prst="roundRect">
+            <a:avLst>
+              <a:gd name="adj" fmla="val 12000"/>
+            </a:avLst>
+          </a:prstGeom>
+          <a:solidFill>
+            <a:srgbClr val="162033"/>
+          </a:solidFill>
+          <a:ln w="12700">
+            <a:solidFill>
+              <a:srgbClr val="38BDF8"/>
+            </a:solidFill>
+          </a:ln>
+          <a:effectLst/>
+        </p:spPr>
+        <p:style>
+          <a:lnRef idx="1">
+            <a:schemeClr val="accent1"/>
+          </a:lnRef>
+          <a:fillRef idx="3">
+            <a:schemeClr val="accent1"/>
+          </a:fillRef>
+          <a:effectRef idx="2">
+            <a:schemeClr val="accent1"/>
+          </a:effectRef>
+          <a:fontRef idx="minor">
+            <a:schemeClr val="lt1"/>
+          </a:fontRef>
+        </p:style>
+        <p:txBody>
+          <a:bodyPr rtlCol="0" anchor="ctr" wrap="square" lIns="73152" rIns="73152" tIns="27432" bIns="27432"/>
+          <a:lstStyle/>
+          <a:p>
+            <a:pPr algn="ctr"/>
+            <a:r>
+              <a:rPr sz="1400" b="1">
+                <a:solidFill>
+                  <a:srgbClr val="38BDF8"/>
+                </a:solidFill>
+                <a:latin typeface="Calibri"/>
+              </a:rPr>
+              <a:t>Delay Risk</a:t>
+            </a:r>
+          </a:p>
+        </p:txBody>
+      </p:sp>
+      <p:sp>
+        <p:nvSpPr>
+          <p:cNvPr id="35" name="TextBox 34"/>
+          <p:cNvSpPr txBox="1"/>
+          <p:nvPr/>
+        </p:nvSpPr>
+        <p:spPr>
+          <a:xfrm>
+            <a:off x="7360920" y="5193792"/>
+            <a:ext cx="4114800" cy="274320"/>
+          </a:xfrm>
+          <a:prstGeom prst="rect">
+            <a:avLst/>
+          </a:prstGeom>
+          <a:noFill/>
+        </p:spPr>
+        <p:txBody>
+          <a:bodyPr wrap="square" anchor="t" lIns="0" rIns="0" tIns="0" bIns="0">
+            <a:spAutoFit/>
+          </a:bodyPr>
+          <a:lstStyle/>
+          <a:p>
+            <a:pPr algn="l"/>
+            <a:r>
+              <a:rPr sz="1200" b="1" i="0">
+                <a:solidFill>
+                  <a:srgbClr val="FFFFFF"/>
+                </a:solidFill>
+                <a:latin typeface="Calibri"/>
+              </a:rPr>
+              <a:t>Predictive score</a:t>
+            </a:r>
+          </a:p>
+        </p:txBody>
+      </p:sp>
+      <p:sp>
+        <p:nvSpPr>
+          <p:cNvPr id="36" name="TextBox 35"/>
+          <p:cNvSpPr txBox="1"/>
+          <p:nvPr/>
+        </p:nvSpPr>
+        <p:spPr>
+          <a:xfrm>
+            <a:off x="7360920" y="5486400"/>
+            <a:ext cx="4114800" cy="502920"/>
+          </a:xfrm>
+          <a:prstGeom prst="rect">
+            <a:avLst/>
+          </a:prstGeom>
+          <a:noFill/>
+        </p:spPr>
+        <p:txBody>
+          <a:bodyPr wrap="square" anchor="t" lIns="0" rIns="0" tIns="0" bIns="0">
+            <a:spAutoFit/>
+          </a:bodyPr>
+          <a:lstStyle/>
+          <a:p>
+            <a:pPr algn="l"/>
+            <a:r>
+              <a:rPr sz="950" b="0" i="0">
+                <a:solidFill>
+                  <a:srgbClr val="94A3B8"/>
+                </a:solidFill>
+                <a:latin typeface="Calibri"/>
+              </a:rPr>
+              <a:t>A model's probability (0–1) that an activity will finish later than planned.</a:t>
+            </a:r>
+          </a:p>
+        </p:txBody>
+      </p:sp>
+      <p:sp>
+        <p:nvSpPr>
+          <p:cNvPr id="37" name="TextBox 36"/>
+          <p:cNvSpPr txBox="1"/>
+          <p:nvPr/>
+        </p:nvSpPr>
+        <p:spPr>
+          <a:xfrm>
+            <a:off x="640080" y="6419088"/>
+            <a:ext cx="6400800" cy="274320"/>
+          </a:xfrm>
+          <a:prstGeom prst="rect">
+            <a:avLst/>
+          </a:prstGeom>
+          <a:noFill/>
+        </p:spPr>
+        <p:txBody>
+          <a:bodyPr wrap="square" anchor="t" lIns="0" rIns="0" tIns="0" bIns="0">
+            <a:spAutoFit/>
+          </a:bodyPr>
+          <a:lstStyle/>
+          <a:p>
+            <a:pPr algn="l"/>
+            <a:r>
+              <a:rPr sz="900" b="0" i="0">
+                <a:solidFill>
+                  <a:srgbClr val="94A3B8"/>
+                </a:solidFill>
+                <a:latin typeface="Calibri"/>
+              </a:rPr>
+              <a:t>CCPIP — Final-Year Project</a:t>
+            </a:r>
+          </a:p>
+        </p:txBody>
+      </p:sp>
+      <p:sp>
+        <p:nvSpPr>
+          <p:cNvPr id="38" name="TextBox 37"/>
+          <p:cNvSpPr txBox="1"/>
+          <p:nvPr/>
+        </p:nvSpPr>
+        <p:spPr>
+          <a:xfrm>
+            <a:off x="10881360" y="6419088"/>
+            <a:ext cx="731520" cy="274320"/>
+          </a:xfrm>
+          <a:prstGeom prst="rect">
+            <a:avLst/>
+          </a:prstGeom>
+          <a:noFill/>
+        </p:spPr>
+        <p:txBody>
+          <a:bodyPr wrap="square" anchor="t" lIns="0" rIns="0" tIns="0" bIns="0">
+            <a:spAutoFit/>
+          </a:bodyPr>
+          <a:lstStyle/>
+          <a:p>
+            <a:pPr algn="r"/>
+            <a:r>
+              <a:rPr sz="900">
+                <a:solidFill>
+                  <a:srgbClr val="94A3B8"/>
+                </a:solidFill>
+                <a:latin typeface="Calibri"/>
+              </a:rPr>
+              <a:t>05</a:t>
             </a:r>
           </a:p>
         </p:txBody>
@@ -23268,13 +28168,1848 @@
           <a:p>
             <a:pPr algn="r"/>
             <a:r>
+              <a:rPr sz="900">
+                <a:solidFill>
+                  <a:srgbClr val="94A3B8"/>
+                </a:solidFill>
+                <a:latin typeface="Calibri"/>
+              </a:rPr>
+              <a:t>03</a:t>
+            </a:r>
+          </a:p>
+        </p:txBody>
+      </p:sp>
+    </p:spTree>
+  </p:cSld>
+  <p:clrMapOvr>
+    <a:masterClrMapping/>
+  </p:clrMapOvr>
+</p:sld>
+</file>
+
+<file path=ppt/slides/slide30.xml><?xml version="1.0" encoding="utf-8"?>
+<p:sld xmlns:a="http://schemas.openxmlformats.org/drawingml/2006/main" xmlns:p="http://schemas.openxmlformats.org/presentationml/2006/main" xmlns:r="http://schemas.openxmlformats.org/officeDocument/2006/relationships">
+  <p:cSld>
+    <p:bg>
+      <p:bgPr>
+        <a:solidFill>
+          <a:srgbClr val="0F172A"/>
+        </a:solidFill>
+        <a:effectLst/>
+      </p:bgPr>
+    </p:bg>
+    <p:spTree>
+      <p:nvGrpSpPr>
+        <p:cNvPr id="1" name=""/>
+        <p:cNvGrpSpPr/>
+        <p:nvPr/>
+      </p:nvGrpSpPr>
+      <p:grpSpPr/>
+      <p:sp>
+        <p:nvSpPr>
+          <p:cNvPr id="2" name="TextBox 1"/>
+          <p:cNvSpPr txBox="1"/>
+          <p:nvPr/>
+        </p:nvSpPr>
+        <p:spPr>
+          <a:xfrm>
+            <a:off x="640080" y="438912"/>
+            <a:ext cx="10972800" cy="310896"/>
+          </a:xfrm>
+          <a:prstGeom prst="rect">
+            <a:avLst/>
+          </a:prstGeom>
+          <a:noFill/>
+        </p:spPr>
+        <p:txBody>
+          <a:bodyPr wrap="square" anchor="t" lIns="0" rIns="0" tIns="0" bIns="0">
+            <a:spAutoFit/>
+          </a:bodyPr>
+          <a:lstStyle/>
+          <a:p>
+            <a:pPr algn="l"/>
+            <a:r>
+              <a:rPr sz="1200" b="1" i="0" spc="150">
+                <a:solidFill>
+                  <a:srgbClr val="38BDF8"/>
+                </a:solidFill>
+                <a:latin typeface="Calibri"/>
+              </a:rPr>
+              <a:t>06 — IMPLEMENTATION</a:t>
+            </a:r>
+          </a:p>
+        </p:txBody>
+      </p:sp>
+      <p:sp>
+        <p:nvSpPr>
+          <p:cNvPr id="3" name="TextBox 2"/>
+          <p:cNvSpPr txBox="1"/>
+          <p:nvPr/>
+        </p:nvSpPr>
+        <p:spPr>
+          <a:xfrm>
+            <a:off x="640080" y="749808"/>
+            <a:ext cx="10972800" cy="731520"/>
+          </a:xfrm>
+          <a:prstGeom prst="rect">
+            <a:avLst/>
+          </a:prstGeom>
+          <a:noFill/>
+        </p:spPr>
+        <p:txBody>
+          <a:bodyPr wrap="square" anchor="t" lIns="0" rIns="0" tIns="0" bIns="0">
+            <a:spAutoFit/>
+          </a:bodyPr>
+          <a:lstStyle/>
+          <a:p>
+            <a:pPr algn="l"/>
+            <a:r>
+              <a:rPr sz="2900" b="1" i="0">
+                <a:solidFill>
+                  <a:srgbClr val="FFFFFF"/>
+                </a:solidFill>
+                <a:latin typeface="Calibri"/>
+              </a:rPr>
+              <a:t>Worked Example: Reading the Metrics</a:t>
+            </a:r>
+          </a:p>
+        </p:txBody>
+      </p:sp>
+      <p:sp>
+        <p:nvSpPr>
+          <p:cNvPr id="4" name="Rectangle 3"/>
+          <p:cNvSpPr/>
+          <p:nvPr/>
+        </p:nvSpPr>
+        <p:spPr>
+          <a:xfrm>
+            <a:off x="658368" y="1481328"/>
+            <a:ext cx="1051560" cy="54864"/>
+          </a:xfrm>
+          <a:prstGeom prst="rect">
+            <a:avLst/>
+          </a:prstGeom>
+          <a:solidFill>
+            <a:srgbClr val="38BDF8"/>
+          </a:solidFill>
+          <a:ln>
+            <a:noFill/>
+          </a:ln>
+          <a:effectLst/>
+        </p:spPr>
+        <p:style>
+          <a:lnRef idx="1">
+            <a:schemeClr val="accent1"/>
+          </a:lnRef>
+          <a:fillRef idx="3">
+            <a:schemeClr val="accent1"/>
+          </a:fillRef>
+          <a:effectRef idx="2">
+            <a:schemeClr val="accent1"/>
+          </a:effectRef>
+          <a:fontRef idx="minor">
+            <a:schemeClr val="lt1"/>
+          </a:fontRef>
+        </p:style>
+        <p:txBody>
+          <a:bodyPr rtlCol="0" anchor="ctr"/>
+          <a:lstStyle/>
+          <a:p>
+            <a:pPr algn="ctr"/>
+          </a:p>
+        </p:txBody>
+      </p:sp>
+      <p:sp>
+        <p:nvSpPr>
+          <p:cNvPr id="5" name="TextBox 4"/>
+          <p:cNvSpPr txBox="1"/>
+          <p:nvPr/>
+        </p:nvSpPr>
+        <p:spPr>
+          <a:xfrm>
+            <a:off x="640080" y="1737360"/>
+            <a:ext cx="10881360" cy="365760"/>
+          </a:xfrm>
+          <a:prstGeom prst="rect">
+            <a:avLst/>
+          </a:prstGeom>
+          <a:noFill/>
+        </p:spPr>
+        <p:txBody>
+          <a:bodyPr wrap="square" anchor="t" lIns="0" rIns="0" tIns="0" bIns="0">
+            <a:spAutoFit/>
+          </a:bodyPr>
+          <a:lstStyle/>
+          <a:p>
+            <a:pPr algn="l"/>
+            <a:r>
+              <a:rPr sz="1400" b="0" i="0">
+                <a:solidFill>
+                  <a:srgbClr val="E2E8F0"/>
+                </a:solidFill>
+                <a:latin typeface="Calibri"/>
+              </a:rPr>
+              <a:t>Suppose one activity has a budget (BAC) of ₹100,000 and is planned to be 50% done today.</a:t>
+            </a:r>
+          </a:p>
+        </p:txBody>
+      </p:sp>
+      <p:sp>
+        <p:nvSpPr>
+          <p:cNvPr id="6" name="Rounded Rectangle 5"/>
+          <p:cNvSpPr/>
+          <p:nvPr/>
+        </p:nvSpPr>
+        <p:spPr>
+          <a:xfrm>
+            <a:off x="640080" y="2194560"/>
+            <a:ext cx="5349240" cy="2011680"/>
+          </a:xfrm>
+          <a:prstGeom prst="roundRect">
+            <a:avLst>
+              <a:gd name="adj" fmla="val 6000"/>
+            </a:avLst>
+          </a:prstGeom>
+          <a:solidFill>
+            <a:srgbClr val="162033"/>
+          </a:solidFill>
+          <a:ln w="12700">
+            <a:solidFill>
+              <a:srgbClr val="334155"/>
+            </a:solidFill>
+          </a:ln>
+          <a:effectLst/>
+        </p:spPr>
+        <p:style>
+          <a:lnRef idx="1">
+            <a:schemeClr val="accent1"/>
+          </a:lnRef>
+          <a:fillRef idx="3">
+            <a:schemeClr val="accent1"/>
+          </a:fillRef>
+          <a:effectRef idx="2">
+            <a:schemeClr val="accent1"/>
+          </a:effectRef>
+          <a:fontRef idx="minor">
+            <a:schemeClr val="lt1"/>
+          </a:fontRef>
+        </p:style>
+        <p:txBody>
+          <a:bodyPr rtlCol="0" anchor="ctr"/>
+          <a:lstStyle/>
+          <a:p>
+            <a:pPr algn="ctr"/>
+          </a:p>
+        </p:txBody>
+      </p:sp>
+      <p:sp>
+        <p:nvSpPr>
+          <p:cNvPr id="7" name="TextBox 6"/>
+          <p:cNvSpPr txBox="1"/>
+          <p:nvPr/>
+        </p:nvSpPr>
+        <p:spPr>
+          <a:xfrm>
+            <a:off x="868680" y="2331720"/>
+            <a:ext cx="4846320" cy="320040"/>
+          </a:xfrm>
+          <a:prstGeom prst="rect">
+            <a:avLst/>
+          </a:prstGeom>
+          <a:noFill/>
+        </p:spPr>
+        <p:txBody>
+          <a:bodyPr wrap="square" anchor="t" lIns="0" rIns="0" tIns="0" bIns="0">
+            <a:spAutoFit/>
+          </a:bodyPr>
+          <a:lstStyle/>
+          <a:p>
+            <a:pPr algn="l"/>
+            <a:r>
+              <a:rPr sz="1100" b="1" i="0" spc="100">
+                <a:solidFill>
+                  <a:srgbClr val="38BDF8"/>
+                </a:solidFill>
+                <a:latin typeface="Calibri"/>
+              </a:rPr>
+              <a:t>THE INPUTS</a:t>
+            </a:r>
+          </a:p>
+        </p:txBody>
+      </p:sp>
+      <p:sp>
+        <p:nvSpPr>
+          <p:cNvPr id="8" name="TextBox 7"/>
+          <p:cNvSpPr txBox="1"/>
+          <p:nvPr/>
+        </p:nvSpPr>
+        <p:spPr>
+          <a:xfrm>
+            <a:off x="868680" y="2697480"/>
+            <a:ext cx="2743200" cy="274320"/>
+          </a:xfrm>
+          <a:prstGeom prst="rect">
+            <a:avLst/>
+          </a:prstGeom>
+          <a:noFill/>
+        </p:spPr>
+        <p:txBody>
+          <a:bodyPr wrap="square" anchor="t" lIns="0" rIns="0" tIns="0" bIns="0">
+            <a:spAutoFit/>
+          </a:bodyPr>
+          <a:lstStyle/>
+          <a:p>
+            <a:pPr algn="l"/>
+            <a:r>
+              <a:rPr sz="1150" b="1" i="0">
+                <a:solidFill>
+                  <a:srgbClr val="FFFFFF"/>
+                </a:solidFill>
+                <a:latin typeface="Calibri"/>
+              </a:rPr>
+              <a:t>PV (planned value)</a:t>
+            </a:r>
+          </a:p>
+        </p:txBody>
+      </p:sp>
+      <p:sp>
+        <p:nvSpPr>
+          <p:cNvPr id="9" name="TextBox 8"/>
+          <p:cNvSpPr txBox="1"/>
+          <p:nvPr/>
+        </p:nvSpPr>
+        <p:spPr>
+          <a:xfrm>
+            <a:off x="3566160" y="2697480"/>
+            <a:ext cx="1280160" cy="274320"/>
+          </a:xfrm>
+          <a:prstGeom prst="rect">
+            <a:avLst/>
+          </a:prstGeom>
+          <a:noFill/>
+        </p:spPr>
+        <p:txBody>
+          <a:bodyPr wrap="square" anchor="t" lIns="0" rIns="0" tIns="0" bIns="0">
+            <a:spAutoFit/>
+          </a:bodyPr>
+          <a:lstStyle/>
+          <a:p>
+            <a:pPr algn="r"/>
+            <a:r>
+              <a:rPr sz="1150" b="1" i="0">
+                <a:solidFill>
+                  <a:srgbClr val="38BDF8"/>
+                </a:solidFill>
+                <a:latin typeface="Calibri"/>
+              </a:rPr>
+              <a:t>₹50,000</a:t>
+            </a:r>
+          </a:p>
+        </p:txBody>
+      </p:sp>
+      <p:sp>
+        <p:nvSpPr>
+          <p:cNvPr id="10" name="TextBox 9"/>
+          <p:cNvSpPr txBox="1"/>
+          <p:nvPr/>
+        </p:nvSpPr>
+        <p:spPr>
+          <a:xfrm>
+            <a:off x="868680" y="2953512"/>
+            <a:ext cx="4846320" cy="274320"/>
+          </a:xfrm>
+          <a:prstGeom prst="rect">
+            <a:avLst/>
+          </a:prstGeom>
+          <a:noFill/>
+        </p:spPr>
+        <p:txBody>
+          <a:bodyPr wrap="square" anchor="t" lIns="0" rIns="0" tIns="0" bIns="0">
+            <a:spAutoFit/>
+          </a:bodyPr>
+          <a:lstStyle/>
+          <a:p>
+            <a:pPr algn="l"/>
+            <a:r>
               <a:rPr sz="900" b="0" i="0">
                 <a:solidFill>
                   <a:srgbClr val="94A3B8"/>
                 </a:solidFill>
                 <a:latin typeface="Calibri"/>
               </a:rPr>
-              <a:t>03</a:t>
+              <a:t>half the budget should be earned</a:t>
+            </a:r>
+          </a:p>
+        </p:txBody>
+      </p:sp>
+      <p:sp>
+        <p:nvSpPr>
+          <p:cNvPr id="11" name="TextBox 10"/>
+          <p:cNvSpPr txBox="1"/>
+          <p:nvPr/>
+        </p:nvSpPr>
+        <p:spPr>
+          <a:xfrm>
+            <a:off x="868680" y="3200400"/>
+            <a:ext cx="2743200" cy="274320"/>
+          </a:xfrm>
+          <a:prstGeom prst="rect">
+            <a:avLst/>
+          </a:prstGeom>
+          <a:noFill/>
+        </p:spPr>
+        <p:txBody>
+          <a:bodyPr wrap="square" anchor="t" lIns="0" rIns="0" tIns="0" bIns="0">
+            <a:spAutoFit/>
+          </a:bodyPr>
+          <a:lstStyle/>
+          <a:p>
+            <a:pPr algn="l"/>
+            <a:r>
+              <a:rPr sz="1150" b="1" i="0">
+                <a:solidFill>
+                  <a:srgbClr val="FFFFFF"/>
+                </a:solidFill>
+                <a:latin typeface="Calibri"/>
+              </a:rPr>
+              <a:t>EV (earned value)</a:t>
+            </a:r>
+          </a:p>
+        </p:txBody>
+      </p:sp>
+      <p:sp>
+        <p:nvSpPr>
+          <p:cNvPr id="12" name="TextBox 11"/>
+          <p:cNvSpPr txBox="1"/>
+          <p:nvPr/>
+        </p:nvSpPr>
+        <p:spPr>
+          <a:xfrm>
+            <a:off x="3566160" y="3200400"/>
+            <a:ext cx="1280160" cy="274320"/>
+          </a:xfrm>
+          <a:prstGeom prst="rect">
+            <a:avLst/>
+          </a:prstGeom>
+          <a:noFill/>
+        </p:spPr>
+        <p:txBody>
+          <a:bodyPr wrap="square" anchor="t" lIns="0" rIns="0" tIns="0" bIns="0">
+            <a:spAutoFit/>
+          </a:bodyPr>
+          <a:lstStyle/>
+          <a:p>
+            <a:pPr algn="r"/>
+            <a:r>
+              <a:rPr sz="1150" b="1" i="0">
+                <a:solidFill>
+                  <a:srgbClr val="38BDF8"/>
+                </a:solidFill>
+                <a:latin typeface="Calibri"/>
+              </a:rPr>
+              <a:t>₹40,000</a:t>
+            </a:r>
+          </a:p>
+        </p:txBody>
+      </p:sp>
+      <p:sp>
+        <p:nvSpPr>
+          <p:cNvPr id="13" name="TextBox 12"/>
+          <p:cNvSpPr txBox="1"/>
+          <p:nvPr/>
+        </p:nvSpPr>
+        <p:spPr>
+          <a:xfrm>
+            <a:off x="868680" y="3456432"/>
+            <a:ext cx="4846320" cy="274320"/>
+          </a:xfrm>
+          <a:prstGeom prst="rect">
+            <a:avLst/>
+          </a:prstGeom>
+          <a:noFill/>
+        </p:spPr>
+        <p:txBody>
+          <a:bodyPr wrap="square" anchor="t" lIns="0" rIns="0" tIns="0" bIns="0">
+            <a:spAutoFit/>
+          </a:bodyPr>
+          <a:lstStyle/>
+          <a:p>
+            <a:pPr algn="l"/>
+            <a:r>
+              <a:rPr sz="900" b="0" i="0">
+                <a:solidFill>
+                  <a:srgbClr val="94A3B8"/>
+                </a:solidFill>
+                <a:latin typeface="Calibri"/>
+              </a:rPr>
+              <a:t>only 40% actually completed</a:t>
+            </a:r>
+          </a:p>
+        </p:txBody>
+      </p:sp>
+      <p:sp>
+        <p:nvSpPr>
+          <p:cNvPr id="14" name="TextBox 13"/>
+          <p:cNvSpPr txBox="1"/>
+          <p:nvPr/>
+        </p:nvSpPr>
+        <p:spPr>
+          <a:xfrm>
+            <a:off x="868680" y="3703320"/>
+            <a:ext cx="2743200" cy="274320"/>
+          </a:xfrm>
+          <a:prstGeom prst="rect">
+            <a:avLst/>
+          </a:prstGeom>
+          <a:noFill/>
+        </p:spPr>
+        <p:txBody>
+          <a:bodyPr wrap="square" anchor="t" lIns="0" rIns="0" tIns="0" bIns="0">
+            <a:spAutoFit/>
+          </a:bodyPr>
+          <a:lstStyle/>
+          <a:p>
+            <a:pPr algn="l"/>
+            <a:r>
+              <a:rPr sz="1150" b="1" i="0">
+                <a:solidFill>
+                  <a:srgbClr val="FFFFFF"/>
+                </a:solidFill>
+                <a:latin typeface="Calibri"/>
+              </a:rPr>
+              <a:t>AC (actual cost)</a:t>
+            </a:r>
+          </a:p>
+        </p:txBody>
+      </p:sp>
+      <p:sp>
+        <p:nvSpPr>
+          <p:cNvPr id="15" name="TextBox 14"/>
+          <p:cNvSpPr txBox="1"/>
+          <p:nvPr/>
+        </p:nvSpPr>
+        <p:spPr>
+          <a:xfrm>
+            <a:off x="3566160" y="3703320"/>
+            <a:ext cx="1280160" cy="274320"/>
+          </a:xfrm>
+          <a:prstGeom prst="rect">
+            <a:avLst/>
+          </a:prstGeom>
+          <a:noFill/>
+        </p:spPr>
+        <p:txBody>
+          <a:bodyPr wrap="square" anchor="t" lIns="0" rIns="0" tIns="0" bIns="0">
+            <a:spAutoFit/>
+          </a:bodyPr>
+          <a:lstStyle/>
+          <a:p>
+            <a:pPr algn="r"/>
+            <a:r>
+              <a:rPr sz="1150" b="1" i="0">
+                <a:solidFill>
+                  <a:srgbClr val="38BDF8"/>
+                </a:solidFill>
+                <a:latin typeface="Calibri"/>
+              </a:rPr>
+              <a:t>₹45,000</a:t>
+            </a:r>
+          </a:p>
+        </p:txBody>
+      </p:sp>
+      <p:sp>
+        <p:nvSpPr>
+          <p:cNvPr id="16" name="TextBox 15"/>
+          <p:cNvSpPr txBox="1"/>
+          <p:nvPr/>
+        </p:nvSpPr>
+        <p:spPr>
+          <a:xfrm>
+            <a:off x="868680" y="3959352"/>
+            <a:ext cx="4846320" cy="274320"/>
+          </a:xfrm>
+          <a:prstGeom prst="rect">
+            <a:avLst/>
+          </a:prstGeom>
+          <a:noFill/>
+        </p:spPr>
+        <p:txBody>
+          <a:bodyPr wrap="square" anchor="t" lIns="0" rIns="0" tIns="0" bIns="0">
+            <a:spAutoFit/>
+          </a:bodyPr>
+          <a:lstStyle/>
+          <a:p>
+            <a:pPr algn="l"/>
+            <a:r>
+              <a:rPr sz="900" b="0" i="0">
+                <a:solidFill>
+                  <a:srgbClr val="94A3B8"/>
+                </a:solidFill>
+                <a:latin typeface="Calibri"/>
+              </a:rPr>
+              <a:t>we have spent ₹45k so far</a:t>
+            </a:r>
+          </a:p>
+        </p:txBody>
+      </p:sp>
+      <p:sp>
+        <p:nvSpPr>
+          <p:cNvPr id="17" name="Rounded Rectangle 16"/>
+          <p:cNvSpPr/>
+          <p:nvPr/>
+        </p:nvSpPr>
+        <p:spPr>
+          <a:xfrm>
+            <a:off x="6263640" y="2194560"/>
+            <a:ext cx="5303520" cy="2011680"/>
+          </a:xfrm>
+          <a:prstGeom prst="roundRect">
+            <a:avLst>
+              <a:gd name="adj" fmla="val 6000"/>
+            </a:avLst>
+          </a:prstGeom>
+          <a:solidFill>
+            <a:srgbClr val="162033"/>
+          </a:solidFill>
+          <a:ln w="12700">
+            <a:solidFill>
+              <a:srgbClr val="334155"/>
+            </a:solidFill>
+          </a:ln>
+          <a:effectLst/>
+        </p:spPr>
+        <p:style>
+          <a:lnRef idx="1">
+            <a:schemeClr val="accent1"/>
+          </a:lnRef>
+          <a:fillRef idx="3">
+            <a:schemeClr val="accent1"/>
+          </a:fillRef>
+          <a:effectRef idx="2">
+            <a:schemeClr val="accent1"/>
+          </a:effectRef>
+          <a:fontRef idx="minor">
+            <a:schemeClr val="lt1"/>
+          </a:fontRef>
+        </p:style>
+        <p:txBody>
+          <a:bodyPr rtlCol="0" anchor="ctr"/>
+          <a:lstStyle/>
+          <a:p>
+            <a:pPr algn="ctr"/>
+          </a:p>
+        </p:txBody>
+      </p:sp>
+      <p:sp>
+        <p:nvSpPr>
+          <p:cNvPr id="18" name="TextBox 17"/>
+          <p:cNvSpPr txBox="1"/>
+          <p:nvPr/>
+        </p:nvSpPr>
+        <p:spPr>
+          <a:xfrm>
+            <a:off x="6492240" y="2331720"/>
+            <a:ext cx="4846320" cy="320040"/>
+          </a:xfrm>
+          <a:prstGeom prst="rect">
+            <a:avLst/>
+          </a:prstGeom>
+          <a:noFill/>
+        </p:spPr>
+        <p:txBody>
+          <a:bodyPr wrap="square" anchor="t" lIns="0" rIns="0" tIns="0" bIns="0">
+            <a:spAutoFit/>
+          </a:bodyPr>
+          <a:lstStyle/>
+          <a:p>
+            <a:pPr algn="l"/>
+            <a:r>
+              <a:rPr sz="1100" b="1" i="0" spc="100">
+                <a:solidFill>
+                  <a:srgbClr val="22C55E"/>
+                </a:solidFill>
+                <a:latin typeface="Calibri"/>
+              </a:rPr>
+              <a:t>THE INTERPRETATION</a:t>
+            </a:r>
+          </a:p>
+        </p:txBody>
+      </p:sp>
+      <p:sp>
+        <p:nvSpPr>
+          <p:cNvPr id="19" name="TextBox 18"/>
+          <p:cNvSpPr txBox="1"/>
+          <p:nvPr/>
+        </p:nvSpPr>
+        <p:spPr>
+          <a:xfrm>
+            <a:off x="6492240" y="2697480"/>
+            <a:ext cx="4846320" cy="1463040"/>
+          </a:xfrm>
+          <a:prstGeom prst="rect">
+            <a:avLst/>
+          </a:prstGeom>
+          <a:noFill/>
+        </p:spPr>
+        <p:txBody>
+          <a:bodyPr wrap="square" anchor="t" lIns="0" rIns="0" tIns="0" bIns="0">
+            <a:spAutoFit/>
+          </a:bodyPr>
+          <a:lstStyle/>
+          <a:p>
+            <a:pPr algn="l"/>
+            <a:r>
+              <a:rPr sz="1150" b="0" i="0">
+                <a:solidFill>
+                  <a:srgbClr val="E2E8F0"/>
+                </a:solidFill>
+                <a:latin typeface="Calibri"/>
+              </a:rPr>
+              <a:t>CPI = 40,000 / 45,000 = 0.89  →  over budget
+SPI = 40,000 / 50,000 = 0.80  →  behind schedule
+SV  = 40,000 − 50,000 = −10,000  →  ₹10k of work behind
+EAC = 100,000 / 0.89 ≈ ₹112,000  →  forecast overrun</a:t>
+            </a:r>
+          </a:p>
+        </p:txBody>
+      </p:sp>
+      <p:sp>
+        <p:nvSpPr>
+          <p:cNvPr id="20" name="Rounded Rectangle 19"/>
+          <p:cNvSpPr/>
+          <p:nvPr/>
+        </p:nvSpPr>
+        <p:spPr>
+          <a:xfrm>
+            <a:off x="640080" y="4434840"/>
+            <a:ext cx="10927080" cy="1234440"/>
+          </a:xfrm>
+          <a:prstGeom prst="roundRect">
+            <a:avLst>
+              <a:gd name="adj" fmla="val 8000"/>
+            </a:avLst>
+          </a:prstGeom>
+          <a:solidFill>
+            <a:srgbClr val="1E293B"/>
+          </a:solidFill>
+          <a:ln w="12700">
+            <a:solidFill>
+              <a:srgbClr val="F59E0B"/>
+            </a:solidFill>
+          </a:ln>
+          <a:effectLst/>
+        </p:spPr>
+        <p:style>
+          <a:lnRef idx="1">
+            <a:schemeClr val="accent1"/>
+          </a:lnRef>
+          <a:fillRef idx="3">
+            <a:schemeClr val="accent1"/>
+          </a:fillRef>
+          <a:effectRef idx="2">
+            <a:schemeClr val="accent1"/>
+          </a:effectRef>
+          <a:fontRef idx="minor">
+            <a:schemeClr val="lt1"/>
+          </a:fontRef>
+        </p:style>
+        <p:txBody>
+          <a:bodyPr rtlCol="0" anchor="ctr"/>
+          <a:lstStyle/>
+          <a:p>
+            <a:pPr algn="ctr"/>
+          </a:p>
+        </p:txBody>
+      </p:sp>
+      <p:sp>
+        <p:nvSpPr>
+          <p:cNvPr id="21" name="TextBox 20"/>
+          <p:cNvSpPr txBox="1"/>
+          <p:nvPr/>
+        </p:nvSpPr>
+        <p:spPr>
+          <a:xfrm>
+            <a:off x="868680" y="4572000"/>
+            <a:ext cx="10424160" cy="320040"/>
+          </a:xfrm>
+          <a:prstGeom prst="rect">
+            <a:avLst/>
+          </a:prstGeom>
+          <a:noFill/>
+        </p:spPr>
+        <p:txBody>
+          <a:bodyPr wrap="square" anchor="t" lIns="0" rIns="0" tIns="0" bIns="0">
+            <a:spAutoFit/>
+          </a:bodyPr>
+          <a:lstStyle/>
+          <a:p>
+            <a:pPr algn="l"/>
+            <a:r>
+              <a:rPr sz="1100" b="1" i="0" spc="100">
+                <a:solidFill>
+                  <a:srgbClr val="F59E0B"/>
+                </a:solidFill>
+                <a:latin typeface="Calibri"/>
+              </a:rPr>
+              <a:t>WHAT A MANAGER SEES</a:t>
+            </a:r>
+          </a:p>
+        </p:txBody>
+      </p:sp>
+      <p:sp>
+        <p:nvSpPr>
+          <p:cNvPr id="22" name="TextBox 21"/>
+          <p:cNvSpPr txBox="1"/>
+          <p:nvPr/>
+        </p:nvSpPr>
+        <p:spPr>
+          <a:xfrm>
+            <a:off x="868680" y="4892040"/>
+            <a:ext cx="10424160" cy="685800"/>
+          </a:xfrm>
+          <a:prstGeom prst="rect">
+            <a:avLst/>
+          </a:prstGeom>
+          <a:noFill/>
+        </p:spPr>
+        <p:txBody>
+          <a:bodyPr wrap="square" anchor="t" lIns="0" rIns="0" tIns="0" bIns="0">
+            <a:spAutoFit/>
+          </a:bodyPr>
+          <a:lstStyle/>
+          <a:p>
+            <a:pPr algn="l"/>
+            <a:r>
+              <a:rPr sz="1200" b="0" i="0">
+                <a:solidFill>
+                  <a:srgbClr val="E2E8F0"/>
+                </a:solidFill>
+                <a:latin typeface="Calibri"/>
+              </a:rPr>
+              <a:t>Two red flags on one activity: cost is trending ~12% over, and work is ~20% behind. The platform surfaces exactly this, per activity and rolled up per project.</a:t>
+            </a:r>
+          </a:p>
+        </p:txBody>
+      </p:sp>
+      <p:sp>
+        <p:nvSpPr>
+          <p:cNvPr id="23" name="TextBox 22"/>
+          <p:cNvSpPr txBox="1"/>
+          <p:nvPr/>
+        </p:nvSpPr>
+        <p:spPr>
+          <a:xfrm>
+            <a:off x="640080" y="5852160"/>
+            <a:ext cx="10881360" cy="365760"/>
+          </a:xfrm>
+          <a:prstGeom prst="rect">
+            <a:avLst/>
+          </a:prstGeom>
+          <a:noFill/>
+        </p:spPr>
+        <p:txBody>
+          <a:bodyPr wrap="square" anchor="t" lIns="0" rIns="0" tIns="0" bIns="0">
+            <a:spAutoFit/>
+          </a:bodyPr>
+          <a:lstStyle/>
+          <a:p>
+            <a:pPr algn="l"/>
+            <a:r>
+              <a:rPr sz="1100" b="0" i="1">
+                <a:solidFill>
+                  <a:srgbClr val="94A3B8"/>
+                </a:solidFill>
+                <a:latin typeface="Calibri"/>
+              </a:rPr>
+              <a:t>This is the manual arithmetic the platform automates for every activity, every time data changes.</a:t>
+            </a:r>
+          </a:p>
+        </p:txBody>
+      </p:sp>
+      <p:sp>
+        <p:nvSpPr>
+          <p:cNvPr id="24" name="TextBox 23"/>
+          <p:cNvSpPr txBox="1"/>
+          <p:nvPr/>
+        </p:nvSpPr>
+        <p:spPr>
+          <a:xfrm>
+            <a:off x="640080" y="6419088"/>
+            <a:ext cx="6400800" cy="274320"/>
+          </a:xfrm>
+          <a:prstGeom prst="rect">
+            <a:avLst/>
+          </a:prstGeom>
+          <a:noFill/>
+        </p:spPr>
+        <p:txBody>
+          <a:bodyPr wrap="square" anchor="t" lIns="0" rIns="0" tIns="0" bIns="0">
+            <a:spAutoFit/>
+          </a:bodyPr>
+          <a:lstStyle/>
+          <a:p>
+            <a:pPr algn="l"/>
+            <a:r>
+              <a:rPr sz="900" b="0" i="0">
+                <a:solidFill>
+                  <a:srgbClr val="94A3B8"/>
+                </a:solidFill>
+                <a:latin typeface="Calibri"/>
+              </a:rPr>
+              <a:t>CCPIP — Final-Year Project</a:t>
+            </a:r>
+          </a:p>
+        </p:txBody>
+      </p:sp>
+      <p:sp>
+        <p:nvSpPr>
+          <p:cNvPr id="25" name="TextBox 24"/>
+          <p:cNvSpPr txBox="1"/>
+          <p:nvPr/>
+        </p:nvSpPr>
+        <p:spPr>
+          <a:xfrm>
+            <a:off x="10881360" y="6419088"/>
+            <a:ext cx="731520" cy="274320"/>
+          </a:xfrm>
+          <a:prstGeom prst="rect">
+            <a:avLst/>
+          </a:prstGeom>
+          <a:noFill/>
+        </p:spPr>
+        <p:txBody>
+          <a:bodyPr wrap="square" anchor="t" lIns="0" rIns="0" tIns="0" bIns="0">
+            <a:spAutoFit/>
+          </a:bodyPr>
+          <a:lstStyle/>
+          <a:p>
+            <a:pPr algn="r"/>
+            <a:r>
+              <a:rPr sz="900">
+                <a:solidFill>
+                  <a:srgbClr val="94A3B8"/>
+                </a:solidFill>
+                <a:latin typeface="Calibri"/>
+              </a:rPr>
+              <a:t>17</a:t>
+            </a:r>
+          </a:p>
+        </p:txBody>
+      </p:sp>
+    </p:spTree>
+  </p:cSld>
+  <p:clrMapOvr>
+    <a:masterClrMapping/>
+  </p:clrMapOvr>
+</p:sld>
+</file>
+
+<file path=ppt/slides/slide31.xml><?xml version="1.0" encoding="utf-8"?>
+<p:sld xmlns:a="http://schemas.openxmlformats.org/drawingml/2006/main" xmlns:p="http://schemas.openxmlformats.org/presentationml/2006/main" xmlns:r="http://schemas.openxmlformats.org/officeDocument/2006/relationships">
+  <p:cSld>
+    <p:bg>
+      <p:bgPr>
+        <a:solidFill>
+          <a:srgbClr val="0F172A"/>
+        </a:solidFill>
+        <a:effectLst/>
+      </p:bgPr>
+    </p:bg>
+    <p:spTree>
+      <p:nvGrpSpPr>
+        <p:cNvPr id="1" name=""/>
+        <p:cNvGrpSpPr/>
+        <p:nvPr/>
+      </p:nvGrpSpPr>
+      <p:grpSpPr/>
+      <p:sp>
+        <p:nvSpPr>
+          <p:cNvPr id="2" name="TextBox 1"/>
+          <p:cNvSpPr txBox="1"/>
+          <p:nvPr/>
+        </p:nvSpPr>
+        <p:spPr>
+          <a:xfrm>
+            <a:off x="640080" y="438912"/>
+            <a:ext cx="10972800" cy="310896"/>
+          </a:xfrm>
+          <a:prstGeom prst="rect">
+            <a:avLst/>
+          </a:prstGeom>
+          <a:noFill/>
+        </p:spPr>
+        <p:txBody>
+          <a:bodyPr wrap="square" anchor="t" lIns="0" rIns="0" tIns="0" bIns="0">
+            <a:spAutoFit/>
+          </a:bodyPr>
+          <a:lstStyle/>
+          <a:p>
+            <a:pPr algn="l"/>
+            <a:r>
+              <a:rPr sz="1200" b="1" i="0" spc="150">
+                <a:solidFill>
+                  <a:srgbClr val="38BDF8"/>
+                </a:solidFill>
+                <a:latin typeface="Calibri"/>
+              </a:rPr>
+              <a:t>09 — LIMITATIONS</a:t>
+            </a:r>
+          </a:p>
+        </p:txBody>
+      </p:sp>
+      <p:sp>
+        <p:nvSpPr>
+          <p:cNvPr id="3" name="TextBox 2"/>
+          <p:cNvSpPr txBox="1"/>
+          <p:nvPr/>
+        </p:nvSpPr>
+        <p:spPr>
+          <a:xfrm>
+            <a:off x="640080" y="749808"/>
+            <a:ext cx="10972800" cy="731520"/>
+          </a:xfrm>
+          <a:prstGeom prst="rect">
+            <a:avLst/>
+          </a:prstGeom>
+          <a:noFill/>
+        </p:spPr>
+        <p:txBody>
+          <a:bodyPr wrap="square" anchor="t" lIns="0" rIns="0" tIns="0" bIns="0">
+            <a:spAutoFit/>
+          </a:bodyPr>
+          <a:lstStyle/>
+          <a:p>
+            <a:pPr algn="l"/>
+            <a:r>
+              <a:rPr sz="2900" b="1" i="0">
+                <a:solidFill>
+                  <a:srgbClr val="FFFFFF"/>
+                </a:solidFill>
+                <a:latin typeface="Calibri"/>
+              </a:rPr>
+              <a:t>Honest Boundaries of the Work</a:t>
+            </a:r>
+          </a:p>
+        </p:txBody>
+      </p:sp>
+      <p:sp>
+        <p:nvSpPr>
+          <p:cNvPr id="4" name="Rectangle 3"/>
+          <p:cNvSpPr/>
+          <p:nvPr/>
+        </p:nvSpPr>
+        <p:spPr>
+          <a:xfrm>
+            <a:off x="658368" y="1481328"/>
+            <a:ext cx="1051560" cy="54864"/>
+          </a:xfrm>
+          <a:prstGeom prst="rect">
+            <a:avLst/>
+          </a:prstGeom>
+          <a:solidFill>
+            <a:srgbClr val="38BDF8"/>
+          </a:solidFill>
+          <a:ln>
+            <a:noFill/>
+          </a:ln>
+          <a:effectLst/>
+        </p:spPr>
+        <p:style>
+          <a:lnRef idx="1">
+            <a:schemeClr val="accent1"/>
+          </a:lnRef>
+          <a:fillRef idx="3">
+            <a:schemeClr val="accent1"/>
+          </a:fillRef>
+          <a:effectRef idx="2">
+            <a:schemeClr val="accent1"/>
+          </a:effectRef>
+          <a:fontRef idx="minor">
+            <a:schemeClr val="lt1"/>
+          </a:fontRef>
+        </p:style>
+        <p:txBody>
+          <a:bodyPr rtlCol="0" anchor="ctr"/>
+          <a:lstStyle/>
+          <a:p>
+            <a:pPr algn="ctr"/>
+          </a:p>
+        </p:txBody>
+      </p:sp>
+      <p:sp>
+        <p:nvSpPr>
+          <p:cNvPr id="5" name="Rounded Rectangle 4"/>
+          <p:cNvSpPr/>
+          <p:nvPr/>
+        </p:nvSpPr>
+        <p:spPr>
+          <a:xfrm>
+            <a:off x="640080" y="1783080"/>
+            <a:ext cx="5349240" cy="1234440"/>
+          </a:xfrm>
+          <a:prstGeom prst="roundRect">
+            <a:avLst>
+              <a:gd name="adj" fmla="val 8000"/>
+            </a:avLst>
+          </a:prstGeom>
+          <a:solidFill>
+            <a:srgbClr val="1E293B"/>
+          </a:solidFill>
+          <a:ln w="12700">
+            <a:solidFill>
+              <a:srgbClr val="334155"/>
+            </a:solidFill>
+          </a:ln>
+          <a:effectLst/>
+        </p:spPr>
+        <p:style>
+          <a:lnRef idx="1">
+            <a:schemeClr val="accent1"/>
+          </a:lnRef>
+          <a:fillRef idx="3">
+            <a:schemeClr val="accent1"/>
+          </a:fillRef>
+          <a:effectRef idx="2">
+            <a:schemeClr val="accent1"/>
+          </a:effectRef>
+          <a:fontRef idx="minor">
+            <a:schemeClr val="lt1"/>
+          </a:fontRef>
+        </p:style>
+        <p:txBody>
+          <a:bodyPr rtlCol="0" anchor="ctr"/>
+          <a:lstStyle/>
+          <a:p>
+            <a:pPr algn="ctr"/>
+          </a:p>
+        </p:txBody>
+      </p:sp>
+      <p:sp>
+        <p:nvSpPr>
+          <p:cNvPr id="6" name="TextBox 5"/>
+          <p:cNvSpPr txBox="1"/>
+          <p:nvPr/>
+        </p:nvSpPr>
+        <p:spPr>
+          <a:xfrm>
+            <a:off x="841247" y="1920240"/>
+            <a:ext cx="4937760" cy="320040"/>
+          </a:xfrm>
+          <a:prstGeom prst="rect">
+            <a:avLst/>
+          </a:prstGeom>
+          <a:noFill/>
+        </p:spPr>
+        <p:txBody>
+          <a:bodyPr wrap="square" anchor="t" lIns="0" rIns="0" tIns="0" bIns="0">
+            <a:spAutoFit/>
+          </a:bodyPr>
+          <a:lstStyle/>
+          <a:p>
+            <a:pPr algn="l"/>
+            <a:r>
+              <a:rPr sz="1300" b="1" i="0">
+                <a:solidFill>
+                  <a:srgbClr val="F59E0B"/>
+                </a:solidFill>
+                <a:latin typeface="Calibri"/>
+              </a:rPr>
+              <a:t>Synthetic dataset</a:t>
+            </a:r>
+          </a:p>
+        </p:txBody>
+      </p:sp>
+      <p:sp>
+        <p:nvSpPr>
+          <p:cNvPr id="7" name="TextBox 6"/>
+          <p:cNvSpPr txBox="1"/>
+          <p:nvPr/>
+        </p:nvSpPr>
+        <p:spPr>
+          <a:xfrm>
+            <a:off x="841247" y="2258568"/>
+            <a:ext cx="4937760" cy="685800"/>
+          </a:xfrm>
+          <a:prstGeom prst="rect">
+            <a:avLst/>
+          </a:prstGeom>
+          <a:noFill/>
+        </p:spPr>
+        <p:txBody>
+          <a:bodyPr wrap="square" anchor="t" lIns="0" rIns="0" tIns="0" bIns="0">
+            <a:spAutoFit/>
+          </a:bodyPr>
+          <a:lstStyle/>
+          <a:p>
+            <a:pPr algn="l"/>
+            <a:r>
+              <a:rPr sz="1000" b="0" i="0">
+                <a:solidFill>
+                  <a:srgbClr val="94A3B8"/>
+                </a:solidFill>
+                <a:latin typeface="Calibri"/>
+              </a:rPr>
+              <a:t>The bundled data is generated, not real. It has realistic structure and a valid delay label, but real megaprojects may need model recalibration.</a:t>
+            </a:r>
+          </a:p>
+        </p:txBody>
+      </p:sp>
+      <p:sp>
+        <p:nvSpPr>
+          <p:cNvPr id="8" name="Rounded Rectangle 7"/>
+          <p:cNvSpPr/>
+          <p:nvPr/>
+        </p:nvSpPr>
+        <p:spPr>
+          <a:xfrm>
+            <a:off x="6263640" y="1783080"/>
+            <a:ext cx="5349240" cy="1234440"/>
+          </a:xfrm>
+          <a:prstGeom prst="roundRect">
+            <a:avLst>
+              <a:gd name="adj" fmla="val 8000"/>
+            </a:avLst>
+          </a:prstGeom>
+          <a:solidFill>
+            <a:srgbClr val="1E293B"/>
+          </a:solidFill>
+          <a:ln w="12700">
+            <a:solidFill>
+              <a:srgbClr val="334155"/>
+            </a:solidFill>
+          </a:ln>
+          <a:effectLst/>
+        </p:spPr>
+        <p:style>
+          <a:lnRef idx="1">
+            <a:schemeClr val="accent1"/>
+          </a:lnRef>
+          <a:fillRef idx="3">
+            <a:schemeClr val="accent1"/>
+          </a:fillRef>
+          <a:effectRef idx="2">
+            <a:schemeClr val="accent1"/>
+          </a:effectRef>
+          <a:fontRef idx="minor">
+            <a:schemeClr val="lt1"/>
+          </a:fontRef>
+        </p:style>
+        <p:txBody>
+          <a:bodyPr rtlCol="0" anchor="ctr"/>
+          <a:lstStyle/>
+          <a:p>
+            <a:pPr algn="ctr"/>
+          </a:p>
+        </p:txBody>
+      </p:sp>
+      <p:sp>
+        <p:nvSpPr>
+          <p:cNvPr id="9" name="TextBox 8"/>
+          <p:cNvSpPr txBox="1"/>
+          <p:nvPr/>
+        </p:nvSpPr>
+        <p:spPr>
+          <a:xfrm>
+            <a:off x="6464808" y="1920240"/>
+            <a:ext cx="4937760" cy="320040"/>
+          </a:xfrm>
+          <a:prstGeom prst="rect">
+            <a:avLst/>
+          </a:prstGeom>
+          <a:noFill/>
+        </p:spPr>
+        <p:txBody>
+          <a:bodyPr wrap="square" anchor="t" lIns="0" rIns="0" tIns="0" bIns="0">
+            <a:spAutoFit/>
+          </a:bodyPr>
+          <a:lstStyle/>
+          <a:p>
+            <a:pPr algn="l"/>
+            <a:r>
+              <a:rPr sz="1300" b="1" i="0">
+                <a:solidFill>
+                  <a:srgbClr val="F59E0B"/>
+                </a:solidFill>
+                <a:latin typeface="Calibri"/>
+              </a:rPr>
+              <a:t>Model, not causality</a:t>
+            </a:r>
+          </a:p>
+        </p:txBody>
+      </p:sp>
+      <p:sp>
+        <p:nvSpPr>
+          <p:cNvPr id="10" name="TextBox 9"/>
+          <p:cNvSpPr txBox="1"/>
+          <p:nvPr/>
+        </p:nvSpPr>
+        <p:spPr>
+          <a:xfrm>
+            <a:off x="6464808" y="2258568"/>
+            <a:ext cx="4937760" cy="685800"/>
+          </a:xfrm>
+          <a:prstGeom prst="rect">
+            <a:avLst/>
+          </a:prstGeom>
+          <a:noFill/>
+        </p:spPr>
+        <p:txBody>
+          <a:bodyPr wrap="square" anchor="t" lIns="0" rIns="0" tIns="0" bIns="0">
+            <a:spAutoFit/>
+          </a:bodyPr>
+          <a:lstStyle/>
+          <a:p>
+            <a:pPr algn="l"/>
+            <a:r>
+              <a:rPr sz="1000" b="0" i="0">
+                <a:solidFill>
+                  <a:srgbClr val="94A3B8"/>
+                </a:solidFill>
+                <a:latin typeface="Calibri"/>
+              </a:rPr>
+              <a:t>The classifier predicts delay probability from features; it does not prove why an activity is late.</a:t>
+            </a:r>
+          </a:p>
+        </p:txBody>
+      </p:sp>
+      <p:sp>
+        <p:nvSpPr>
+          <p:cNvPr id="11" name="Rounded Rectangle 10"/>
+          <p:cNvSpPr/>
+          <p:nvPr/>
+        </p:nvSpPr>
+        <p:spPr>
+          <a:xfrm>
+            <a:off x="640080" y="3200400"/>
+            <a:ext cx="5349240" cy="1234440"/>
+          </a:xfrm>
+          <a:prstGeom prst="roundRect">
+            <a:avLst>
+              <a:gd name="adj" fmla="val 8000"/>
+            </a:avLst>
+          </a:prstGeom>
+          <a:solidFill>
+            <a:srgbClr val="1E293B"/>
+          </a:solidFill>
+          <a:ln w="12700">
+            <a:solidFill>
+              <a:srgbClr val="334155"/>
+            </a:solidFill>
+          </a:ln>
+          <a:effectLst/>
+        </p:spPr>
+        <p:style>
+          <a:lnRef idx="1">
+            <a:schemeClr val="accent1"/>
+          </a:lnRef>
+          <a:fillRef idx="3">
+            <a:schemeClr val="accent1"/>
+          </a:fillRef>
+          <a:effectRef idx="2">
+            <a:schemeClr val="accent1"/>
+          </a:effectRef>
+          <a:fontRef idx="minor">
+            <a:schemeClr val="lt1"/>
+          </a:fontRef>
+        </p:style>
+        <p:txBody>
+          <a:bodyPr rtlCol="0" anchor="ctr"/>
+          <a:lstStyle/>
+          <a:p>
+            <a:pPr algn="ctr"/>
+          </a:p>
+        </p:txBody>
+      </p:sp>
+      <p:sp>
+        <p:nvSpPr>
+          <p:cNvPr id="12" name="TextBox 11"/>
+          <p:cNvSpPr txBox="1"/>
+          <p:nvPr/>
+        </p:nvSpPr>
+        <p:spPr>
+          <a:xfrm>
+            <a:off x="841247" y="3337560"/>
+            <a:ext cx="4937760" cy="320040"/>
+          </a:xfrm>
+          <a:prstGeom prst="rect">
+            <a:avLst/>
+          </a:prstGeom>
+          <a:noFill/>
+        </p:spPr>
+        <p:txBody>
+          <a:bodyPr wrap="square" anchor="t" lIns="0" rIns="0" tIns="0" bIns="0">
+            <a:spAutoFit/>
+          </a:bodyPr>
+          <a:lstStyle/>
+          <a:p>
+            <a:pPr algn="l"/>
+            <a:r>
+              <a:rPr sz="1300" b="1" i="0">
+                <a:solidFill>
+                  <a:srgbClr val="F59E0B"/>
+                </a:solidFill>
+                <a:latin typeface="Calibri"/>
+              </a:rPr>
+              <a:t>EVM needs baselines</a:t>
+            </a:r>
+          </a:p>
+        </p:txBody>
+      </p:sp>
+      <p:sp>
+        <p:nvSpPr>
+          <p:cNvPr id="13" name="TextBox 12"/>
+          <p:cNvSpPr txBox="1"/>
+          <p:nvPr/>
+        </p:nvSpPr>
+        <p:spPr>
+          <a:xfrm>
+            <a:off x="841247" y="3675887"/>
+            <a:ext cx="4937760" cy="685800"/>
+          </a:xfrm>
+          <a:prstGeom prst="rect">
+            <a:avLst/>
+          </a:prstGeom>
+          <a:noFill/>
+        </p:spPr>
+        <p:txBody>
+          <a:bodyPr wrap="square" anchor="t" lIns="0" rIns="0" tIns="0" bIns="0">
+            <a:spAutoFit/>
+          </a:bodyPr>
+          <a:lstStyle/>
+          <a:p>
+            <a:pPr algn="l"/>
+            <a:r>
+              <a:rPr sz="1000" b="0" i="0">
+                <a:solidFill>
+                  <a:srgbClr val="94A3B8"/>
+                </a:solidFill>
+                <a:latin typeface="Calibri"/>
+              </a:rPr>
+              <a:t>Genuine EVM requires planned values and budgets. The original source CSVs lacked these — hence the generator.</a:t>
+            </a:r>
+          </a:p>
+        </p:txBody>
+      </p:sp>
+      <p:sp>
+        <p:nvSpPr>
+          <p:cNvPr id="14" name="Rounded Rectangle 13"/>
+          <p:cNvSpPr/>
+          <p:nvPr/>
+        </p:nvSpPr>
+        <p:spPr>
+          <a:xfrm>
+            <a:off x="6263640" y="3200400"/>
+            <a:ext cx="5349240" cy="1234440"/>
+          </a:xfrm>
+          <a:prstGeom prst="roundRect">
+            <a:avLst>
+              <a:gd name="adj" fmla="val 8000"/>
+            </a:avLst>
+          </a:prstGeom>
+          <a:solidFill>
+            <a:srgbClr val="1E293B"/>
+          </a:solidFill>
+          <a:ln w="12700">
+            <a:solidFill>
+              <a:srgbClr val="334155"/>
+            </a:solidFill>
+          </a:ln>
+          <a:effectLst/>
+        </p:spPr>
+        <p:style>
+          <a:lnRef idx="1">
+            <a:schemeClr val="accent1"/>
+          </a:lnRef>
+          <a:fillRef idx="3">
+            <a:schemeClr val="accent1"/>
+          </a:fillRef>
+          <a:effectRef idx="2">
+            <a:schemeClr val="accent1"/>
+          </a:effectRef>
+          <a:fontRef idx="minor">
+            <a:schemeClr val="lt1"/>
+          </a:fontRef>
+        </p:style>
+        <p:txBody>
+          <a:bodyPr rtlCol="0" anchor="ctr"/>
+          <a:lstStyle/>
+          <a:p>
+            <a:pPr algn="ctr"/>
+          </a:p>
+        </p:txBody>
+      </p:sp>
+      <p:sp>
+        <p:nvSpPr>
+          <p:cNvPr id="15" name="TextBox 14"/>
+          <p:cNvSpPr txBox="1"/>
+          <p:nvPr/>
+        </p:nvSpPr>
+        <p:spPr>
+          <a:xfrm>
+            <a:off x="6464808" y="3337560"/>
+            <a:ext cx="4937760" cy="320040"/>
+          </a:xfrm>
+          <a:prstGeom prst="rect">
+            <a:avLst/>
+          </a:prstGeom>
+          <a:noFill/>
+        </p:spPr>
+        <p:txBody>
+          <a:bodyPr wrap="square" anchor="t" lIns="0" rIns="0" tIns="0" bIns="0">
+            <a:spAutoFit/>
+          </a:bodyPr>
+          <a:lstStyle/>
+          <a:p>
+            <a:pPr algn="l"/>
+            <a:r>
+              <a:rPr sz="1300" b="1" i="0">
+                <a:solidFill>
+                  <a:srgbClr val="F59E0B"/>
+                </a:solidFill>
+                <a:latin typeface="Calibri"/>
+              </a:rPr>
+              <a:t>Single-node scope</a:t>
+            </a:r>
+          </a:p>
+        </p:txBody>
+      </p:sp>
+      <p:sp>
+        <p:nvSpPr>
+          <p:cNvPr id="16" name="TextBox 15"/>
+          <p:cNvSpPr txBox="1"/>
+          <p:nvPr/>
+        </p:nvSpPr>
+        <p:spPr>
+          <a:xfrm>
+            <a:off x="6464808" y="3675887"/>
+            <a:ext cx="4937760" cy="685800"/>
+          </a:xfrm>
+          <a:prstGeom prst="rect">
+            <a:avLst/>
+          </a:prstGeom>
+          <a:noFill/>
+        </p:spPr>
+        <p:txBody>
+          <a:bodyPr wrap="square" anchor="t" lIns="0" rIns="0" tIns="0" bIns="0">
+            <a:spAutoFit/>
+          </a:bodyPr>
+          <a:lstStyle/>
+          <a:p>
+            <a:pPr algn="l"/>
+            <a:r>
+              <a:rPr sz="1000" b="0" i="0">
+                <a:solidFill>
+                  <a:srgbClr val="94A3B8"/>
+                </a:solidFill>
+                <a:latin typeface="Calibri"/>
+              </a:rPr>
+              <a:t>Kubernetes was validated on a local (minikube) cluster, not a production multi-node cloud.</a:t>
+            </a:r>
+          </a:p>
+        </p:txBody>
+      </p:sp>
+      <p:sp>
+        <p:nvSpPr>
+          <p:cNvPr id="17" name="Rounded Rectangle 16"/>
+          <p:cNvSpPr/>
+          <p:nvPr/>
+        </p:nvSpPr>
+        <p:spPr>
+          <a:xfrm>
+            <a:off x="640080" y="4617720"/>
+            <a:ext cx="5349240" cy="1234440"/>
+          </a:xfrm>
+          <a:prstGeom prst="roundRect">
+            <a:avLst>
+              <a:gd name="adj" fmla="val 8000"/>
+            </a:avLst>
+          </a:prstGeom>
+          <a:solidFill>
+            <a:srgbClr val="1E293B"/>
+          </a:solidFill>
+          <a:ln w="12700">
+            <a:solidFill>
+              <a:srgbClr val="334155"/>
+            </a:solidFill>
+          </a:ln>
+          <a:effectLst/>
+        </p:spPr>
+        <p:style>
+          <a:lnRef idx="1">
+            <a:schemeClr val="accent1"/>
+          </a:lnRef>
+          <a:fillRef idx="3">
+            <a:schemeClr val="accent1"/>
+          </a:fillRef>
+          <a:effectRef idx="2">
+            <a:schemeClr val="accent1"/>
+          </a:effectRef>
+          <a:fontRef idx="minor">
+            <a:schemeClr val="lt1"/>
+          </a:fontRef>
+        </p:style>
+        <p:txBody>
+          <a:bodyPr rtlCol="0" anchor="ctr"/>
+          <a:lstStyle/>
+          <a:p>
+            <a:pPr algn="ctr"/>
+          </a:p>
+        </p:txBody>
+      </p:sp>
+      <p:sp>
+        <p:nvSpPr>
+          <p:cNvPr id="18" name="TextBox 17"/>
+          <p:cNvSpPr txBox="1"/>
+          <p:nvPr/>
+        </p:nvSpPr>
+        <p:spPr>
+          <a:xfrm>
+            <a:off x="841247" y="4754880"/>
+            <a:ext cx="4937760" cy="320040"/>
+          </a:xfrm>
+          <a:prstGeom prst="rect">
+            <a:avLst/>
+          </a:prstGeom>
+          <a:noFill/>
+        </p:spPr>
+        <p:txBody>
+          <a:bodyPr wrap="square" anchor="t" lIns="0" rIns="0" tIns="0" bIns="0">
+            <a:spAutoFit/>
+          </a:bodyPr>
+          <a:lstStyle/>
+          <a:p>
+            <a:pPr algn="l"/>
+            <a:r>
+              <a:rPr sz="1300" b="1" i="0">
+                <a:solidFill>
+                  <a:srgbClr val="F59E0B"/>
+                </a:solidFill>
+                <a:latin typeface="Calibri"/>
+              </a:rPr>
+              <a:t>No authentication</a:t>
+            </a:r>
+          </a:p>
+        </p:txBody>
+      </p:sp>
+      <p:sp>
+        <p:nvSpPr>
+          <p:cNvPr id="19" name="TextBox 18"/>
+          <p:cNvSpPr txBox="1"/>
+          <p:nvPr/>
+        </p:nvSpPr>
+        <p:spPr>
+          <a:xfrm>
+            <a:off x="841247" y="5093208"/>
+            <a:ext cx="4937760" cy="685800"/>
+          </a:xfrm>
+          <a:prstGeom prst="rect">
+            <a:avLst/>
+          </a:prstGeom>
+          <a:noFill/>
+        </p:spPr>
+        <p:txBody>
+          <a:bodyPr wrap="square" anchor="t" lIns="0" rIns="0" tIns="0" bIns="0">
+            <a:spAutoFit/>
+          </a:bodyPr>
+          <a:lstStyle/>
+          <a:p>
+            <a:pPr algn="l"/>
+            <a:r>
+              <a:rPr sz="1000" b="0" i="0">
+                <a:solidFill>
+                  <a:srgbClr val="94A3B8"/>
+                </a:solidFill>
+                <a:latin typeface="Calibri"/>
+              </a:rPr>
+              <a:t>The web UI is open by design for demonstration; production needs role-based access control.</a:t>
+            </a:r>
+          </a:p>
+        </p:txBody>
+      </p:sp>
+      <p:sp>
+        <p:nvSpPr>
+          <p:cNvPr id="20" name="Rounded Rectangle 19"/>
+          <p:cNvSpPr/>
+          <p:nvPr/>
+        </p:nvSpPr>
+        <p:spPr>
+          <a:xfrm>
+            <a:off x="6263640" y="4617720"/>
+            <a:ext cx="5349240" cy="1234440"/>
+          </a:xfrm>
+          <a:prstGeom prst="roundRect">
+            <a:avLst>
+              <a:gd name="adj" fmla="val 8000"/>
+            </a:avLst>
+          </a:prstGeom>
+          <a:solidFill>
+            <a:srgbClr val="1E293B"/>
+          </a:solidFill>
+          <a:ln w="12700">
+            <a:solidFill>
+              <a:srgbClr val="334155"/>
+            </a:solidFill>
+          </a:ln>
+          <a:effectLst/>
+        </p:spPr>
+        <p:style>
+          <a:lnRef idx="1">
+            <a:schemeClr val="accent1"/>
+          </a:lnRef>
+          <a:fillRef idx="3">
+            <a:schemeClr val="accent1"/>
+          </a:fillRef>
+          <a:effectRef idx="2">
+            <a:schemeClr val="accent1"/>
+          </a:effectRef>
+          <a:fontRef idx="minor">
+            <a:schemeClr val="lt1"/>
+          </a:fontRef>
+        </p:style>
+        <p:txBody>
+          <a:bodyPr rtlCol="0" anchor="ctr"/>
+          <a:lstStyle/>
+          <a:p>
+            <a:pPr algn="ctr"/>
+          </a:p>
+        </p:txBody>
+      </p:sp>
+      <p:sp>
+        <p:nvSpPr>
+          <p:cNvPr id="21" name="TextBox 20"/>
+          <p:cNvSpPr txBox="1"/>
+          <p:nvPr/>
+        </p:nvSpPr>
+        <p:spPr>
+          <a:xfrm>
+            <a:off x="6464808" y="4754880"/>
+            <a:ext cx="4937760" cy="320040"/>
+          </a:xfrm>
+          <a:prstGeom prst="rect">
+            <a:avLst/>
+          </a:prstGeom>
+          <a:noFill/>
+        </p:spPr>
+        <p:txBody>
+          <a:bodyPr wrap="square" anchor="t" lIns="0" rIns="0" tIns="0" bIns="0">
+            <a:spAutoFit/>
+          </a:bodyPr>
+          <a:lstStyle/>
+          <a:p>
+            <a:pPr algn="l"/>
+            <a:r>
+              <a:rPr sz="1300" b="1" i="0">
+                <a:solidFill>
+                  <a:srgbClr val="F59E0B"/>
+                </a:solidFill>
+                <a:latin typeface="Calibri"/>
+              </a:rPr>
+              <a:t>Network dependency</a:t>
+            </a:r>
+          </a:p>
+        </p:txBody>
+      </p:sp>
+      <p:sp>
+        <p:nvSpPr>
+          <p:cNvPr id="22" name="TextBox 21"/>
+          <p:cNvSpPr txBox="1"/>
+          <p:nvPr/>
+        </p:nvSpPr>
+        <p:spPr>
+          <a:xfrm>
+            <a:off x="6464808" y="5093208"/>
+            <a:ext cx="4937760" cy="685800"/>
+          </a:xfrm>
+          <a:prstGeom prst="rect">
+            <a:avLst/>
+          </a:prstGeom>
+          <a:noFill/>
+        </p:spPr>
+        <p:txBody>
+          <a:bodyPr wrap="square" anchor="t" lIns="0" rIns="0" tIns="0" bIns="0">
+            <a:spAutoFit/>
+          </a:bodyPr>
+          <a:lstStyle/>
+          <a:p>
+            <a:pPr algn="l"/>
+            <a:r>
+              <a:rPr sz="1000" b="0" i="0">
+                <a:solidFill>
+                  <a:srgbClr val="94A3B8"/>
+                </a:solidFill>
+                <a:latin typeface="Calibri"/>
+              </a:rPr>
+              <a:t>Live sync assumes connectivity; remote sites would need offline queuing.</a:t>
+            </a:r>
+          </a:p>
+        </p:txBody>
+      </p:sp>
+      <p:sp>
+        <p:nvSpPr>
+          <p:cNvPr id="23" name="TextBox 22"/>
+          <p:cNvSpPr txBox="1"/>
+          <p:nvPr/>
+        </p:nvSpPr>
+        <p:spPr>
+          <a:xfrm>
+            <a:off x="640080" y="6419088"/>
+            <a:ext cx="6400800" cy="274320"/>
+          </a:xfrm>
+          <a:prstGeom prst="rect">
+            <a:avLst/>
+          </a:prstGeom>
+          <a:noFill/>
+        </p:spPr>
+        <p:txBody>
+          <a:bodyPr wrap="square" anchor="t" lIns="0" rIns="0" tIns="0" bIns="0">
+            <a:spAutoFit/>
+          </a:bodyPr>
+          <a:lstStyle/>
+          <a:p>
+            <a:pPr algn="l"/>
+            <a:r>
+              <a:rPr sz="900" b="0" i="0">
+                <a:solidFill>
+                  <a:srgbClr val="94A3B8"/>
+                </a:solidFill>
+                <a:latin typeface="Calibri"/>
+              </a:rPr>
+              <a:t>CCPIP — Final-Year Project</a:t>
+            </a:r>
+          </a:p>
+        </p:txBody>
+      </p:sp>
+      <p:sp>
+        <p:nvSpPr>
+          <p:cNvPr id="24" name="TextBox 23"/>
+          <p:cNvSpPr txBox="1"/>
+          <p:nvPr/>
+        </p:nvSpPr>
+        <p:spPr>
+          <a:xfrm>
+            <a:off x="10881360" y="6419088"/>
+            <a:ext cx="731520" cy="274320"/>
+          </a:xfrm>
+          <a:prstGeom prst="rect">
+            <a:avLst/>
+          </a:prstGeom>
+          <a:noFill/>
+        </p:spPr>
+        <p:txBody>
+          <a:bodyPr wrap="square" anchor="t" lIns="0" rIns="0" tIns="0" bIns="0">
+            <a:spAutoFit/>
+          </a:bodyPr>
+          <a:lstStyle/>
+          <a:p>
+            <a:pPr algn="r"/>
+            <a:r>
+              <a:rPr sz="900">
+                <a:solidFill>
+                  <a:srgbClr val="94A3B8"/>
+                </a:solidFill>
+                <a:latin typeface="Calibri"/>
+              </a:rPr>
+              <a:t>29</a:t>
             </a:r>
           </a:p>
         </p:txBody>
@@ -24083,13 +30818,13 @@
           <a:p>
             <a:pPr algn="r"/>
             <a:r>
-              <a:rPr sz="900" b="0" i="0">
+              <a:rPr sz="900">
                 <a:solidFill>
                   <a:srgbClr val="94A3B8"/>
                 </a:solidFill>
                 <a:latin typeface="Calibri"/>
               </a:rPr>
-              <a:t>04</a:t>
+              <a:t>06</a:t>
             </a:r>
           </a:p>
         </p:txBody>
@@ -24862,13 +31597,13 @@
           <a:p>
             <a:pPr algn="r"/>
             <a:r>
-              <a:rPr sz="900" b="0" i="0">
+              <a:rPr sz="900">
                 <a:solidFill>
                   <a:srgbClr val="94A3B8"/>
                 </a:solidFill>
                 <a:latin typeface="Calibri"/>
               </a:rPr>
-              <a:t>05</a:t>
+              <a:t>07</a:t>
             </a:r>
           </a:p>
         </p:txBody>
@@ -25495,13 +32230,13 @@
           <a:p>
             <a:pPr algn="r"/>
             <a:r>
-              <a:rPr sz="900" b="0" i="0">
+              <a:rPr sz="900">
                 <a:solidFill>
                   <a:srgbClr val="94A3B8"/>
                 </a:solidFill>
                 <a:latin typeface="Calibri"/>
               </a:rPr>
-              <a:t>06</a:t>
+              <a:t>08</a:t>
             </a:r>
           </a:p>
         </p:txBody>
@@ -26128,13 +32863,13 @@
           <a:p>
             <a:pPr algn="r"/>
             <a:r>
-              <a:rPr sz="900" b="0" i="0">
+              <a:rPr sz="900">
                 <a:solidFill>
                   <a:srgbClr val="94A3B8"/>
                 </a:solidFill>
                 <a:latin typeface="Calibri"/>
               </a:rPr>
-              <a:t>07</a:t>
+              <a:t>09</a:t>
             </a:r>
           </a:p>
         </p:txBody>
@@ -26942,13 +33677,13 @@
           <a:p>
             <a:pPr algn="r"/>
             <a:r>
-              <a:rPr sz="900" b="0" i="0">
+              <a:rPr sz="900">
                 <a:solidFill>
                   <a:srgbClr val="94A3B8"/>
                 </a:solidFill>
                 <a:latin typeface="Calibri"/>
               </a:rPr>
-              <a:t>08</a:t>
+              <a:t>10</a:t>
             </a:r>
           </a:p>
         </p:txBody>
@@ -28223,13 +34958,13 @@
           <a:p>
             <a:pPr algn="r"/>
             <a:r>
-              <a:rPr sz="900" b="0" i="0">
+              <a:rPr sz="900">
                 <a:solidFill>
                   <a:srgbClr val="94A3B8"/>
                 </a:solidFill>
                 <a:latin typeface="Calibri"/>
               </a:rPr>
-              <a:t>09</a:t>
+              <a:t>11</a:t>
             </a:r>
           </a:p>
         </p:txBody>
@@ -28560,4 +35295,324 @@
   </a:objectDefaults>
   <a:extraClrSchemeLst/>
 </a:theme>
+</file>
+
+<file path=ppt/theme/theme2.xml><?xml version="1.0" encoding="utf-8"?>
+<a:theme xmlns:a="http://schemas.openxmlformats.org/drawingml/2006/main" name="Office Theme">
+  <a:themeElements>
+    <a:clrScheme name="Office">
+      <a:dk1>
+        <a:sysClr val="windowText" lastClr="000000"/>
+      </a:dk1>
+      <a:lt1>
+        <a:sysClr val="window" lastClr="FFFFFF"/>
+      </a:lt1>
+      <a:dk2>
+        <a:srgbClr val="1F497D"/>
+      </a:dk2>
+      <a:lt2>
+        <a:srgbClr val="EEECE1"/>
+      </a:lt2>
+      <a:accent1>
+        <a:srgbClr val="4F81BD"/>
+      </a:accent1>
+      <a:accent2>
+        <a:srgbClr val="C0504D"/>
+      </a:accent2>
+      <a:accent3>
+        <a:srgbClr val="9BBB59"/>
+      </a:accent3>
+      <a:accent4>
+        <a:srgbClr val="8064A2"/>
+      </a:accent4>
+      <a:accent5>
+        <a:srgbClr val="4BACC6"/>
+      </a:accent5>
+      <a:accent6>
+        <a:srgbClr val="F79646"/>
+      </a:accent6>
+      <a:hlink>
+        <a:srgbClr val="0000FF"/>
+      </a:hlink>
+      <a:folHlink>
+        <a:srgbClr val="800080"/>
+      </a:folHlink>
+    </a:clrScheme>
+    <a:fontScheme name="Office">
+      <a:majorFont>
+        <a:latin typeface="Calibri"/>
+        <a:ea typeface=""/>
+        <a:cs typeface=""/>
+        <a:font script="Jpan" typeface="ＭＳ Ｐゴシック"/>
+        <a:font script="Hang" typeface="맑은 고딕"/>
+        <a:font script="Hans" typeface="宋体"/>
+        <a:font script="Hant" typeface="新細明體"/>
+        <a:font script="Arab" typeface="Times New Roman"/>
+        <a:font script="Hebr" typeface="Times New Roman"/>
+        <a:font script="Thai" typeface="Angsana New"/>
+        <a:font script="Ethi" typeface="Nyala"/>
+        <a:font script="Beng" typeface="Vrinda"/>
+        <a:font script="Gujr" typeface="Shruti"/>
+        <a:font script="Khmr" typeface="MoolBoran"/>
+        <a:font script="Knda" typeface="Tunga"/>
+        <a:font script="Guru" typeface="Raavi"/>
+        <a:font script="Cans" typeface="Euphemia"/>
+        <a:font script="Cher" typeface="Plantagenet Cherokee"/>
+        <a:font script="Yiii" typeface="Microsoft Yi Baiti"/>
+        <a:font script="Tibt" typeface="Microsoft Himalaya"/>
+        <a:font script="Thaa" typeface="MV Boli"/>
+        <a:font script="Deva" typeface="Mangal"/>
+        <a:font script="Telu" typeface="Gautami"/>
+        <a:font script="Taml" typeface="Latha"/>
+        <a:font script="Syrc" typeface="Estrangelo Edessa"/>
+        <a:font script="Orya" typeface="Kalinga"/>
+        <a:font script="Mlym" typeface="Kartika"/>
+        <a:font script="Laoo" typeface="DokChampa"/>
+        <a:font script="Sinh" typeface="Iskoola Pota"/>
+        <a:font script="Mong" typeface="Mongolian Baiti"/>
+        <a:font script="Viet" typeface="Times New Roman"/>
+        <a:font script="Uigh" typeface="Microsoft Uighur"/>
+        <a:font script="Geor" typeface="Sylfaen"/>
+      </a:majorFont>
+      <a:minorFont>
+        <a:latin typeface="Calibri"/>
+        <a:ea typeface=""/>
+        <a:cs typeface=""/>
+        <a:font script="Jpan" typeface="ＭＳ Ｐゴシック"/>
+        <a:font script="Hang" typeface="맑은 고딕"/>
+        <a:font script="Hans" typeface="宋体"/>
+        <a:font script="Hant" typeface="新細明體"/>
+        <a:font script="Arab" typeface="Arial"/>
+        <a:font script="Hebr" typeface="Arial"/>
+        <a:font script="Thai" typeface="Cordia New"/>
+        <a:font script="Ethi" typeface="Nyala"/>
+        <a:font script="Beng" typeface="Vrinda"/>
+        <a:font script="Gujr" typeface="Shruti"/>
+        <a:font script="Khmr" typeface="DaunPenh"/>
+        <a:font script="Knda" typeface="Tunga"/>
+        <a:font script="Guru" typeface="Raavi"/>
+        <a:font script="Cans" typeface="Euphemia"/>
+        <a:font script="Cher" typeface="Plantagenet Cherokee"/>
+        <a:font script="Yiii" typeface="Microsoft Yi Baiti"/>
+        <a:font script="Tibt" typeface="Microsoft Himalaya"/>
+        <a:font script="Thaa" typeface="MV Boli"/>
+        <a:font script="Deva" typeface="Mangal"/>
+        <a:font script="Telu" typeface="Gautami"/>
+        <a:font script="Taml" typeface="Latha"/>
+        <a:font script="Syrc" typeface="Estrangelo Edessa"/>
+        <a:font script="Orya" typeface="Kalinga"/>
+        <a:font script="Mlym" typeface="Kartika"/>
+        <a:font script="Laoo" typeface="DokChampa"/>
+        <a:font script="Sinh" typeface="Iskoola Pota"/>
+        <a:font script="Mong" typeface="Mongolian Baiti"/>
+        <a:font script="Viet" typeface="Arial"/>
+        <a:font script="Uigh" typeface="Microsoft Uighur"/>
+        <a:font script="Geor" typeface="Sylfaen"/>
+      </a:minorFont>
+    </a:fontScheme>
+    <a:fmtScheme name="Office">
+      <a:fillStyleLst>
+        <a:solidFill>
+          <a:schemeClr val="phClr"/>
+        </a:solidFill>
+        <a:gradFill rotWithShape="1">
+          <a:gsLst>
+            <a:gs pos="0">
+              <a:schemeClr val="phClr">
+                <a:tint val="50000"/>
+                <a:satMod val="300000"/>
+              </a:schemeClr>
+            </a:gs>
+            <a:gs pos="35000">
+              <a:schemeClr val="phClr">
+                <a:tint val="37000"/>
+                <a:satMod val="300000"/>
+              </a:schemeClr>
+            </a:gs>
+            <a:gs pos="100000">
+              <a:schemeClr val="phClr">
+                <a:tint val="15000"/>
+                <a:satMod val="350000"/>
+              </a:schemeClr>
+            </a:gs>
+          </a:gsLst>
+          <a:lin ang="16200000" scaled="1"/>
+        </a:gradFill>
+        <a:gradFill rotWithShape="1">
+          <a:gsLst>
+            <a:gs pos="0">
+              <a:schemeClr val="phClr">
+                <a:tint val="100000"/>
+                <a:shade val="100000"/>
+                <a:satMod val="130000"/>
+              </a:schemeClr>
+            </a:gs>
+            <a:gs pos="100000">
+              <a:schemeClr val="phClr">
+                <a:tint val="50000"/>
+                <a:shade val="100000"/>
+                <a:satMod val="350000"/>
+              </a:schemeClr>
+            </a:gs>
+          </a:gsLst>
+          <a:lin ang="16200000" scaled="0"/>
+        </a:gradFill>
+      </a:fillStyleLst>
+      <a:lnStyleLst>
+        <a:ln w="9525" cap="flat" cmpd="sng" algn="ctr">
+          <a:solidFill>
+            <a:schemeClr val="phClr">
+              <a:shade val="95000"/>
+              <a:satMod val="105000"/>
+            </a:schemeClr>
+          </a:solidFill>
+          <a:prstDash val="solid"/>
+        </a:ln>
+        <a:ln w="25400" cap="flat" cmpd="sng" algn="ctr">
+          <a:solidFill>
+            <a:schemeClr val="phClr"/>
+          </a:solidFill>
+          <a:prstDash val="solid"/>
+        </a:ln>
+        <a:ln w="38100" cap="flat" cmpd="sng" algn="ctr">
+          <a:solidFill>
+            <a:schemeClr val="phClr"/>
+          </a:solidFill>
+          <a:prstDash val="solid"/>
+        </a:ln>
+      </a:lnStyleLst>
+      <a:effectStyleLst>
+        <a:effectStyle>
+          <a:effectLst>
+            <a:outerShdw blurRad="40000" dist="20000" dir="5400000" rotWithShape="0">
+              <a:srgbClr val="000000">
+                <a:alpha val="38000"/>
+              </a:srgbClr>
+            </a:outerShdw>
+          </a:effectLst>
+        </a:effectStyle>
+        <a:effectStyle>
+          <a:effectLst>
+            <a:outerShdw blurRad="40000" dist="23000" dir="5400000" rotWithShape="0">
+              <a:srgbClr val="000000">
+                <a:alpha val="35000"/>
+              </a:srgbClr>
+            </a:outerShdw>
+          </a:effectLst>
+        </a:effectStyle>
+        <a:effectStyle>
+          <a:effectLst>
+            <a:outerShdw blurRad="40000" dist="23000" dir="5400000" rotWithShape="0">
+              <a:srgbClr val="000000">
+                <a:alpha val="35000"/>
+              </a:srgbClr>
+            </a:outerShdw>
+          </a:effectLst>
+          <a:scene3d>
+            <a:camera prst="orthographicFront">
+              <a:rot lat="0" lon="0" rev="0"/>
+            </a:camera>
+            <a:lightRig rig="threePt" dir="t">
+              <a:rot lat="0" lon="0" rev="1200000"/>
+            </a:lightRig>
+          </a:scene3d>
+          <a:sp3d>
+            <a:bevelT w="63500" h="25400"/>
+          </a:sp3d>
+        </a:effectStyle>
+      </a:effectStyleLst>
+      <a:bgFillStyleLst>
+        <a:solidFill>
+          <a:schemeClr val="phClr"/>
+        </a:solidFill>
+        <a:gradFill rotWithShape="1">
+          <a:gsLst>
+            <a:gs pos="0">
+              <a:schemeClr val="phClr">
+                <a:tint val="40000"/>
+                <a:satMod val="350000"/>
+              </a:schemeClr>
+            </a:gs>
+            <a:gs pos="40000">
+              <a:schemeClr val="phClr">
+                <a:tint val="45000"/>
+                <a:shade val="99000"/>
+                <a:satMod val="350000"/>
+              </a:schemeClr>
+            </a:gs>
+            <a:gs pos="100000">
+              <a:schemeClr val="phClr">
+                <a:shade val="20000"/>
+                <a:satMod val="255000"/>
+              </a:schemeClr>
+            </a:gs>
+          </a:gsLst>
+          <a:path path="circle">
+            <a:fillToRect l="50000" t="-80000" r="50000" b="180000"/>
+          </a:path>
+        </a:gradFill>
+        <a:gradFill rotWithShape="1">
+          <a:gsLst>
+            <a:gs pos="0">
+              <a:schemeClr val="phClr">
+                <a:tint val="80000"/>
+                <a:satMod val="300000"/>
+              </a:schemeClr>
+            </a:gs>
+            <a:gs pos="100000">
+              <a:schemeClr val="phClr">
+                <a:shade val="30000"/>
+                <a:satMod val="200000"/>
+              </a:schemeClr>
+            </a:gs>
+          </a:gsLst>
+          <a:path path="circle">
+            <a:fillToRect l="50000" t="50000" r="50000" b="50000"/>
+          </a:path>
+        </a:gradFill>
+      </a:bgFillStyleLst>
+    </a:fmtScheme>
+  </a:themeElements>
+  <a:objectDefaults>
+    <a:spDef>
+      <a:spPr/>
+      <a:bodyPr/>
+      <a:lstStyle/>
+      <a:style>
+        <a:lnRef idx="1">
+          <a:schemeClr val="accent1"/>
+        </a:lnRef>
+        <a:fillRef idx="3">
+          <a:schemeClr val="accent1"/>
+        </a:fillRef>
+        <a:effectRef idx="2">
+          <a:schemeClr val="accent1"/>
+        </a:effectRef>
+        <a:fontRef idx="minor">
+          <a:schemeClr val="lt1"/>
+        </a:fontRef>
+      </a:style>
+    </a:spDef>
+    <a:lnDef>
+      <a:spPr/>
+      <a:bodyPr/>
+      <a:lstStyle/>
+      <a:style>
+        <a:lnRef idx="2">
+          <a:schemeClr val="accent1"/>
+        </a:lnRef>
+        <a:fillRef idx="0">
+          <a:schemeClr val="accent1"/>
+        </a:fillRef>
+        <a:effectRef idx="1">
+          <a:schemeClr val="accent1"/>
+        </a:effectRef>
+        <a:fontRef idx="minor">
+          <a:schemeClr val="tx1"/>
+        </a:fontRef>
+      </a:style>
+    </a:lnDef>
+  </a:objectDefaults>
+  <a:extraClrSchemeLst/>
+</a:theme>
 </file>
--- a/project-final.pptx
+++ b/project-final.pptx
@@ -952,7 +952,7 @@
           <a:lstStyle/>
           <a:p>
             <a:r>
-              <a:t>Show that validation is real: bad payloads get HTTP 422. In the verified run, 19,317 records were ingested with 0 rejected.</a:t>
+              <a:t>Show that validation is real: bad payloads get HTTP 422. In the verified run, 13,980 records were ingested with 0 rejected.</a:t>
             </a:r>
           </a:p>
         </p:txBody>
@@ -1162,7 +1162,7 @@
           <a:lstStyle/>
           <a:p>
             <a:r>
-              <a:t>Delay label is defined by a finish-date threshold tau. Features are project-control signals. SVM won on ROC-AUC (0.969). Softmax/MPP adds a probabilistic reliability view.</a:t>
+              <a:t>Delay label is defined by a finish-date threshold tau. Features are project-control signals. Gradient Boosting won on ROC-AUC (0.976). Softmax/MPP adds a probabilistic reliability view.</a:t>
             </a:r>
           </a:p>
         </p:txBody>
@@ -1722,7 +1722,7 @@
           <a:lstStyle/>
           <a:p>
             <a:r>
-              <a:t>Table II: SVM best at ROC-AUC 0.969, F1 0.811. Explain why ROC-AUC/F1 matter more than raw accuracy on imbalanced delay data.</a:t>
+              <a:t>Table II: Gradient Boosting best at ROC-AUC 0.976; calibrated SVM best F1 0.784. Explain why ROC-AUC/F1 matter more than raw accuracy on imbalanced delay data.</a:t>
             </a:r>
           </a:p>
         </p:txBody>
@@ -6122,13 +6122,48 @@
       </p:sp>
       <p:sp>
         <p:nvSpPr>
-          <p:cNvPr id="15" name="Rounded Rectangle 14"/>
+          <p:cNvPr id="15" name="TextBox 14"/>
+          <p:cNvSpPr txBox="1"/>
+          <p:nvPr/>
+        </p:nvSpPr>
+        <p:spPr>
+          <a:xfrm>
+            <a:off x="822960" y="5376672"/>
+            <a:ext cx="10607040" cy="292608"/>
+          </a:xfrm>
+          <a:prstGeom prst="rect">
+            <a:avLst/>
+          </a:prstGeom>
+          <a:noFill/>
+        </p:spPr>
+        <p:txBody>
+          <a:bodyPr wrap="square" anchor="t" lIns="0" rIns="0" tIns="0" bIns="0">
+            <a:spAutoFit/>
+          </a:bodyPr>
+          <a:lstStyle/>
+          <a:p>
+            <a:pPr algn="l"/>
+            <a:r>
+              <a:rPr sz="1100" b="1" i="0">
+                <a:solidFill>
+                  <a:srgbClr val="FFFFFF"/>
+                </a:solidFill>
+                <a:latin typeface="Calibri"/>
+              </a:rPr>
+              <a:t>Guide: Dr. Manikandan K  ·  Professor Grade 2, Department of Database Systems, SCSE</a:t>
+            </a:r>
+          </a:p>
+        </p:txBody>
+      </p:sp>
+      <p:sp>
+        <p:nvSpPr>
+          <p:cNvPr id="16" name="Rounded Rectangle 15"/>
           <p:cNvSpPr/>
           <p:nvPr/>
         </p:nvSpPr>
         <p:spPr>
           <a:xfrm>
-            <a:off x="822960" y="5623560"/>
+            <a:off x="822960" y="5779008"/>
             <a:ext cx="928116" cy="365760"/>
           </a:xfrm>
           <a:prstGeom prst="roundRect">
@@ -6179,13 +6214,13 @@
       </p:sp>
       <p:sp>
         <p:nvSpPr>
-          <p:cNvPr id="16" name="Rounded Rectangle 15"/>
+          <p:cNvPr id="17" name="Rounded Rectangle 16"/>
           <p:cNvSpPr/>
           <p:nvPr/>
         </p:nvSpPr>
         <p:spPr>
           <a:xfrm>
-            <a:off x="1888236" y="5623560"/>
+            <a:off x="1888236" y="5779008"/>
             <a:ext cx="1216152" cy="365760"/>
           </a:xfrm>
           <a:prstGeom prst="roundRect">
@@ -6236,13 +6271,13 @@
       </p:sp>
       <p:sp>
         <p:nvSpPr>
-          <p:cNvPr id="17" name="Rounded Rectangle 16"/>
+          <p:cNvPr id="18" name="Rounded Rectangle 17"/>
           <p:cNvSpPr/>
           <p:nvPr/>
         </p:nvSpPr>
         <p:spPr>
           <a:xfrm>
-            <a:off x="3241548" y="5623560"/>
+            <a:off x="3241548" y="5779008"/>
             <a:ext cx="1408176" cy="365760"/>
           </a:xfrm>
           <a:prstGeom prst="roundRect">
@@ -6293,13 +6328,13 @@
       </p:sp>
       <p:sp>
         <p:nvSpPr>
-          <p:cNvPr id="18" name="Rounded Rectangle 17"/>
+          <p:cNvPr id="19" name="Rounded Rectangle 18"/>
           <p:cNvSpPr/>
           <p:nvPr/>
         </p:nvSpPr>
         <p:spPr>
           <a:xfrm>
-            <a:off x="4786883" y="5623560"/>
+            <a:off x="4786883" y="5779008"/>
             <a:ext cx="1024128" cy="365760"/>
           </a:xfrm>
           <a:prstGeom prst="roundRect">
@@ -6350,13 +6385,13 @@
       </p:sp>
       <p:sp>
         <p:nvSpPr>
-          <p:cNvPr id="19" name="Rounded Rectangle 18"/>
+          <p:cNvPr id="20" name="Rounded Rectangle 19"/>
           <p:cNvSpPr/>
           <p:nvPr/>
         </p:nvSpPr>
         <p:spPr>
           <a:xfrm>
-            <a:off x="5948171" y="5623560"/>
+            <a:off x="5948171" y="5779008"/>
             <a:ext cx="832104" cy="365760"/>
           </a:xfrm>
           <a:prstGeom prst="roundRect">
@@ -6407,13 +6442,13 @@
       </p:sp>
       <p:sp>
         <p:nvSpPr>
-          <p:cNvPr id="20" name="Rounded Rectangle 19"/>
+          <p:cNvPr id="21" name="Rounded Rectangle 20"/>
           <p:cNvSpPr/>
           <p:nvPr/>
         </p:nvSpPr>
         <p:spPr>
           <a:xfrm>
-            <a:off x="6917436" y="5623560"/>
+            <a:off x="6917436" y="5779008"/>
             <a:ext cx="1216152" cy="365760"/>
           </a:xfrm>
           <a:prstGeom prst="roundRect">
@@ -11057,7 +11092,7 @@
                 </a:solidFill>
                 <a:latin typeface="Calibri"/>
               </a:rPr>
-              <a:t>19,317 records ingested — 0 rejected in the verified run</a:t>
+              <a:t>13,980 records ingested — 0 rejected in the verified run</a:t>
             </a:r>
           </a:p>
         </p:txBody>
@@ -13042,7 +13077,7 @@
                           </a:solidFill>
                           <a:latin typeface="Calibri"/>
                         </a:rPr>
-                        <a:t>0.880</a:t>
+                        <a:t>0.900</a:t>
                       </a:r>
                     </a:p>
                   </a:txBody>
@@ -13064,7 +13099,7 @@
                           </a:solidFill>
                           <a:latin typeface="Calibri"/>
                         </a:rPr>
-                        <a:t>0.704</a:t>
+                        <a:t>0.700</a:t>
                       </a:r>
                     </a:p>
                   </a:txBody>
@@ -13086,7 +13121,7 @@
                           </a:solidFill>
                           <a:latin typeface="Calibri"/>
                         </a:rPr>
-                        <a:t>0.805</a:t>
+                        <a:t>0.856</a:t>
                       </a:r>
                     </a:p>
                   </a:txBody>
@@ -13108,7 +13143,7 @@
                           </a:solidFill>
                           <a:latin typeface="Calibri"/>
                         </a:rPr>
-                        <a:t>0.746</a:t>
+                        <a:t>0.763</a:t>
                       </a:r>
                     </a:p>
                   </a:txBody>
@@ -13130,7 +13165,7 @@
                           </a:solidFill>
                           <a:latin typeface="Calibri"/>
                         </a:rPr>
-                        <a:t>0.955</a:t>
+                        <a:t>0.960</a:t>
                       </a:r>
                     </a:p>
                   </a:txBody>
@@ -13154,7 +13189,7 @@
                           </a:solidFill>
                           <a:latin typeface="Calibri"/>
                         </a:rPr>
-                        <a:t>Gradient Boosting</a:t>
+                        <a:t>Gradient Boosting (selected)</a:t>
                       </a:r>
                     </a:p>
                   </a:txBody>
@@ -13176,7 +13211,7 @@
                           </a:solidFill>
                           <a:latin typeface="Calibri"/>
                         </a:rPr>
-                        <a:t>0.903</a:t>
+                        <a:t>0.913</a:t>
                       </a:r>
                     </a:p>
                   </a:txBody>
@@ -13198,7 +13233,7 @@
                           </a:solidFill>
                           <a:latin typeface="Calibri"/>
                         </a:rPr>
-                        <a:t>0.820</a:t>
+                        <a:t>0.789</a:t>
                       </a:r>
                     </a:p>
                   </a:txBody>
@@ -13220,7 +13255,7 @@
                           </a:solidFill>
                           <a:latin typeface="Calibri"/>
                         </a:rPr>
-                        <a:t>0.713</a:t>
+                        <a:t>0.730</a:t>
                       </a:r>
                     </a:p>
                   </a:txBody>
@@ -13242,7 +13277,7 @@
                           </a:solidFill>
                           <a:latin typeface="Calibri"/>
                         </a:rPr>
-                        <a:t>0.762</a:t>
+                        <a:t>0.748</a:t>
                       </a:r>
                     </a:p>
                   </a:txBody>
@@ -13264,7 +13299,7 @@
                           </a:solidFill>
                           <a:latin typeface="Calibri"/>
                         </a:rPr>
-                        <a:t>0.943</a:t>
+                        <a:t>0.976</a:t>
                       </a:r>
                     </a:p>
                   </a:txBody>
@@ -13288,7 +13323,7 @@
                           </a:solidFill>
                           <a:latin typeface="Calibri"/>
                         </a:rPr>
-                        <a:t>SVM (selected)</a:t>
+                        <a:t>Calibrated SVM</a:t>
                       </a:r>
                     </a:p>
                   </a:txBody>
@@ -13332,7 +13367,7 @@
                           </a:solidFill>
                           <a:latin typeface="Calibri"/>
                         </a:rPr>
-                        <a:t>0.849</a:t>
+                        <a:t>0.799</a:t>
                       </a:r>
                     </a:p>
                   </a:txBody>
@@ -13354,7 +13389,7 @@
                           </a:solidFill>
                           <a:latin typeface="Calibri"/>
                         </a:rPr>
-                        <a:t>0.791</a:t>
+                        <a:t>0.785</a:t>
                       </a:r>
                     </a:p>
                   </a:txBody>
@@ -13376,7 +13411,7 @@
                           </a:solidFill>
                           <a:latin typeface="Calibri"/>
                         </a:rPr>
-                        <a:t>0.811</a:t>
+                        <a:t>0.784</a:t>
                       </a:r>
                     </a:p>
                   </a:txBody>
@@ -13398,7 +13433,7 @@
                           </a:solidFill>
                           <a:latin typeface="Calibri"/>
                         </a:rPr>
-                        <a:t>0.969</a:t>
+                        <a:t>0.949</a:t>
                       </a:r>
                     </a:p>
                   </a:txBody>
@@ -19491,7 +19526,7 @@
                           </a:solidFill>
                           <a:latin typeface="Calibri"/>
                         </a:rPr>
-                        <a:t>0.880</a:t>
+                        <a:t>0.900</a:t>
                       </a:r>
                     </a:p>
                   </a:txBody>
@@ -19513,7 +19548,7 @@
                           </a:solidFill>
                           <a:latin typeface="Calibri"/>
                         </a:rPr>
-                        <a:t>0.704</a:t>
+                        <a:t>0.700</a:t>
                       </a:r>
                     </a:p>
                   </a:txBody>
@@ -19535,7 +19570,7 @@
                           </a:solidFill>
                           <a:latin typeface="Calibri"/>
                         </a:rPr>
-                        <a:t>0.805</a:t>
+                        <a:t>0.856</a:t>
                       </a:r>
                     </a:p>
                   </a:txBody>
@@ -19557,7 +19592,7 @@
                           </a:solidFill>
                           <a:latin typeface="Calibri"/>
                         </a:rPr>
-                        <a:t>0.746</a:t>
+                        <a:t>0.763</a:t>
                       </a:r>
                     </a:p>
                   </a:txBody>
@@ -19579,7 +19614,7 @@
                           </a:solidFill>
                           <a:latin typeface="Calibri"/>
                         </a:rPr>
-                        <a:t>0.955</a:t>
+                        <a:t>0.960</a:t>
                       </a:r>
                     </a:p>
                   </a:txBody>
@@ -19603,7 +19638,7 @@
                           </a:solidFill>
                           <a:latin typeface="Calibri"/>
                         </a:rPr>
-                        <a:t>Gradient Boosting</a:t>
+                        <a:t>Gradient Boosting (selected)</a:t>
                       </a:r>
                     </a:p>
                   </a:txBody>
@@ -19625,7 +19660,7 @@
                           </a:solidFill>
                           <a:latin typeface="Calibri"/>
                         </a:rPr>
-                        <a:t>0.903</a:t>
+                        <a:t>0.913</a:t>
                       </a:r>
                     </a:p>
                   </a:txBody>
@@ -19647,7 +19682,7 @@
                           </a:solidFill>
                           <a:latin typeface="Calibri"/>
                         </a:rPr>
-                        <a:t>0.820</a:t>
+                        <a:t>0.789</a:t>
                       </a:r>
                     </a:p>
                   </a:txBody>
@@ -19669,7 +19704,7 @@
                           </a:solidFill>
                           <a:latin typeface="Calibri"/>
                         </a:rPr>
-                        <a:t>0.713</a:t>
+                        <a:t>0.730</a:t>
                       </a:r>
                     </a:p>
                   </a:txBody>
@@ -19691,7 +19726,7 @@
                           </a:solidFill>
                           <a:latin typeface="Calibri"/>
                         </a:rPr>
-                        <a:t>0.762</a:t>
+                        <a:t>0.748</a:t>
                       </a:r>
                     </a:p>
                   </a:txBody>
@@ -19713,7 +19748,7 @@
                           </a:solidFill>
                           <a:latin typeface="Calibri"/>
                         </a:rPr>
-                        <a:t>0.943</a:t>
+                        <a:t>0.976</a:t>
                       </a:r>
                     </a:p>
                   </a:txBody>
@@ -19737,7 +19772,7 @@
                           </a:solidFill>
                           <a:latin typeface="Calibri"/>
                         </a:rPr>
-                        <a:t>SVM (selected)</a:t>
+                        <a:t>Calibrated SVM</a:t>
                       </a:r>
                     </a:p>
                   </a:txBody>
@@ -19781,7 +19816,7 @@
                           </a:solidFill>
                           <a:latin typeface="Calibri"/>
                         </a:rPr>
-                        <a:t>0.849</a:t>
+                        <a:t>0.799</a:t>
                       </a:r>
                     </a:p>
                   </a:txBody>
@@ -19803,7 +19838,7 @@
                           </a:solidFill>
                           <a:latin typeface="Calibri"/>
                         </a:rPr>
-                        <a:t>0.791</a:t>
+                        <a:t>0.785</a:t>
                       </a:r>
                     </a:p>
                   </a:txBody>
@@ -19825,7 +19860,7 @@
                           </a:solidFill>
                           <a:latin typeface="Calibri"/>
                         </a:rPr>
-                        <a:t>0.811</a:t>
+                        <a:t>0.784</a:t>
                       </a:r>
                     </a:p>
                   </a:txBody>
@@ -19847,7 +19882,7 @@
                           </a:solidFill>
                           <a:latin typeface="Calibri"/>
                         </a:rPr>
-                        <a:t>0.969</a:t>
+                        <a:t>0.949</a:t>
                       </a:r>
                     </a:p>
                   </a:txBody>
@@ -19892,7 +19927,7 @@
                 </a:solidFill>
                 <a:latin typeface="Calibri"/>
               </a:rPr>
-              <a:t>SVM selected by highest ROC-AUC (0.969).</a:t>
+              <a:t>Gradient Boosting selected by highest ROC-AUC (0.976).</a:t>
             </a:r>
           </a:p>
         </p:txBody>
@@ -20030,7 +20065,7 @@
                 </a:solidFill>
                 <a:latin typeface="Calibri"/>
               </a:rPr>
-              <a:t>•  ROC-AUC 0.969 means strong separation of delayed vs. on-time activities.</a:t>
+              <a:t>•  ROC-AUC 0.976 means strong separation of delayed vs. on-time activities.</a:t>
             </a:r>
           </a:p>
           <a:p>
@@ -20046,7 +20081,7 @@
                 </a:solidFill>
                 <a:latin typeface="Calibri"/>
               </a:rPr>
-              <a:t>•  F1 0.811 balances precision and recall for actionable alerts.</a:t>
+              <a:t>•  F1 0.784 balances precision and recall for actionable alerts.</a:t>
             </a:r>
           </a:p>
           <a:p>
@@ -21257,7 +21292,7 @@
                 </a:solidFill>
                 <a:latin typeface="Calibri"/>
               </a:rPr>
-              <a:t>19,317 records ingested, 0 rejected; malformed payloads return HTTP 422</a:t>
+              <a:t>13,980 records ingested, 0 rejected; malformed payloads return HTTP 422</a:t>
             </a:r>
           </a:p>
         </p:txBody>
@@ -23179,7 +23214,7 @@
                 </a:solidFill>
                 <a:latin typeface="Calibri"/>
               </a:rPr>
-              <a:t>•  Calibrated SVM achieving 0.969 ROC-AUC on delay prediction.</a:t>
+              <a:t>•  Gradient Boosting achieving 0.976 ROC-AUC on delay prediction.</a:t>
             </a:r>
           </a:p>
           <a:p>
@@ -24704,7 +24739,7 @@
                 </a:solidFill>
                 <a:latin typeface="Calibri"/>
               </a:rPr>
-              <a:t>OVERVIEW</a:t>
+              <a:t>02 — OVERVIEW</a:t>
             </a:r>
           </a:p>
         </p:txBody>
@@ -25470,7 +25505,7 @@
                 </a:solidFill>
                 <a:latin typeface="Calibri"/>
               </a:rPr>
-              <a:t>OVERVIEW</a:t>
+              <a:t>02 — OVERVIEW</a:t>
             </a:r>
           </a:p>
         </p:txBody>
@@ -27080,7 +27115,7 @@
                 </a:solidFill>
                 <a:latin typeface="Calibri"/>
               </a:rPr>
-              <a:t>OVERVIEW</a:t>
+              <a:t>02 — OVERVIEW</a:t>
             </a:r>
           </a:p>
         </p:txBody>
